--- a/docs/答辩演示-2026-10-21.pptx
+++ b/docs/答辩演示-2026-10-21.pptx
@@ -5323,7 +5323,7 @@
                 </a:solidFill>
                 <a:latin typeface="Microsoft YaHei"/>
               </a:rPr>
-              <a:t>16 张表 / 直接 SQL</a:t>
+              <a:t>17 张表 / 直接 SQL</a:t>
             </a:r>
           </a:p>
           <a:p>
@@ -8896,7 +8896,7 @@
                 </a:solidFill>
                 <a:latin typeface="Microsoft YaHei"/>
               </a:rPr>
-              <a:t>源码 76 个文件 / 38 个 .cj（业务）+ 46 个 .cj（框架快照）；构建 2 s 381 ms</a:t>
+              <a:t>76 个参与编译的源文件 = 38 业务 .cj + 38 框架 .cj（框架快照共 46 个，8 个不进编译）；构建 2 s 381 ms</a:t>
             </a:r>
           </a:p>
         </p:txBody>

--- a/docs/答辩演示-2026-10-21.pptx
+++ b/docs/答辩演示-2026-10-21.pptx
@@ -261,6 +261,1166 @@
     <c:autoUpdate val="0"/>
   </c:externalData>
 </c:chartSpace>
+</file>
+
+<file path=ppt/notesMasters/notesMaster1.xml><?xml version="1.0" encoding="utf-8"?>
+<p:notesMaster xmlns:a="http://schemas.openxmlformats.org/drawingml/2006/main" xmlns:p="http://schemas.openxmlformats.org/presentationml/2006/main" xmlns:r="http://schemas.openxmlformats.org/officeDocument/2006/relationships">
+  <p:cSld>
+    <p:bg>
+      <p:bgRef idx="1001">
+        <a:schemeClr val="bg1"/>
+      </p:bgRef>
+    </p:bg>
+    <p:spTree>
+      <p:nvGrpSpPr>
+        <p:cNvPr id="1" name=""/>
+        <p:cNvGrpSpPr/>
+        <p:nvPr/>
+      </p:nvGrpSpPr>
+      <p:grpSpPr>
+        <a:xfrm>
+          <a:off x="0" y="0"/>
+          <a:ext cx="0" cy="0"/>
+          <a:chOff x="0" y="0"/>
+          <a:chExt cx="0" cy="0"/>
+        </a:xfrm>
+      </p:grpSpPr>
+      <p:sp>
+        <p:nvSpPr>
+          <p:cNvPr id="2" name="Header Placeholder 1"/>
+          <p:cNvSpPr>
+            <a:spLocks noGrp="1"/>
+          </p:cNvSpPr>
+          <p:nvPr>
+            <p:ph type="hdr" sz="quarter"/>
+          </p:nvPr>
+        </p:nvSpPr>
+        <p:spPr>
+          <a:xfrm>
+            <a:off x="0" y="0"/>
+            <a:ext cx="2971800" cy="457200"/>
+          </a:xfrm>
+          <a:prstGeom prst="rect">
+            <a:avLst/>
+          </a:prstGeom>
+        </p:spPr>
+        <p:txBody>
+          <a:bodyPr vert="horz" lIns="91440" tIns="45720" rIns="91440" bIns="45720" rtlCol="0"/>
+          <a:lstStyle>
+            <a:lvl1pPr algn="l">
+              <a:defRPr sz="1200"/>
+            </a:lvl1pPr>
+          </a:lstStyle>
+          <a:p>
+            <a:endParaRPr lang="en-US"/>
+          </a:p>
+        </p:txBody>
+      </p:sp>
+      <p:sp>
+        <p:nvSpPr>
+          <p:cNvPr id="3" name="Date Placeholder 2"/>
+          <p:cNvSpPr>
+            <a:spLocks noGrp="1"/>
+          </p:cNvSpPr>
+          <p:nvPr>
+            <p:ph type="dt" idx="1"/>
+          </p:nvPr>
+        </p:nvSpPr>
+        <p:spPr>
+          <a:xfrm>
+            <a:off x="3884613" y="0"/>
+            <a:ext cx="2971800" cy="457200"/>
+          </a:xfrm>
+          <a:prstGeom prst="rect">
+            <a:avLst/>
+          </a:prstGeom>
+        </p:spPr>
+        <p:txBody>
+          <a:bodyPr vert="horz" lIns="91440" tIns="45720" rIns="91440" bIns="45720" rtlCol="0"/>
+          <a:lstStyle>
+            <a:lvl1pPr algn="r">
+              <a:defRPr sz="1200"/>
+            </a:lvl1pPr>
+          </a:lstStyle>
+          <a:p>
+            <a:fld id="{0F89C1C7-3DCD-1040-A9CF-14679D8B5DDD}" type="datetimeFigureOut">
+              <a:rPr lang="en-US" smtClean="0"/>
+              <a:t>10/17/16</a:t>
+            </a:fld>
+            <a:endParaRPr lang="en-US"/>
+          </a:p>
+        </p:txBody>
+      </p:sp>
+      <p:sp>
+        <p:nvSpPr>
+          <p:cNvPr id="4" name="Slide Image Placeholder 3"/>
+          <p:cNvSpPr>
+            <a:spLocks noGrp="1" noRot="1" noChangeAspect="1"/>
+          </p:cNvSpPr>
+          <p:nvPr>
+            <p:ph type="sldImg" idx="2"/>
+          </p:nvPr>
+        </p:nvSpPr>
+        <p:spPr>
+          <a:xfrm>
+            <a:off x="1143000" y="685800"/>
+            <a:ext cx="4572000" cy="3429000"/>
+          </a:xfrm>
+          <a:prstGeom prst="rect">
+            <a:avLst/>
+          </a:prstGeom>
+          <a:noFill/>
+          <a:ln w="12700">
+            <a:solidFill>
+              <a:prstClr val="black"/>
+            </a:solidFill>
+          </a:ln>
+        </p:spPr>
+        <p:txBody>
+          <a:bodyPr vert="horz" lIns="91440" tIns="45720" rIns="91440" bIns="45720" rtlCol="0" anchor="ctr"/>
+          <a:lstStyle/>
+          <a:p>
+            <a:endParaRPr lang="en-US"/>
+          </a:p>
+        </p:txBody>
+      </p:sp>
+      <p:sp>
+        <p:nvSpPr>
+          <p:cNvPr id="5" name="Notes Placeholder 4"/>
+          <p:cNvSpPr>
+            <a:spLocks noGrp="1"/>
+          </p:cNvSpPr>
+          <p:nvPr>
+            <p:ph type="body" sz="quarter" idx="3"/>
+          </p:nvPr>
+        </p:nvSpPr>
+        <p:spPr>
+          <a:xfrm>
+            <a:off x="685800" y="4343400"/>
+            <a:ext cx="5486400" cy="4114800"/>
+          </a:xfrm>
+          <a:prstGeom prst="rect">
+            <a:avLst/>
+          </a:prstGeom>
+        </p:spPr>
+        <p:txBody>
+          <a:bodyPr vert="horz" lIns="91440" tIns="45720" rIns="91440" bIns="45720" rtlCol="0"/>
+          <a:lstStyle/>
+          <a:p>
+            <a:pPr lvl="0"/>
+            <a:r>
+              <a:rPr lang="en-US" smtClean="0"/>
+              <a:t>Click to edit Master text styles</a:t>
+            </a:r>
+          </a:p>
+          <a:p>
+            <a:pPr lvl="1"/>
+            <a:r>
+              <a:rPr lang="en-US" smtClean="0"/>
+              <a:t>Second level</a:t>
+            </a:r>
+          </a:p>
+          <a:p>
+            <a:pPr lvl="2"/>
+            <a:r>
+              <a:rPr lang="en-US" smtClean="0"/>
+              <a:t>Third level</a:t>
+            </a:r>
+          </a:p>
+          <a:p>
+            <a:pPr lvl="3"/>
+            <a:r>
+              <a:rPr lang="en-US" smtClean="0"/>
+              <a:t>Fourth level</a:t>
+            </a:r>
+          </a:p>
+          <a:p>
+            <a:pPr lvl="4"/>
+            <a:r>
+              <a:rPr lang="en-US" smtClean="0"/>
+              <a:t>Fifth level</a:t>
+            </a:r>
+            <a:endParaRPr lang="en-US"/>
+          </a:p>
+        </p:txBody>
+      </p:sp>
+      <p:sp>
+        <p:nvSpPr>
+          <p:cNvPr id="6" name="Footer Placeholder 5"/>
+          <p:cNvSpPr>
+            <a:spLocks noGrp="1"/>
+          </p:cNvSpPr>
+          <p:nvPr>
+            <p:ph type="ftr" sz="quarter" idx="4"/>
+          </p:nvPr>
+        </p:nvSpPr>
+        <p:spPr>
+          <a:xfrm>
+            <a:off x="0" y="8685213"/>
+            <a:ext cx="2971800" cy="457200"/>
+          </a:xfrm>
+          <a:prstGeom prst="rect">
+            <a:avLst/>
+          </a:prstGeom>
+        </p:spPr>
+        <p:txBody>
+          <a:bodyPr vert="horz" lIns="91440" tIns="45720" rIns="91440" bIns="45720" rtlCol="0" anchor="b"/>
+          <a:lstStyle>
+            <a:lvl1pPr algn="l">
+              <a:defRPr sz="1200"/>
+            </a:lvl1pPr>
+          </a:lstStyle>
+          <a:p>
+            <a:endParaRPr lang="en-US"/>
+          </a:p>
+        </p:txBody>
+      </p:sp>
+      <p:sp>
+        <p:nvSpPr>
+          <p:cNvPr id="7" name="Slide Number Placeholder 6"/>
+          <p:cNvSpPr>
+            <a:spLocks noGrp="1"/>
+          </p:cNvSpPr>
+          <p:nvPr>
+            <p:ph type="sldNum" sz="quarter" idx="5"/>
+          </p:nvPr>
+        </p:nvSpPr>
+        <p:spPr>
+          <a:xfrm>
+            <a:off x="3884613" y="8685213"/>
+            <a:ext cx="2971800" cy="457200"/>
+          </a:xfrm>
+          <a:prstGeom prst="rect">
+            <a:avLst/>
+          </a:prstGeom>
+        </p:spPr>
+        <p:txBody>
+          <a:bodyPr vert="horz" lIns="91440" tIns="45720" rIns="91440" bIns="45720" rtlCol="0" anchor="b"/>
+          <a:lstStyle>
+            <a:lvl1pPr algn="r">
+              <a:defRPr sz="1200"/>
+            </a:lvl1pPr>
+          </a:lstStyle>
+          <a:p>
+            <a:fld id="{BB5E49A5-4136-284D-997B-48E1D791AD67}" type="slidenum">
+              <a:rPr lang="en-US" smtClean="0"/>
+              <a:t>‹#›</a:t>
+            </a:fld>
+            <a:endParaRPr lang="en-US"/>
+          </a:p>
+        </p:txBody>
+      </p:sp>
+    </p:spTree>
+    <p:extLst>
+      <p:ext uri="{BB962C8B-B14F-4D97-AF65-F5344CB8AC3E}">
+        <p14:creationId xmlns:p14="http://schemas.microsoft.com/office/powerpoint/2010/main" val="2623252185"/>
+      </p:ext>
+    </p:extLst>
+  </p:cSld>
+  <p:clrMap bg1="lt1" tx1="dk1" bg2="lt2" tx2="dk2" accent1="accent1" accent2="accent2" accent3="accent3" accent4="accent4" accent5="accent5" accent6="accent6" hlink="hlink" folHlink="folHlink"/>
+  <p:notesStyle>
+    <a:lvl1pPr marL="0" algn="l" defTabSz="457200" rtl="0" eaLnBrk="1" latinLnBrk="0" hangingPunct="1">
+      <a:defRPr sz="1200" kern="1200">
+        <a:solidFill>
+          <a:schemeClr val="tx1"/>
+        </a:solidFill>
+        <a:latin typeface="+mn-lt"/>
+        <a:ea typeface="+mn-ea"/>
+        <a:cs typeface="+mn-cs"/>
+      </a:defRPr>
+    </a:lvl1pPr>
+    <a:lvl2pPr marL="457200" algn="l" defTabSz="457200" rtl="0" eaLnBrk="1" latinLnBrk="0" hangingPunct="1">
+      <a:defRPr sz="1200" kern="1200">
+        <a:solidFill>
+          <a:schemeClr val="tx1"/>
+        </a:solidFill>
+        <a:latin typeface="+mn-lt"/>
+        <a:ea typeface="+mn-ea"/>
+        <a:cs typeface="+mn-cs"/>
+      </a:defRPr>
+    </a:lvl2pPr>
+    <a:lvl3pPr marL="914400" algn="l" defTabSz="457200" rtl="0" eaLnBrk="1" latinLnBrk="0" hangingPunct="1">
+      <a:defRPr sz="1200" kern="1200">
+        <a:solidFill>
+          <a:schemeClr val="tx1"/>
+        </a:solidFill>
+        <a:latin typeface="+mn-lt"/>
+        <a:ea typeface="+mn-ea"/>
+        <a:cs typeface="+mn-cs"/>
+      </a:defRPr>
+    </a:lvl3pPr>
+    <a:lvl4pPr marL="1371600" algn="l" defTabSz="457200" rtl="0" eaLnBrk="1" latinLnBrk="0" hangingPunct="1">
+      <a:defRPr sz="1200" kern="1200">
+        <a:solidFill>
+          <a:schemeClr val="tx1"/>
+        </a:solidFill>
+        <a:latin typeface="+mn-lt"/>
+        <a:ea typeface="+mn-ea"/>
+        <a:cs typeface="+mn-cs"/>
+      </a:defRPr>
+    </a:lvl4pPr>
+    <a:lvl5pPr marL="1828800" algn="l" defTabSz="457200" rtl="0" eaLnBrk="1" latinLnBrk="0" hangingPunct="1">
+      <a:defRPr sz="1200" kern="1200">
+        <a:solidFill>
+          <a:schemeClr val="tx1"/>
+        </a:solidFill>
+        <a:latin typeface="+mn-lt"/>
+        <a:ea typeface="+mn-ea"/>
+        <a:cs typeface="+mn-cs"/>
+      </a:defRPr>
+    </a:lvl5pPr>
+    <a:lvl6pPr marL="2286000" algn="l" defTabSz="457200" rtl="0" eaLnBrk="1" latinLnBrk="0" hangingPunct="1">
+      <a:defRPr sz="1200" kern="1200">
+        <a:solidFill>
+          <a:schemeClr val="tx1"/>
+        </a:solidFill>
+        <a:latin typeface="+mn-lt"/>
+        <a:ea typeface="+mn-ea"/>
+        <a:cs typeface="+mn-cs"/>
+      </a:defRPr>
+    </a:lvl6pPr>
+    <a:lvl7pPr marL="2743200" algn="l" defTabSz="457200" rtl="0" eaLnBrk="1" latinLnBrk="0" hangingPunct="1">
+      <a:defRPr sz="1200" kern="1200">
+        <a:solidFill>
+          <a:schemeClr val="tx1"/>
+        </a:solidFill>
+        <a:latin typeface="+mn-lt"/>
+        <a:ea typeface="+mn-ea"/>
+        <a:cs typeface="+mn-cs"/>
+      </a:defRPr>
+    </a:lvl7pPr>
+    <a:lvl8pPr marL="3200400" algn="l" defTabSz="457200" rtl="0" eaLnBrk="1" latinLnBrk="0" hangingPunct="1">
+      <a:defRPr sz="1200" kern="1200">
+        <a:solidFill>
+          <a:schemeClr val="tx1"/>
+        </a:solidFill>
+        <a:latin typeface="+mn-lt"/>
+        <a:ea typeface="+mn-ea"/>
+        <a:cs typeface="+mn-cs"/>
+      </a:defRPr>
+    </a:lvl8pPr>
+    <a:lvl9pPr marL="3657600" algn="l" defTabSz="457200" rtl="0" eaLnBrk="1" latinLnBrk="0" hangingPunct="1">
+      <a:defRPr sz="1200" kern="1200">
+        <a:solidFill>
+          <a:schemeClr val="tx1"/>
+        </a:solidFill>
+        <a:latin typeface="+mn-lt"/>
+        <a:ea typeface="+mn-ea"/>
+        <a:cs typeface="+mn-cs"/>
+      </a:defRPr>
+    </a:lvl9pPr>
+  </p:notesStyle>
+</p:notesMaster>
+</file>
+
+<file path=ppt/notesSlides/notesSlide1.xml><?xml version="1.0" encoding="utf-8"?>
+<p:notes xmlns:a="http://schemas.openxmlformats.org/drawingml/2006/main" xmlns:p="http://schemas.openxmlformats.org/presentationml/2006/main" xmlns:r="http://schemas.openxmlformats.org/officeDocument/2006/relationships">
+  <p:cSld>
+    <p:spTree>
+      <p:nvGrpSpPr>
+        <p:cNvPr id="1" name=""/>
+        <p:cNvGrpSpPr/>
+        <p:nvPr/>
+      </p:nvGrpSpPr>
+      <p:grpSpPr>
+        <a:xfrm>
+          <a:off x="0" y="0"/>
+          <a:ext cx="0" cy="0"/>
+          <a:chOff x="0" y="0"/>
+          <a:chExt cx="0" cy="0"/>
+        </a:xfrm>
+      </p:grpSpPr>
+      <p:sp>
+        <p:nvSpPr>
+          <p:cNvPr id="2" name="Slide Image Placeholder 1"/>
+          <p:cNvSpPr>
+            <a:spLocks noGrp="1"/>
+          </p:cNvSpPr>
+          <p:nvPr>
+            <p:ph type="sldImg" idx="2"/>
+          </p:nvPr>
+        </p:nvSpPr>
+        <p:spPr/>
+      </p:sp>
+      <p:sp>
+        <p:nvSpPr>
+          <p:cNvPr id="3" name="Notes Placeholder 2"/>
+          <p:cNvSpPr>
+            <a:spLocks noGrp="1"/>
+          </p:cNvSpPr>
+          <p:nvPr>
+            <p:ph type="body" idx="3" sz="quarter"/>
+          </p:nvPr>
+        </p:nvSpPr>
+        <p:spPr/>
+        <p:txBody>
+          <a:bodyPr/>
+          <a:lstStyle/>
+          <a:p>
+            <a:r>
+              <a:t>【1 封面｜0:00–0:30】</a:t>
+            </a:r>
+          </a:p>
+          <a:p>
+            <a:r>
+              <a:t>这是「智慧医院智能导诊就诊系统」：一个**仓颉**服务端、一套契约、三个客户端 —— 鸿蒙患者/医生/管理端、安卓对照端、零依赖管理台。五分钟我只讲五件事：**形态、架构取舍、AI 的真本事与真边界、工程证据、没做到的部分**。</a:t>
+            </a:r>
+          </a:p>
+          <a:p/>
+          <a:p>
+            <a:r>
+              <a:t>（本备注与 docs/答辩材料-2026-10-17.md §一 同源；改一处要同步另一处）</a:t>
+            </a:r>
+          </a:p>
+        </p:txBody>
+      </p:sp>
+      <p:sp>
+        <p:nvSpPr>
+          <p:cNvPr id="4" name="Slide Number Placeholder 3"/>
+          <p:cNvSpPr>
+            <a:spLocks noGrp="1"/>
+          </p:cNvSpPr>
+          <p:nvPr>
+            <p:ph type="sldNum" idx="5" sz="quarter"/>
+          </p:nvPr>
+        </p:nvSpPr>
+        <p:spPr/>
+      </p:sp>
+    </p:spTree>
+  </p:cSld>
+  <p:clrMapOvr>
+    <a:masterClrMapping/>
+  </p:clrMapOvr>
+</p:notes>
+</file>
+
+<file path=ppt/notesSlides/notesSlide10.xml><?xml version="1.0" encoding="utf-8"?>
+<p:notes xmlns:a="http://schemas.openxmlformats.org/drawingml/2006/main" xmlns:p="http://schemas.openxmlformats.org/presentationml/2006/main" xmlns:r="http://schemas.openxmlformats.org/officeDocument/2006/relationships">
+  <p:cSld>
+    <p:spTree>
+      <p:nvGrpSpPr>
+        <p:cNvPr id="1" name=""/>
+        <p:cNvGrpSpPr/>
+        <p:nvPr/>
+      </p:nvGrpSpPr>
+      <p:grpSpPr>
+        <a:xfrm>
+          <a:off x="0" y="0"/>
+          <a:ext cx="0" cy="0"/>
+          <a:chOff x="0" y="0"/>
+          <a:chExt cx="0" cy="0"/>
+        </a:xfrm>
+      </p:grpSpPr>
+      <p:sp>
+        <p:nvSpPr>
+          <p:cNvPr id="2" name="Slide Image Placeholder 1"/>
+          <p:cNvSpPr>
+            <a:spLocks noGrp="1"/>
+          </p:cNvSpPr>
+          <p:nvPr>
+            <p:ph type="sldImg" idx="2"/>
+          </p:nvPr>
+        </p:nvSpPr>
+        <p:spPr/>
+      </p:sp>
+      <p:sp>
+        <p:nvSpPr>
+          <p:cNvPr id="3" name="Notes Placeholder 2"/>
+          <p:cNvSpPr>
+            <a:spLocks noGrp="1"/>
+          </p:cNvSpPr>
+          <p:nvPr>
+            <p:ph type="body" idx="3" sz="quarter"/>
+          </p:nvPr>
+        </p:nvSpPr>
+        <p:spPr/>
+        <p:txBody>
+          <a:bodyPr/>
+          <a:lstStyle/>
+          <a:p>
+            <a:r>
+              <a:t>【10 能做与不能做｜4:30–5:00】</a:t>
+            </a:r>
+          </a:p>
+          <a:p>
+            <a:r>
+              <a:t>没做到的三件我直接说：客户端自动化测试 **0**、向量检索**没接线**（当前是关键词）、工具开关只到**闸门**。下一步：纯函数单测 → 真 embedding → Prompt 版本进调用日志。</a:t>
+            </a:r>
+          </a:p>
+          <a:p/>
+          <a:p>
+            <a:r>
+              <a:t>（本备注与 docs/答辩材料-2026-10-17.md §一 同源；改一处要同步另一处）</a:t>
+            </a:r>
+          </a:p>
+        </p:txBody>
+      </p:sp>
+      <p:sp>
+        <p:nvSpPr>
+          <p:cNvPr id="4" name="Slide Number Placeholder 3"/>
+          <p:cNvSpPr>
+            <a:spLocks noGrp="1"/>
+          </p:cNvSpPr>
+          <p:nvPr>
+            <p:ph type="sldNum" idx="5" sz="quarter"/>
+          </p:nvPr>
+        </p:nvSpPr>
+        <p:spPr/>
+      </p:sp>
+    </p:spTree>
+  </p:cSld>
+  <p:clrMapOvr>
+    <a:masterClrMapping/>
+  </p:clrMapOvr>
+</p:notes>
+</file>
+
+<file path=ppt/notesSlides/notesSlide2.xml><?xml version="1.0" encoding="utf-8"?>
+<p:notes xmlns:a="http://schemas.openxmlformats.org/drawingml/2006/main" xmlns:p="http://schemas.openxmlformats.org/presentationml/2006/main" xmlns:r="http://schemas.openxmlformats.org/officeDocument/2006/relationships">
+  <p:cSld>
+    <p:spTree>
+      <p:nvGrpSpPr>
+        <p:cNvPr id="1" name=""/>
+        <p:cNvGrpSpPr/>
+        <p:nvPr/>
+      </p:nvGrpSpPr>
+      <p:grpSpPr>
+        <a:xfrm>
+          <a:off x="0" y="0"/>
+          <a:ext cx="0" cy="0"/>
+          <a:chOff x="0" y="0"/>
+          <a:chExt cx="0" cy="0"/>
+        </a:xfrm>
+      </p:grpSpPr>
+      <p:sp>
+        <p:nvSpPr>
+          <p:cNvPr id="2" name="Slide Image Placeholder 1"/>
+          <p:cNvSpPr>
+            <a:spLocks noGrp="1"/>
+          </p:cNvSpPr>
+          <p:nvPr>
+            <p:ph type="sldImg" idx="2"/>
+          </p:nvPr>
+        </p:nvSpPr>
+        <p:spPr/>
+      </p:sp>
+      <p:sp>
+        <p:nvSpPr>
+          <p:cNvPr id="3" name="Notes Placeholder 2"/>
+          <p:cNvSpPr>
+            <a:spLocks noGrp="1"/>
+          </p:cNvSpPr>
+          <p:nvPr>
+            <p:ph type="body" idx="3" sz="quarter"/>
+          </p:nvPr>
+        </p:nvSpPr>
+        <p:spPr/>
+        <p:txBody>
+          <a:bodyPr/>
+          <a:lstStyle/>
+          <a:p>
+            <a:r>
+              <a:t>【2 交付了什么｜0:30–1:00】</a:t>
+            </a:r>
+          </a:p>
+          <a:p>
+            <a:r>
+              <a:t>四端都能构建能跑：**81** 个 REST 端点、**24** 份 schema + **67** 个示例、**38** 个业务 `.cj`、**59** 个 `.ets`、**13** 个 `.kt`；外加 **25 文件**安装包与 **821 条**验收断言。</a:t>
+            </a:r>
+          </a:p>
+          <a:p/>
+          <a:p>
+            <a:r>
+              <a:t>（本备注与 docs/答辩材料-2026-10-17.md §一 同源；改一处要同步另一处）</a:t>
+            </a:r>
+          </a:p>
+        </p:txBody>
+      </p:sp>
+      <p:sp>
+        <p:nvSpPr>
+          <p:cNvPr id="4" name="Slide Number Placeholder 3"/>
+          <p:cNvSpPr>
+            <a:spLocks noGrp="1"/>
+          </p:cNvSpPr>
+          <p:nvPr>
+            <p:ph type="sldNum" idx="5" sz="quarter"/>
+          </p:nvPr>
+        </p:nvSpPr>
+        <p:spPr/>
+      </p:sp>
+    </p:spTree>
+  </p:cSld>
+  <p:clrMapOvr>
+    <a:masterClrMapping/>
+  </p:clrMapOvr>
+</p:notes>
+</file>
+
+<file path=ppt/notesSlides/notesSlide3.xml><?xml version="1.0" encoding="utf-8"?>
+<p:notes xmlns:a="http://schemas.openxmlformats.org/drawingml/2006/main" xmlns:p="http://schemas.openxmlformats.org/presentationml/2006/main" xmlns:r="http://schemas.openxmlformats.org/officeDocument/2006/relationships">
+  <p:cSld>
+    <p:spTree>
+      <p:nvGrpSpPr>
+        <p:cNvPr id="1" name=""/>
+        <p:cNvGrpSpPr/>
+        <p:nvPr/>
+      </p:nvGrpSpPr>
+      <p:grpSpPr>
+        <a:xfrm>
+          <a:off x="0" y="0"/>
+          <a:ext cx="0" cy="0"/>
+          <a:chOff x="0" y="0"/>
+          <a:chExt cx="0" cy="0"/>
+        </a:xfrm>
+      </p:grpSpPr>
+      <p:sp>
+        <p:nvSpPr>
+          <p:cNvPr id="2" name="Slide Image Placeholder 1"/>
+          <p:cNvSpPr>
+            <a:spLocks noGrp="1"/>
+          </p:cNvSpPr>
+          <p:nvPr>
+            <p:ph type="sldImg" idx="2"/>
+          </p:nvPr>
+        </p:nvSpPr>
+        <p:spPr/>
+      </p:sp>
+      <p:sp>
+        <p:nvSpPr>
+          <p:cNvPr id="3" name="Notes Placeholder 2"/>
+          <p:cNvSpPr>
+            <a:spLocks noGrp="1"/>
+          </p:cNvSpPr>
+          <p:nvPr>
+            <p:ph type="body" idx="3" sz="quarter"/>
+          </p:nvPr>
+        </p:nvSpPr>
+        <p:spPr/>
+        <p:txBody>
+          <a:bodyPr/>
+          <a:lstStyle/>
+          <a:p>
+            <a:r>
+              <a:t>【3 架构｜1:00–1:30】</a:t>
+            </a:r>
+          </a:p>
+          <a:p>
+            <a:r>
+              <a:t>三个客户端 → **一个 exe** → MariaDB **17 张表**。没有 ORM，SQL 集中、可审计；号源与挂号走独立路径，**扣号是一条带谓词的 UPDATE**，并发安全靠数据库而不是应用锁。</a:t>
+            </a:r>
+          </a:p>
+          <a:p/>
+          <a:p>
+            <a:r>
+              <a:t>（本备注与 docs/答辩材料-2026-10-17.md §一 同源；改一处要同步另一处）</a:t>
+            </a:r>
+          </a:p>
+        </p:txBody>
+      </p:sp>
+      <p:sp>
+        <p:nvSpPr>
+          <p:cNvPr id="4" name="Slide Number Placeholder 3"/>
+          <p:cNvSpPr>
+            <a:spLocks noGrp="1"/>
+          </p:cNvSpPr>
+          <p:nvPr>
+            <p:ph type="sldNum" idx="5" sz="quarter"/>
+          </p:nvPr>
+        </p:nvSpPr>
+        <p:spPr/>
+      </p:sp>
+    </p:spTree>
+  </p:cSld>
+  <p:clrMapOvr>
+    <a:masterClrMapping/>
+  </p:clrMapOvr>
+</p:notes>
+</file>
+
+<file path=ppt/notesSlides/notesSlide4.xml><?xml version="1.0" encoding="utf-8"?>
+<p:notes xmlns:a="http://schemas.openxmlformats.org/drawingml/2006/main" xmlns:p="http://schemas.openxmlformats.org/presentationml/2006/main" xmlns:r="http://schemas.openxmlformats.org/officeDocument/2006/relationships">
+  <p:cSld>
+    <p:spTree>
+      <p:nvGrpSpPr>
+        <p:cNvPr id="1" name=""/>
+        <p:cNvGrpSpPr/>
+        <p:nvPr/>
+      </p:nvGrpSpPr>
+      <p:grpSpPr>
+        <a:xfrm>
+          <a:off x="0" y="0"/>
+          <a:ext cx="0" cy="0"/>
+          <a:chOff x="0" y="0"/>
+          <a:chExt cx="0" cy="0"/>
+        </a:xfrm>
+      </p:grpSpPr>
+      <p:sp>
+        <p:nvSpPr>
+          <p:cNvPr id="2" name="Slide Image Placeholder 1"/>
+          <p:cNvSpPr>
+            <a:spLocks noGrp="1"/>
+          </p:cNvSpPr>
+          <p:nvPr>
+            <p:ph type="sldImg" idx="2"/>
+          </p:nvPr>
+        </p:nvSpPr>
+        <p:spPr/>
+      </p:sp>
+      <p:sp>
+        <p:nvSpPr>
+          <p:cNvPr id="3" name="Notes Placeholder 2"/>
+          <p:cNvSpPr>
+            <a:spLocks noGrp="1"/>
+          </p:cNvSpPr>
+          <p:nvPr>
+            <p:ph type="body" idx="3" sz="quarter"/>
+          </p:nvPr>
+        </p:nvSpPr>
+        <p:spPr/>
+        <p:txBody>
+          <a:bodyPr/>
+          <a:lstStyle/>
+          <a:p>
+            <a:r>
+              <a:t>【4 患者闭环｜1:30–2:00】</a:t>
+            </a:r>
+          </a:p>
+          <a:p>
+            <a:r>
+              <a:t>主诉 → 分诊 → 推荐号源 → 挂号 → 候诊 → 病历，六步全在一个闭环里。**每一步都由服务端裁决**，客户端只负责呈现 —— 这样规则改了不用发版。</a:t>
+            </a:r>
+          </a:p>
+          <a:p/>
+          <a:p>
+            <a:r>
+              <a:t>（本备注与 docs/答辩材料-2026-10-17.md §一 同源；改一处要同步另一处）</a:t>
+            </a:r>
+          </a:p>
+        </p:txBody>
+      </p:sp>
+      <p:sp>
+        <p:nvSpPr>
+          <p:cNvPr id="4" name="Slide Number Placeholder 3"/>
+          <p:cNvSpPr>
+            <a:spLocks noGrp="1"/>
+          </p:cNvSpPr>
+          <p:nvPr>
+            <p:ph type="sldNum" idx="5" sz="quarter"/>
+          </p:nvPr>
+        </p:nvSpPr>
+        <p:spPr/>
+      </p:sp>
+    </p:spTree>
+  </p:cSld>
+  <p:clrMapOvr>
+    <a:masterClrMapping/>
+  </p:clrMapOvr>
+</p:notes>
+</file>
+
+<file path=ppt/notesSlides/notesSlide5.xml><?xml version="1.0" encoding="utf-8"?>
+<p:notes xmlns:a="http://schemas.openxmlformats.org/drawingml/2006/main" xmlns:p="http://schemas.openxmlformats.org/presentationml/2006/main" xmlns:r="http://schemas.openxmlformats.org/officeDocument/2006/relationships">
+  <p:cSld>
+    <p:spTree>
+      <p:nvGrpSpPr>
+        <p:cNvPr id="1" name=""/>
+        <p:cNvGrpSpPr/>
+        <p:nvPr/>
+      </p:nvGrpSpPr>
+      <p:grpSpPr>
+        <a:xfrm>
+          <a:off x="0" y="0"/>
+          <a:ext cx="0" cy="0"/>
+          <a:chOff x="0" y="0"/>
+          <a:chExt cx="0" cy="0"/>
+        </a:xfrm>
+      </p:grpSpPr>
+      <p:sp>
+        <p:nvSpPr>
+          <p:cNvPr id="2" name="Slide Image Placeholder 1"/>
+          <p:cNvSpPr>
+            <a:spLocks noGrp="1"/>
+          </p:cNvSpPr>
+          <p:nvPr>
+            <p:ph type="sldImg" idx="2"/>
+          </p:nvPr>
+        </p:nvSpPr>
+        <p:spPr/>
+      </p:sp>
+      <p:sp>
+        <p:nvSpPr>
+          <p:cNvPr id="3" name="Notes Placeholder 2"/>
+          <p:cNvSpPr>
+            <a:spLocks noGrp="1"/>
+          </p:cNvSpPr>
+          <p:nvPr>
+            <p:ph type="body" idx="3" sz="quarter"/>
+          </p:nvPr>
+        </p:nvSpPr>
+        <p:spPr/>
+        <p:txBody>
+          <a:bodyPr/>
+          <a:lstStyle/>
+          <a:p>
+            <a:r>
+              <a:t>【5 AI｜2:00–2:30】</a:t>
+            </a:r>
+          </a:p>
+          <a:p>
+            <a:r>
+              <a:t>模型**只提议、不决定**：它给出科室名，服务端必须拿真实号源库存校验，不通过就降级成「备选号源」。三条可现场复现的证据：`source=model`、`used_kb=true`、改 Prompt **零重启**生效。</a:t>
+            </a:r>
+          </a:p>
+          <a:p/>
+          <a:p>
+            <a:r>
+              <a:t>（本备注与 docs/答辩材料-2026-10-17.md §一 同源；改一处要同步另一处）</a:t>
+            </a:r>
+          </a:p>
+        </p:txBody>
+      </p:sp>
+      <p:sp>
+        <p:nvSpPr>
+          <p:cNvPr id="4" name="Slide Number Placeholder 3"/>
+          <p:cNvSpPr>
+            <a:spLocks noGrp="1"/>
+          </p:cNvSpPr>
+          <p:nvPr>
+            <p:ph type="sldNum" idx="5" sz="quarter"/>
+          </p:nvPr>
+        </p:nvSpPr>
+        <p:spPr/>
+      </p:sp>
+    </p:spTree>
+  </p:cSld>
+  <p:clrMapOvr>
+    <a:masterClrMapping/>
+  </p:clrMapOvr>
+</p:notes>
+</file>
+
+<file path=ppt/notesSlides/notesSlide6.xml><?xml version="1.0" encoding="utf-8"?>
+<p:notes xmlns:a="http://schemas.openxmlformats.org/drawingml/2006/main" xmlns:p="http://schemas.openxmlformats.org/presentationml/2006/main" xmlns:r="http://schemas.openxmlformats.org/officeDocument/2006/relationships">
+  <p:cSld>
+    <p:spTree>
+      <p:nvGrpSpPr>
+        <p:cNvPr id="1" name=""/>
+        <p:cNvGrpSpPr/>
+        <p:nvPr/>
+      </p:nvGrpSpPr>
+      <p:grpSpPr>
+        <a:xfrm>
+          <a:off x="0" y="0"/>
+          <a:ext cx="0" cy="0"/>
+          <a:chOff x="0" y="0"/>
+          <a:chExt cx="0" cy="0"/>
+        </a:xfrm>
+      </p:grpSpPr>
+      <p:sp>
+        <p:nvSpPr>
+          <p:cNvPr id="2" name="Slide Image Placeholder 1"/>
+          <p:cNvSpPr>
+            <a:spLocks noGrp="1"/>
+          </p:cNvSpPr>
+          <p:nvPr>
+            <p:ph type="sldImg" idx="2"/>
+          </p:nvPr>
+        </p:nvSpPr>
+        <p:spPr/>
+      </p:sp>
+      <p:sp>
+        <p:nvSpPr>
+          <p:cNvPr id="3" name="Notes Placeholder 2"/>
+          <p:cNvSpPr>
+            <a:spLocks noGrp="1"/>
+          </p:cNvSpPr>
+          <p:nvPr>
+            <p:ph type="body" idx="3" sz="quarter"/>
+          </p:nvPr>
+        </p:nvSpPr>
+        <p:spPr/>
+        <p:txBody>
+          <a:bodyPr/>
+          <a:lstStyle/>
+          <a:p>
+            <a:r>
+              <a:t>【6 医生端｜2:30–3:00】</a:t>
+            </a:r>
+          </a:p>
+          <a:p>
+            <a:r>
+              <a:t>到院 → 候诊 → 接诊 → 七段病历 → 提交锁定 → 版本历史。病历**提交后不可改**，解锁是管理员动作且必须填理由；「一键预填」**只补空段**，绝不覆盖医生已经写下的内容。</a:t>
+            </a:r>
+          </a:p>
+          <a:p/>
+          <a:p>
+            <a:r>
+              <a:t>（本备注与 docs/答辩材料-2026-10-17.md §一 同源；改一处要同步另一处）</a:t>
+            </a:r>
+          </a:p>
+        </p:txBody>
+      </p:sp>
+      <p:sp>
+        <p:nvSpPr>
+          <p:cNvPr id="4" name="Slide Number Placeholder 3"/>
+          <p:cNvSpPr>
+            <a:spLocks noGrp="1"/>
+          </p:cNvSpPr>
+          <p:nvPr>
+            <p:ph type="sldNum" idx="5" sz="quarter"/>
+          </p:nvPr>
+        </p:nvSpPr>
+        <p:spPr/>
+      </p:sp>
+    </p:spTree>
+  </p:cSld>
+  <p:clrMapOvr>
+    <a:masterClrMapping/>
+  </p:clrMapOvr>
+</p:notes>
+</file>
+
+<file path=ppt/notesSlides/notesSlide7.xml><?xml version="1.0" encoding="utf-8"?>
+<p:notes xmlns:a="http://schemas.openxmlformats.org/drawingml/2006/main" xmlns:p="http://schemas.openxmlformats.org/presentationml/2006/main" xmlns:r="http://schemas.openxmlformats.org/officeDocument/2006/relationships">
+  <p:cSld>
+    <p:spTree>
+      <p:nvGrpSpPr>
+        <p:cNvPr id="1" name=""/>
+        <p:cNvGrpSpPr/>
+        <p:nvPr/>
+      </p:nvGrpSpPr>
+      <p:grpSpPr>
+        <a:xfrm>
+          <a:off x="0" y="0"/>
+          <a:ext cx="0" cy="0"/>
+          <a:chOff x="0" y="0"/>
+          <a:chExt cx="0" cy="0"/>
+        </a:xfrm>
+      </p:grpSpPr>
+      <p:sp>
+        <p:nvSpPr>
+          <p:cNvPr id="2" name="Slide Image Placeholder 1"/>
+          <p:cNvSpPr>
+            <a:spLocks noGrp="1"/>
+          </p:cNvSpPr>
+          <p:nvPr>
+            <p:ph type="sldImg" idx="2"/>
+          </p:nvPr>
+        </p:nvSpPr>
+        <p:spPr/>
+      </p:sp>
+      <p:sp>
+        <p:nvSpPr>
+          <p:cNvPr id="3" name="Notes Placeholder 2"/>
+          <p:cNvSpPr>
+            <a:spLocks noGrp="1"/>
+          </p:cNvSpPr>
+          <p:nvPr>
+            <p:ph type="body" idx="3" sz="quarter"/>
+          </p:nvPr>
+        </p:nvSpPr>
+        <p:spPr/>
+        <p:txBody>
+          <a:bodyPr/>
+          <a:lstStyle/>
+          <a:p>
+            <a:r>
+              <a:t>【7 管理端｜3:00–3:30】</a:t>
+            </a:r>
+          </a:p>
+          <a:p>
+            <a:r>
+              <a:t>四块：运营看板（数字来自真实聚合，不是写死）、基础数据 CRUD（科室/医生/账号/排班）、AI 能力中心（模型·Prompt·工具闸门）、知识库（文档→切块→关键词检索）。</a:t>
+            </a:r>
+          </a:p>
+          <a:p/>
+          <a:p>
+            <a:r>
+              <a:t>（本备注与 docs/答辩材料-2026-10-17.md §一 同源；改一处要同步另一处）</a:t>
+            </a:r>
+          </a:p>
+        </p:txBody>
+      </p:sp>
+      <p:sp>
+        <p:nvSpPr>
+          <p:cNvPr id="4" name="Slide Number Placeholder 3"/>
+          <p:cNvSpPr>
+            <a:spLocks noGrp="1"/>
+          </p:cNvSpPr>
+          <p:nvPr>
+            <p:ph type="sldNum" idx="5" sz="quarter"/>
+          </p:nvPr>
+        </p:nvSpPr>
+        <p:spPr/>
+      </p:sp>
+    </p:spTree>
+  </p:cSld>
+  <p:clrMapOvr>
+    <a:masterClrMapping/>
+  </p:clrMapOvr>
+</p:notes>
+</file>
+
+<file path=ppt/notesSlides/notesSlide8.xml><?xml version="1.0" encoding="utf-8"?>
+<p:notes xmlns:a="http://schemas.openxmlformats.org/drawingml/2006/main" xmlns:p="http://schemas.openxmlformats.org/presentationml/2006/main" xmlns:r="http://schemas.openxmlformats.org/officeDocument/2006/relationships">
+  <p:cSld>
+    <p:spTree>
+      <p:nvGrpSpPr>
+        <p:cNvPr id="1" name=""/>
+        <p:cNvGrpSpPr/>
+        <p:nvPr/>
+      </p:nvGrpSpPr>
+      <p:grpSpPr>
+        <a:xfrm>
+          <a:off x="0" y="0"/>
+          <a:ext cx="0" cy="0"/>
+          <a:chOff x="0" y="0"/>
+          <a:chExt cx="0" cy="0"/>
+        </a:xfrm>
+      </p:grpSpPr>
+      <p:sp>
+        <p:nvSpPr>
+          <p:cNvPr id="2" name="Slide Image Placeholder 1"/>
+          <p:cNvSpPr>
+            <a:spLocks noGrp="1"/>
+          </p:cNvSpPr>
+          <p:nvPr>
+            <p:ph type="sldImg" idx="2"/>
+          </p:nvPr>
+        </p:nvSpPr>
+        <p:spPr/>
+      </p:sp>
+      <p:sp>
+        <p:nvSpPr>
+          <p:cNvPr id="3" name="Notes Placeholder 2"/>
+          <p:cNvSpPr>
+            <a:spLocks noGrp="1"/>
+          </p:cNvSpPr>
+          <p:nvPr>
+            <p:ph type="body" idx="3" sz="quarter"/>
+          </p:nvPr>
+        </p:nvSpPr>
+        <p:spPr/>
+        <p:txBody>
+          <a:bodyPr/>
+          <a:lstStyle/>
+          <a:p>
+            <a:r>
+              <a:t>【8 工程与质量｜3:30–4:00】</a:t>
+            </a:r>
+          </a:p>
+          <a:p>
+            <a:r>
+              <a:t>数字都是跑出来的：`accept` 821、`triagetest` 150、`selftest` 51、`authtest` 17、`ai-model-check` 46；`final-verify` 一条命令 18 项；CI 三层：文本卫生、源码↔分发包逐字节、真编译三件套。</a:t>
+            </a:r>
+          </a:p>
+          <a:p/>
+          <a:p>
+            <a:r>
+              <a:t>（本备注与 docs/答辩材料-2026-10-17.md §一 同源；改一处要同步另一处）</a:t>
+            </a:r>
+          </a:p>
+        </p:txBody>
+      </p:sp>
+      <p:sp>
+        <p:nvSpPr>
+          <p:cNvPr id="4" name="Slide Number Placeholder 3"/>
+          <p:cNvSpPr>
+            <a:spLocks noGrp="1"/>
+          </p:cNvSpPr>
+          <p:nvPr>
+            <p:ph type="sldNum" idx="5" sz="quarter"/>
+          </p:nvPr>
+        </p:nvSpPr>
+        <p:spPr/>
+      </p:sp>
+    </p:spTree>
+  </p:cSld>
+  <p:clrMapOvr>
+    <a:masterClrMapping/>
+  </p:clrMapOvr>
+</p:notes>
+</file>
+
+<file path=ppt/notesSlides/notesSlide9.xml><?xml version="1.0" encoding="utf-8"?>
+<p:notes xmlns:a="http://schemas.openxmlformats.org/drawingml/2006/main" xmlns:p="http://schemas.openxmlformats.org/presentationml/2006/main" xmlns:r="http://schemas.openxmlformats.org/officeDocument/2006/relationships">
+  <p:cSld>
+    <p:spTree>
+      <p:nvGrpSpPr>
+        <p:cNvPr id="1" name=""/>
+        <p:cNvGrpSpPr/>
+        <p:nvPr/>
+      </p:nvGrpSpPr>
+      <p:grpSpPr>
+        <a:xfrm>
+          <a:off x="0" y="0"/>
+          <a:ext cx="0" cy="0"/>
+          <a:chOff x="0" y="0"/>
+          <a:chExt cx="0" cy="0"/>
+        </a:xfrm>
+      </p:grpSpPr>
+      <p:sp>
+        <p:nvSpPr>
+          <p:cNvPr id="2" name="Slide Image Placeholder 1"/>
+          <p:cNvSpPr>
+            <a:spLocks noGrp="1"/>
+          </p:cNvSpPr>
+          <p:nvPr>
+            <p:ph type="sldImg" idx="2"/>
+          </p:nvPr>
+        </p:nvSpPr>
+        <p:spPr/>
+      </p:sp>
+      <p:sp>
+        <p:nvSpPr>
+          <p:cNvPr id="3" name="Notes Placeholder 2"/>
+          <p:cNvSpPr>
+            <a:spLocks noGrp="1"/>
+          </p:cNvSpPr>
+          <p:nvPr>
+            <p:ph type="body" idx="3" sz="quarter"/>
+          </p:nvPr>
+        </p:nvSpPr>
+        <p:spPr/>
+        <p:txBody>
+          <a:bodyPr/>
+          <a:lstStyle/>
+          <a:p>
+            <a:r>
+              <a:t>【9 真实性与合规｜4:00–4:30】</a:t>
+            </a:r>
+          </a:p>
+          <a:p>
+            <a:r>
+              <a:t>密钥**只存引用**（`env:`/`file:`/`builtin:demo`），演示密钥带**有效期**；许可证与 NOTICE 随包；轻舟框架是**我们参与开发**的，四组补丁已并入上游 —— 作品是「框架设计 + 应用场景」两层产出。</a:t>
+            </a:r>
+          </a:p>
+          <a:p/>
+          <a:p>
+            <a:r>
+              <a:t>（本备注与 docs/答辩材料-2026-10-17.md §一 同源；改一处要同步另一处）</a:t>
+            </a:r>
+          </a:p>
+        </p:txBody>
+      </p:sp>
+      <p:sp>
+        <p:nvSpPr>
+          <p:cNvPr id="4" name="Slide Number Placeholder 3"/>
+          <p:cNvSpPr>
+            <a:spLocks noGrp="1"/>
+          </p:cNvSpPr>
+          <p:nvPr>
+            <p:ph type="sldNum" idx="5" sz="quarter"/>
+          </p:nvPr>
+        </p:nvSpPr>
+        <p:spPr/>
+      </p:sp>
+    </p:spTree>
+  </p:cSld>
+  <p:clrMapOvr>
+    <a:masterClrMapping/>
+  </p:clrMapOvr>
+</p:notes>
 </file>
 
 <file path=ppt/slideLayouts/slideLayout1.xml><?xml version="1.0" encoding="utf-8"?>
@@ -8896,7 +10056,7 @@
                 </a:solidFill>
                 <a:latin typeface="Microsoft YaHei"/>
               </a:rPr>
-              <a:t>76 个参与编译的源文件 = 38 业务 .cj + 38 框架 .cj（框架快照共 46 个，8 个不进编译）；构建 2 s 381 ms</a:t>
+              <a:t>76 个参与编译的源文件 = 38 业务 .cj + 38 框架 .cj（框架快照共 46 个，8 个不进编译）；增量构建 2 s 381 ms（65 tasks / 38 up-to-date，非 clean 构建）</a:t>
             </a:r>
           </a:p>
         </p:txBody>
@@ -9834,4 +10994,324 @@
   </a:objectDefaults>
   <a:extraClrSchemeLst/>
 </a:theme>
+</file>
+
+<file path=ppt/theme/theme2.xml><?xml version="1.0" encoding="utf-8"?>
+<a:theme xmlns:a="http://schemas.openxmlformats.org/drawingml/2006/main" name="Office Theme">
+  <a:themeElements>
+    <a:clrScheme name="Office">
+      <a:dk1>
+        <a:sysClr val="windowText" lastClr="000000"/>
+      </a:dk1>
+      <a:lt1>
+        <a:sysClr val="window" lastClr="FFFFFF"/>
+      </a:lt1>
+      <a:dk2>
+        <a:srgbClr val="1F497D"/>
+      </a:dk2>
+      <a:lt2>
+        <a:srgbClr val="EEECE1"/>
+      </a:lt2>
+      <a:accent1>
+        <a:srgbClr val="4F81BD"/>
+      </a:accent1>
+      <a:accent2>
+        <a:srgbClr val="C0504D"/>
+      </a:accent2>
+      <a:accent3>
+        <a:srgbClr val="9BBB59"/>
+      </a:accent3>
+      <a:accent4>
+        <a:srgbClr val="8064A2"/>
+      </a:accent4>
+      <a:accent5>
+        <a:srgbClr val="4BACC6"/>
+      </a:accent5>
+      <a:accent6>
+        <a:srgbClr val="F79646"/>
+      </a:accent6>
+      <a:hlink>
+        <a:srgbClr val="0000FF"/>
+      </a:hlink>
+      <a:folHlink>
+        <a:srgbClr val="800080"/>
+      </a:folHlink>
+    </a:clrScheme>
+    <a:fontScheme name="Office">
+      <a:majorFont>
+        <a:latin typeface="Calibri"/>
+        <a:ea typeface=""/>
+        <a:cs typeface=""/>
+        <a:font script="Jpan" typeface="ＭＳ Ｐゴシック"/>
+        <a:font script="Hang" typeface="맑은 고딕"/>
+        <a:font script="Hans" typeface="宋体"/>
+        <a:font script="Hant" typeface="新細明體"/>
+        <a:font script="Arab" typeface="Times New Roman"/>
+        <a:font script="Hebr" typeface="Times New Roman"/>
+        <a:font script="Thai" typeface="Angsana New"/>
+        <a:font script="Ethi" typeface="Nyala"/>
+        <a:font script="Beng" typeface="Vrinda"/>
+        <a:font script="Gujr" typeface="Shruti"/>
+        <a:font script="Khmr" typeface="MoolBoran"/>
+        <a:font script="Knda" typeface="Tunga"/>
+        <a:font script="Guru" typeface="Raavi"/>
+        <a:font script="Cans" typeface="Euphemia"/>
+        <a:font script="Cher" typeface="Plantagenet Cherokee"/>
+        <a:font script="Yiii" typeface="Microsoft Yi Baiti"/>
+        <a:font script="Tibt" typeface="Microsoft Himalaya"/>
+        <a:font script="Thaa" typeface="MV Boli"/>
+        <a:font script="Deva" typeface="Mangal"/>
+        <a:font script="Telu" typeface="Gautami"/>
+        <a:font script="Taml" typeface="Latha"/>
+        <a:font script="Syrc" typeface="Estrangelo Edessa"/>
+        <a:font script="Orya" typeface="Kalinga"/>
+        <a:font script="Mlym" typeface="Kartika"/>
+        <a:font script="Laoo" typeface="DokChampa"/>
+        <a:font script="Sinh" typeface="Iskoola Pota"/>
+        <a:font script="Mong" typeface="Mongolian Baiti"/>
+        <a:font script="Viet" typeface="Times New Roman"/>
+        <a:font script="Uigh" typeface="Microsoft Uighur"/>
+        <a:font script="Geor" typeface="Sylfaen"/>
+      </a:majorFont>
+      <a:minorFont>
+        <a:latin typeface="Calibri"/>
+        <a:ea typeface=""/>
+        <a:cs typeface=""/>
+        <a:font script="Jpan" typeface="ＭＳ Ｐゴシック"/>
+        <a:font script="Hang" typeface="맑은 고딕"/>
+        <a:font script="Hans" typeface="宋体"/>
+        <a:font script="Hant" typeface="新細明體"/>
+        <a:font script="Arab" typeface="Arial"/>
+        <a:font script="Hebr" typeface="Arial"/>
+        <a:font script="Thai" typeface="Cordia New"/>
+        <a:font script="Ethi" typeface="Nyala"/>
+        <a:font script="Beng" typeface="Vrinda"/>
+        <a:font script="Gujr" typeface="Shruti"/>
+        <a:font script="Khmr" typeface="DaunPenh"/>
+        <a:font script="Knda" typeface="Tunga"/>
+        <a:font script="Guru" typeface="Raavi"/>
+        <a:font script="Cans" typeface="Euphemia"/>
+        <a:font script="Cher" typeface="Plantagenet Cherokee"/>
+        <a:font script="Yiii" typeface="Microsoft Yi Baiti"/>
+        <a:font script="Tibt" typeface="Microsoft Himalaya"/>
+        <a:font script="Thaa" typeface="MV Boli"/>
+        <a:font script="Deva" typeface="Mangal"/>
+        <a:font script="Telu" typeface="Gautami"/>
+        <a:font script="Taml" typeface="Latha"/>
+        <a:font script="Syrc" typeface="Estrangelo Edessa"/>
+        <a:font script="Orya" typeface="Kalinga"/>
+        <a:font script="Mlym" typeface="Kartika"/>
+        <a:font script="Laoo" typeface="DokChampa"/>
+        <a:font script="Sinh" typeface="Iskoola Pota"/>
+        <a:font script="Mong" typeface="Mongolian Baiti"/>
+        <a:font script="Viet" typeface="Arial"/>
+        <a:font script="Uigh" typeface="Microsoft Uighur"/>
+        <a:font script="Geor" typeface="Sylfaen"/>
+      </a:minorFont>
+    </a:fontScheme>
+    <a:fmtScheme name="Office">
+      <a:fillStyleLst>
+        <a:solidFill>
+          <a:schemeClr val="phClr"/>
+        </a:solidFill>
+        <a:gradFill rotWithShape="1">
+          <a:gsLst>
+            <a:gs pos="0">
+              <a:schemeClr val="phClr">
+                <a:tint val="50000"/>
+                <a:satMod val="300000"/>
+              </a:schemeClr>
+            </a:gs>
+            <a:gs pos="35000">
+              <a:schemeClr val="phClr">
+                <a:tint val="37000"/>
+                <a:satMod val="300000"/>
+              </a:schemeClr>
+            </a:gs>
+            <a:gs pos="100000">
+              <a:schemeClr val="phClr">
+                <a:tint val="15000"/>
+                <a:satMod val="350000"/>
+              </a:schemeClr>
+            </a:gs>
+          </a:gsLst>
+          <a:lin ang="16200000" scaled="1"/>
+        </a:gradFill>
+        <a:gradFill rotWithShape="1">
+          <a:gsLst>
+            <a:gs pos="0">
+              <a:schemeClr val="phClr">
+                <a:tint val="100000"/>
+                <a:shade val="100000"/>
+                <a:satMod val="130000"/>
+              </a:schemeClr>
+            </a:gs>
+            <a:gs pos="100000">
+              <a:schemeClr val="phClr">
+                <a:tint val="50000"/>
+                <a:shade val="100000"/>
+                <a:satMod val="350000"/>
+              </a:schemeClr>
+            </a:gs>
+          </a:gsLst>
+          <a:lin ang="16200000" scaled="0"/>
+        </a:gradFill>
+      </a:fillStyleLst>
+      <a:lnStyleLst>
+        <a:ln w="9525" cap="flat" cmpd="sng" algn="ctr">
+          <a:solidFill>
+            <a:schemeClr val="phClr">
+              <a:shade val="95000"/>
+              <a:satMod val="105000"/>
+            </a:schemeClr>
+          </a:solidFill>
+          <a:prstDash val="solid"/>
+        </a:ln>
+        <a:ln w="25400" cap="flat" cmpd="sng" algn="ctr">
+          <a:solidFill>
+            <a:schemeClr val="phClr"/>
+          </a:solidFill>
+          <a:prstDash val="solid"/>
+        </a:ln>
+        <a:ln w="38100" cap="flat" cmpd="sng" algn="ctr">
+          <a:solidFill>
+            <a:schemeClr val="phClr"/>
+          </a:solidFill>
+          <a:prstDash val="solid"/>
+        </a:ln>
+      </a:lnStyleLst>
+      <a:effectStyleLst>
+        <a:effectStyle>
+          <a:effectLst>
+            <a:outerShdw blurRad="40000" dist="20000" dir="5400000" rotWithShape="0">
+              <a:srgbClr val="000000">
+                <a:alpha val="38000"/>
+              </a:srgbClr>
+            </a:outerShdw>
+          </a:effectLst>
+        </a:effectStyle>
+        <a:effectStyle>
+          <a:effectLst>
+            <a:outerShdw blurRad="40000" dist="23000" dir="5400000" rotWithShape="0">
+              <a:srgbClr val="000000">
+                <a:alpha val="35000"/>
+              </a:srgbClr>
+            </a:outerShdw>
+          </a:effectLst>
+        </a:effectStyle>
+        <a:effectStyle>
+          <a:effectLst>
+            <a:outerShdw blurRad="40000" dist="23000" dir="5400000" rotWithShape="0">
+              <a:srgbClr val="000000">
+                <a:alpha val="35000"/>
+              </a:srgbClr>
+            </a:outerShdw>
+          </a:effectLst>
+          <a:scene3d>
+            <a:camera prst="orthographicFront">
+              <a:rot lat="0" lon="0" rev="0"/>
+            </a:camera>
+            <a:lightRig rig="threePt" dir="t">
+              <a:rot lat="0" lon="0" rev="1200000"/>
+            </a:lightRig>
+          </a:scene3d>
+          <a:sp3d>
+            <a:bevelT w="63500" h="25400"/>
+          </a:sp3d>
+        </a:effectStyle>
+      </a:effectStyleLst>
+      <a:bgFillStyleLst>
+        <a:solidFill>
+          <a:schemeClr val="phClr"/>
+        </a:solidFill>
+        <a:gradFill rotWithShape="1">
+          <a:gsLst>
+            <a:gs pos="0">
+              <a:schemeClr val="phClr">
+                <a:tint val="40000"/>
+                <a:satMod val="350000"/>
+              </a:schemeClr>
+            </a:gs>
+            <a:gs pos="40000">
+              <a:schemeClr val="phClr">
+                <a:tint val="45000"/>
+                <a:shade val="99000"/>
+                <a:satMod val="350000"/>
+              </a:schemeClr>
+            </a:gs>
+            <a:gs pos="100000">
+              <a:schemeClr val="phClr">
+                <a:shade val="20000"/>
+                <a:satMod val="255000"/>
+              </a:schemeClr>
+            </a:gs>
+          </a:gsLst>
+          <a:path path="circle">
+            <a:fillToRect l="50000" t="-80000" r="50000" b="180000"/>
+          </a:path>
+        </a:gradFill>
+        <a:gradFill rotWithShape="1">
+          <a:gsLst>
+            <a:gs pos="0">
+              <a:schemeClr val="phClr">
+                <a:tint val="80000"/>
+                <a:satMod val="300000"/>
+              </a:schemeClr>
+            </a:gs>
+            <a:gs pos="100000">
+              <a:schemeClr val="phClr">
+                <a:shade val="30000"/>
+                <a:satMod val="200000"/>
+              </a:schemeClr>
+            </a:gs>
+          </a:gsLst>
+          <a:path path="circle">
+            <a:fillToRect l="50000" t="50000" r="50000" b="50000"/>
+          </a:path>
+        </a:gradFill>
+      </a:bgFillStyleLst>
+    </a:fmtScheme>
+  </a:themeElements>
+  <a:objectDefaults>
+    <a:spDef>
+      <a:spPr/>
+      <a:bodyPr/>
+      <a:lstStyle/>
+      <a:style>
+        <a:lnRef idx="1">
+          <a:schemeClr val="accent1"/>
+        </a:lnRef>
+        <a:fillRef idx="3">
+          <a:schemeClr val="accent1"/>
+        </a:fillRef>
+        <a:effectRef idx="2">
+          <a:schemeClr val="accent1"/>
+        </a:effectRef>
+        <a:fontRef idx="minor">
+          <a:schemeClr val="lt1"/>
+        </a:fontRef>
+      </a:style>
+    </a:spDef>
+    <a:lnDef>
+      <a:spPr/>
+      <a:bodyPr/>
+      <a:lstStyle/>
+      <a:style>
+        <a:lnRef idx="2">
+          <a:schemeClr val="accent1"/>
+        </a:lnRef>
+        <a:fillRef idx="0">
+          <a:schemeClr val="accent1"/>
+        </a:fillRef>
+        <a:effectRef idx="1">
+          <a:schemeClr val="accent1"/>
+        </a:effectRef>
+        <a:fontRef idx="minor">
+          <a:schemeClr val="tx1"/>
+        </a:fontRef>
+      </a:style>
+    </a:lnDef>
+  </a:objectDefaults>
+  <a:extraClrSchemeLst/>
+</a:theme>
 </file>
--- a/docs/答辩演示-2026-10-21.pptx
+++ b/docs/答辩演示-2026-10-21.pptx
@@ -15,6 +15,7 @@
     <p:sldId id="263" r:id="rId14"/>
     <p:sldId id="264" r:id="rId15"/>
     <p:sldId id="265" r:id="rId16"/>
+    <p:sldId id="266" r:id="rId17"/>
   </p:sldIdLst>
   <p:sldSz cx="12191695" cy="6858000" type="screen4x3"/>
   <p:notesSz cx="6858000" cy="9144000"/>
@@ -658,18 +659,18 @@
           <a:lstStyle/>
           <a:p>
             <a:r>
-              <a:t>【1 封面｜0:00–0:30】</a:t>
-            </a:r>
-          </a:p>
-          <a:p>
-            <a:r>
-              <a:t>这是「智慧医院智能导诊就诊系统」：一个**仓颉**服务端、一套契约、三个客户端 —— 鸿蒙患者/医生/管理端、安卓对照端、零依赖管理台。五分钟我只讲五件事：**形态、架构取舍、AI 的真本事与真边界、工程证据、没做到的部分**。</a:t>
+              <a:t>【1 封面｜0:00–0:15】</a:t>
+            </a:r>
+          </a:p>
+          <a:p>
+            <a:r>
+              <a:t>这是「智慧医院智能导诊就诊系统」：一个**仓颉**服务端、一套契约、三个客户端 —— 鸿蒙患者/医生/管理端、安卓对照端、零依赖管理台。五分钟讲五件事：**形态、五个创新点、架构取舍、AI 的真本事与真边界、工程证据与没做到的部分**。</a:t>
             </a:r>
           </a:p>
           <a:p/>
           <a:p>
             <a:r>
-              <a:t>（本备注与 docs/答辩材料-2026-10-17.md §一 同源；改一处要同步另一处）</a:t>
+              <a:t>（本备注即该页讲稿；数字与证据见 `docs/验收实跑-2026-10-21.md`）</a:t>
             </a:r>
           </a:p>
         </p:txBody>
@@ -739,7 +740,88 @@
           <a:lstStyle/>
           <a:p>
             <a:r>
-              <a:t>【10 能做与不能做｜4:30–5:00】</a:t>
+              <a:t>【10 真实性与合规｜4:05–4:35】</a:t>
+            </a:r>
+          </a:p>
+          <a:p>
+            <a:r>
+              <a:t>密钥**只存引用**（`env:`/`file:`/`builtin:demo`），演示密钥带**有效期**；许可证与 NOTICE 随包；轻舟框架是**我们参与开发**的，四组补丁已并入上游 —— 作品是「框架设计 + 应用场景」两层产出。</a:t>
+            </a:r>
+          </a:p>
+          <a:p/>
+          <a:p>
+            <a:r>
+              <a:t>（本备注即该页讲稿；数字与证据见 `docs/验收实跑-2026-10-21.md`）</a:t>
+            </a:r>
+          </a:p>
+        </p:txBody>
+      </p:sp>
+      <p:sp>
+        <p:nvSpPr>
+          <p:cNvPr id="4" name="Slide Number Placeholder 3"/>
+          <p:cNvSpPr>
+            <a:spLocks noGrp="1"/>
+          </p:cNvSpPr>
+          <p:nvPr>
+            <p:ph type="sldNum" idx="5" sz="quarter"/>
+          </p:nvPr>
+        </p:nvSpPr>
+        <p:spPr/>
+      </p:sp>
+    </p:spTree>
+  </p:cSld>
+  <p:clrMapOvr>
+    <a:masterClrMapping/>
+  </p:clrMapOvr>
+</p:notes>
+</file>
+
+<file path=ppt/notesSlides/notesSlide11.xml><?xml version="1.0" encoding="utf-8"?>
+<p:notes xmlns:a="http://schemas.openxmlformats.org/drawingml/2006/main" xmlns:p="http://schemas.openxmlformats.org/presentationml/2006/main" xmlns:r="http://schemas.openxmlformats.org/officeDocument/2006/relationships">
+  <p:cSld>
+    <p:spTree>
+      <p:nvGrpSpPr>
+        <p:cNvPr id="1" name=""/>
+        <p:cNvGrpSpPr/>
+        <p:nvPr/>
+      </p:nvGrpSpPr>
+      <p:grpSpPr>
+        <a:xfrm>
+          <a:off x="0" y="0"/>
+          <a:ext cx="0" cy="0"/>
+          <a:chOff x="0" y="0"/>
+          <a:chExt cx="0" cy="0"/>
+        </a:xfrm>
+      </p:grpSpPr>
+      <p:sp>
+        <p:nvSpPr>
+          <p:cNvPr id="2" name="Slide Image Placeholder 1"/>
+          <p:cNvSpPr>
+            <a:spLocks noGrp="1"/>
+          </p:cNvSpPr>
+          <p:nvPr>
+            <p:ph type="sldImg" idx="2"/>
+          </p:nvPr>
+        </p:nvSpPr>
+        <p:spPr/>
+      </p:sp>
+      <p:sp>
+        <p:nvSpPr>
+          <p:cNvPr id="3" name="Notes Placeholder 2"/>
+          <p:cNvSpPr>
+            <a:spLocks noGrp="1"/>
+          </p:cNvSpPr>
+          <p:nvPr>
+            <p:ph type="body" idx="3" sz="quarter"/>
+          </p:nvPr>
+        </p:nvSpPr>
+        <p:spPr/>
+        <p:txBody>
+          <a:bodyPr/>
+          <a:lstStyle/>
+          <a:p>
+            <a:r>
+              <a:t>【11 能做与不能做｜4:35–5:00】</a:t>
             </a:r>
           </a:p>
           <a:p>
@@ -750,7 +832,7 @@
           <a:p/>
           <a:p>
             <a:r>
-              <a:t>（本备注与 docs/答辩材料-2026-10-17.md §一 同源；改一处要同步另一处）</a:t>
+              <a:t>（本备注即该页讲稿；数字与证据见 `docs/验收实跑-2026-10-21.md`）</a:t>
             </a:r>
           </a:p>
         </p:txBody>
@@ -820,7 +902,7 @@
           <a:lstStyle/>
           <a:p>
             <a:r>
-              <a:t>【2 交付了什么｜0:30–1:00】</a:t>
+              <a:t>【2 交付了什么｜0:15–0:35】</a:t>
             </a:r>
           </a:p>
           <a:p>
@@ -831,7 +913,7 @@
           <a:p/>
           <a:p>
             <a:r>
-              <a:t>（本备注与 docs/答辩材料-2026-10-17.md §一 同源；改一处要同步另一处）</a:t>
+              <a:t>（本备注即该页讲稿；数字与证据见 `docs/验收实跑-2026-10-21.md`）</a:t>
             </a:r>
           </a:p>
         </p:txBody>
@@ -901,18 +983,18 @@
           <a:lstStyle/>
           <a:p>
             <a:r>
-              <a:t>【3 架构｜1:00–1:30】</a:t>
-            </a:r>
-          </a:p>
-          <a:p>
-            <a:r>
-              <a:t>三个客户端 → **一个 exe** → MariaDB **17 张表**。没有 ORM，SQL 集中、可审计；号源与挂号走独立路径，**扣号是一条带谓词的 UPDATE**，并发安全靠数据库而不是应用锁。</a:t>
+              <a:t>【3 五个创新点｜0:35–1:10】</a:t>
+            </a:r>
+          </a:p>
+          <a:p>
+            <a:r>
+              <a:t>五个创新点，每个都能指到源码：**模型只负责措辞**（结论与号源由规则和数据库给）、**三段式否定窗口**（「无法缓解的胸痛」也报红）、**AI 配置改完即生效**（写库清缓存 + 5 s TTL）、**单实例零中间件**（SSE / 事务 / 静态托管同一个 exe）、**交付纪律门禁化**（821 条断言 + 18 项 live 门禁 + 三层 CI）。每条的诚实边界我放在下一页之后讲。</a:t>
             </a:r>
           </a:p>
           <a:p/>
           <a:p>
             <a:r>
-              <a:t>（本备注与 docs/答辩材料-2026-10-17.md §一 同源；改一处要同步另一处）</a:t>
+              <a:t>（本备注即该页讲稿；数字与证据见 `docs/验收实跑-2026-10-21.md`）</a:t>
             </a:r>
           </a:p>
         </p:txBody>
@@ -982,18 +1064,18 @@
           <a:lstStyle/>
           <a:p>
             <a:r>
-              <a:t>【4 患者闭环｜1:30–2:00】</a:t>
-            </a:r>
-          </a:p>
-          <a:p>
-            <a:r>
-              <a:t>主诉 → 分诊 → 推荐号源 → 挂号 → 候诊 → 病历，六步全在一个闭环里。**每一步都由服务端裁决**，客户端只负责呈现 —— 这样规则改了不用发版。</a:t>
+              <a:t>【4 架构｜1:10–1:35】</a:t>
+            </a:r>
+          </a:p>
+          <a:p>
+            <a:r>
+              <a:t>三个客户端 → **一个 exe** → MariaDB **17 张表**。没有 ORM，SQL 集中、可审计；号源与挂号走独立路径，**扣号是一条带谓词的 UPDATE**，并发安全靠数据库而不是应用锁。</a:t>
             </a:r>
           </a:p>
           <a:p/>
           <a:p>
             <a:r>
-              <a:t>（本备注与 docs/答辩材料-2026-10-17.md §一 同源；改一处要同步另一处）</a:t>
+              <a:t>（本备注即该页讲稿；数字与证据见 `docs/验收实跑-2026-10-21.md`）</a:t>
             </a:r>
           </a:p>
         </p:txBody>
@@ -1063,18 +1145,18 @@
           <a:lstStyle/>
           <a:p>
             <a:r>
-              <a:t>【5 AI｜2:00–2:30】</a:t>
-            </a:r>
-          </a:p>
-          <a:p>
-            <a:r>
-              <a:t>模型**只提议、不决定**：它给出科室名，服务端必须拿真实号源库存校验，不通过就降级成「备选号源」。三条可现场复现的证据：`source=model`、`used_kb=true`、改 Prompt **零重启**生效。</a:t>
+              <a:t>【5 患者闭环｜1:35–2:10】</a:t>
+            </a:r>
+          </a:p>
+          <a:p>
+            <a:r>
+              <a:t>主诉 → 分诊 → 推荐号源 → 挂号 → 候诊 → 病历，六步全在一个闭环里。**每一步都由服务端裁决**，客户端只负责呈现 —— 这样规则改了不用发版。</a:t>
             </a:r>
           </a:p>
           <a:p/>
           <a:p>
             <a:r>
-              <a:t>（本备注与 docs/答辩材料-2026-10-17.md §一 同源；改一处要同步另一处）</a:t>
+              <a:t>（本备注即该页讲稿；数字与证据见 `docs/验收实跑-2026-10-21.md`）</a:t>
             </a:r>
           </a:p>
         </p:txBody>
@@ -1144,18 +1226,18 @@
           <a:lstStyle/>
           <a:p>
             <a:r>
-              <a:t>【6 医生端｜2:30–3:00】</a:t>
-            </a:r>
-          </a:p>
-          <a:p>
-            <a:r>
-              <a:t>到院 → 候诊 → 接诊 → 七段病历 → 提交锁定 → 版本历史。病历**提交后不可改**，解锁是管理员动作且必须填理由；「一键预填」**只补空段**，绝不覆盖医生已经写下的内容。</a:t>
+              <a:t>【6 AI｜2:10–2:45】</a:t>
+            </a:r>
+          </a:p>
+          <a:p>
+            <a:r>
+              <a:t>模型**只提议、不决定**：它给出科室名，服务端必须拿真实号源库存校验，不通过就降级成「备选号源」。三条可现场复现的证据：`source=model`、`used_kb=true`、改 Prompt **零重启**生效。</a:t>
             </a:r>
           </a:p>
           <a:p/>
           <a:p>
             <a:r>
-              <a:t>（本备注与 docs/答辩材料-2026-10-17.md §一 同源；改一处要同步另一处）</a:t>
+              <a:t>（本备注即该页讲稿；数字与证据见 `docs/验收实跑-2026-10-21.md`）</a:t>
             </a:r>
           </a:p>
         </p:txBody>
@@ -1225,18 +1307,18 @@
           <a:lstStyle/>
           <a:p>
             <a:r>
-              <a:t>【7 管理端｜3:00–3:30】</a:t>
-            </a:r>
-          </a:p>
-          <a:p>
-            <a:r>
-              <a:t>四块：运营看板（数字来自真实聚合，不是写死）、基础数据 CRUD（科室/医生/账号/排班）、AI 能力中心（模型·Prompt·工具闸门）、知识库（文档→切块→关键词检索）。</a:t>
+              <a:t>【7 医生端｜2:45–3:10】</a:t>
+            </a:r>
+          </a:p>
+          <a:p>
+            <a:r>
+              <a:t>到院 → 候诊 → 接诊 → 七段病历 → 提交锁定 → 版本历史。病历**提交后不可改**，解锁是管理员动作且必须填理由；「一键预填」**只补空段**，绝不覆盖医生已经写下的内容。</a:t>
             </a:r>
           </a:p>
           <a:p/>
           <a:p>
             <a:r>
-              <a:t>（本备注与 docs/答辩材料-2026-10-17.md §一 同源；改一处要同步另一处）</a:t>
+              <a:t>（本备注即该页讲稿；数字与证据见 `docs/验收实跑-2026-10-21.md`）</a:t>
             </a:r>
           </a:p>
         </p:txBody>
@@ -1306,18 +1388,18 @@
           <a:lstStyle/>
           <a:p>
             <a:r>
-              <a:t>【8 工程与质量｜3:30–4:00】</a:t>
-            </a:r>
-          </a:p>
-          <a:p>
-            <a:r>
-              <a:t>数字都是跑出来的：`accept` 821、`triagetest` 150、`selftest` 51、`authtest` 17、`ai-model-check` 46；`final-verify` 一条命令 18 项；CI 三层：文本卫生、源码↔分发包逐字节、真编译三件套。</a:t>
+              <a:t>【8 管理端｜3:10–3:35】</a:t>
+            </a:r>
+          </a:p>
+          <a:p>
+            <a:r>
+              <a:t>四块：运营看板（数字来自真实聚合，不是写死）、基础数据 CRUD（科室/医生/账号/排班）、AI 能力中心（模型·Prompt·工具闸门）、知识库（文档→切块→关键词检索）。</a:t>
             </a:r>
           </a:p>
           <a:p/>
           <a:p>
             <a:r>
-              <a:t>（本备注与 docs/答辩材料-2026-10-17.md §一 同源；改一处要同步另一处）</a:t>
+              <a:t>（本备注即该页讲稿；数字与证据见 `docs/验收实跑-2026-10-21.md`）</a:t>
             </a:r>
           </a:p>
         </p:txBody>
@@ -1387,18 +1469,18 @@
           <a:lstStyle/>
           <a:p>
             <a:r>
-              <a:t>【9 真实性与合规｜4:00–4:30】</a:t>
-            </a:r>
-          </a:p>
-          <a:p>
-            <a:r>
-              <a:t>密钥**只存引用**（`env:`/`file:`/`builtin:demo`），演示密钥带**有效期**；许可证与 NOTICE 随包；轻舟框架是**我们参与开发**的，四组补丁已并入上游 —— 作品是「框架设计 + 应用场景」两层产出。</a:t>
+              <a:t>【9 工程与质量｜3:35–4:05】</a:t>
+            </a:r>
+          </a:p>
+          <a:p>
+            <a:r>
+              <a:t>数字都是跑出来的：`accept` 821、`triagetest` 150、`selftest` 51、`authtest` 17、`ai-model-check` 46；`final-verify` 一条命令 18 项；CI 三层：文本卫生、源码↔分发包逐字节、真编译三件套。</a:t>
             </a:r>
           </a:p>
           <a:p/>
           <a:p>
             <a:r>
-              <a:t>（本备注与 docs/答辩材料-2026-10-17.md §一 同源；改一处要同步另一处）</a:t>
+              <a:t>（本备注即该页讲稿；数字与证据见 `docs/验收实跑-2026-10-21.md`）</a:t>
             </a:r>
           </a:p>
         </p:txBody>
@@ -4773,6 +4855,574 @@
                 </a:solidFill>
                 <a:latin typeface="Microsoft YaHei"/>
               </a:rPr>
+              <a:t>真实性与合规：把边界写在明面上</a:t>
+            </a:r>
+          </a:p>
+        </p:txBody>
+      </p:sp>
+      <p:sp>
+        <p:nvSpPr>
+          <p:cNvPr id="4" name="TextBox 3"/>
+          <p:cNvSpPr txBox="1"/>
+          <p:nvPr/>
+        </p:nvSpPr>
+        <p:spPr>
+          <a:xfrm>
+            <a:off x="530352" y="576072"/>
+            <a:ext cx="10789920" cy="292608"/>
+          </a:xfrm>
+          <a:prstGeom prst="rect">
+            <a:avLst/>
+          </a:prstGeom>
+          <a:noFill/>
+        </p:spPr>
+        <p:txBody>
+          <a:bodyPr wrap="square" anchor="t">
+            <a:spAutoFit/>
+          </a:bodyPr>
+          <a:lstStyle/>
+          <a:p>
+            <a:pPr algn="l">
+              <a:lnSpc>
+                <a:spcPct val="125000"/>
+              </a:lnSpc>
+            </a:pPr>
+            <a:r>
+              <a:rPr sz="1200" b="0">
+                <a:solidFill>
+                  <a:srgbClr val="9FD8D0"/>
+                </a:solidFill>
+                <a:latin typeface="Microsoft YaHei"/>
+              </a:rPr>
+              <a:t>比「看起来很强」更重要的是「经得起问」</a:t>
+            </a:r>
+          </a:p>
+        </p:txBody>
+      </p:sp>
+      <p:sp>
+        <p:nvSpPr>
+          <p:cNvPr id="5" name="TextBox 4"/>
+          <p:cNvSpPr txBox="1"/>
+          <p:nvPr/>
+        </p:nvSpPr>
+        <p:spPr>
+          <a:xfrm>
+            <a:off x="685800" y="1371600"/>
+            <a:ext cx="3108960" cy="411480"/>
+          </a:xfrm>
+          <a:prstGeom prst="rect">
+            <a:avLst/>
+          </a:prstGeom>
+          <a:noFill/>
+        </p:spPr>
+        <p:txBody>
+          <a:bodyPr wrap="square" anchor="t">
+            <a:spAutoFit/>
+          </a:bodyPr>
+          <a:lstStyle/>
+          <a:p>
+            <a:pPr algn="l">
+              <a:lnSpc>
+                <a:spcPct val="125000"/>
+              </a:lnSpc>
+            </a:pPr>
+            <a:r>
+              <a:rPr sz="1500" b="1">
+                <a:solidFill>
+                  <a:srgbClr val="0E8C82"/>
+                </a:solidFill>
+                <a:latin typeface="Microsoft YaHei"/>
+              </a:rPr>
+              <a:t>AI 工具使用声明</a:t>
+            </a:r>
+          </a:p>
+        </p:txBody>
+      </p:sp>
+      <p:sp>
+        <p:nvSpPr>
+          <p:cNvPr id="6" name="TextBox 5"/>
+          <p:cNvSpPr txBox="1"/>
+          <p:nvPr/>
+        </p:nvSpPr>
+        <p:spPr>
+          <a:xfrm>
+            <a:off x="3886200" y="1371600"/>
+            <a:ext cx="7589520" cy="822960"/>
+          </a:xfrm>
+          <a:prstGeom prst="rect">
+            <a:avLst/>
+          </a:prstGeom>
+          <a:noFill/>
+        </p:spPr>
+        <p:txBody>
+          <a:bodyPr wrap="square" anchor="t">
+            <a:spAutoFit/>
+          </a:bodyPr>
+          <a:lstStyle/>
+          <a:p>
+            <a:pPr algn="l">
+              <a:lnSpc>
+                <a:spcPct val="120000"/>
+              </a:lnSpc>
+            </a:pPr>
+            <a:r>
+              <a:rPr sz="1300" b="0">
+                <a:solidFill>
+                  <a:srgbClr val="113B3A"/>
+                </a:solidFill>
+                <a:latin typeface="Microsoft YaHei"/>
+              </a:rPr>
+              <a:t>产品内 AI 与开发期 AI 分开写；模型、范围、核心代码归属都有出处</a:t>
+            </a:r>
+          </a:p>
+        </p:txBody>
+      </p:sp>
+      <p:sp>
+        <p:nvSpPr>
+          <p:cNvPr id="7" name="TextBox 6"/>
+          <p:cNvSpPr txBox="1"/>
+          <p:nvPr/>
+        </p:nvSpPr>
+        <p:spPr>
+          <a:xfrm>
+            <a:off x="685800" y="2304288"/>
+            <a:ext cx="3108960" cy="411480"/>
+          </a:xfrm>
+          <a:prstGeom prst="rect">
+            <a:avLst/>
+          </a:prstGeom>
+          <a:noFill/>
+        </p:spPr>
+        <p:txBody>
+          <a:bodyPr wrap="square" anchor="t">
+            <a:spAutoFit/>
+          </a:bodyPr>
+          <a:lstStyle/>
+          <a:p>
+            <a:pPr algn="l">
+              <a:lnSpc>
+                <a:spcPct val="125000"/>
+              </a:lnSpc>
+            </a:pPr>
+            <a:r>
+              <a:rPr sz="1500" b="1">
+                <a:solidFill>
+                  <a:srgbClr val="0E8C82"/>
+                </a:solidFill>
+                <a:latin typeface="Microsoft YaHei"/>
+              </a:rPr>
+              <a:t>内置演示密钥</a:t>
+            </a:r>
+          </a:p>
+        </p:txBody>
+      </p:sp>
+      <p:sp>
+        <p:nvSpPr>
+          <p:cNvPr id="8" name="TextBox 7"/>
+          <p:cNvSpPr txBox="1"/>
+          <p:nvPr/>
+        </p:nvSpPr>
+        <p:spPr>
+          <a:xfrm>
+            <a:off x="3886200" y="2304288"/>
+            <a:ext cx="7589520" cy="822960"/>
+          </a:xfrm>
+          <a:prstGeom prst="rect">
+            <a:avLst/>
+          </a:prstGeom>
+          <a:noFill/>
+        </p:spPr>
+        <p:txBody>
+          <a:bodyPr wrap="square" anchor="t">
+            <a:spAutoFit/>
+          </a:bodyPr>
+          <a:lstStyle/>
+          <a:p>
+            <a:pPr algn="l">
+              <a:lnSpc>
+                <a:spcPct val="120000"/>
+              </a:lnSpc>
+            </a:pPr>
+            <a:r>
+              <a:rPr sz="1300" b="0">
+                <a:solidFill>
+                  <a:srgbClr val="113B3A"/>
+                </a:solidFill>
+                <a:latin typeface="Microsoft YaHei"/>
+              </a:rPr>
+              <a:t>开箱即用但**限时**（2026-12-31 到期自动拒绝），换法一条命令</a:t>
+            </a:r>
+          </a:p>
+        </p:txBody>
+      </p:sp>
+      <p:sp>
+        <p:nvSpPr>
+          <p:cNvPr id="9" name="TextBox 8"/>
+          <p:cNvSpPr txBox="1"/>
+          <p:nvPr/>
+        </p:nvSpPr>
+        <p:spPr>
+          <a:xfrm>
+            <a:off x="685800" y="3236976"/>
+            <a:ext cx="3108960" cy="411480"/>
+          </a:xfrm>
+          <a:prstGeom prst="rect">
+            <a:avLst/>
+          </a:prstGeom>
+          <a:noFill/>
+        </p:spPr>
+        <p:txBody>
+          <a:bodyPr wrap="square" anchor="t">
+            <a:spAutoFit/>
+          </a:bodyPr>
+          <a:lstStyle/>
+          <a:p>
+            <a:pPr algn="l">
+              <a:lnSpc>
+                <a:spcPct val="125000"/>
+              </a:lnSpc>
+            </a:pPr>
+            <a:r>
+              <a:rPr sz="1500" b="1">
+                <a:solidFill>
+                  <a:srgbClr val="0E8C82"/>
+                </a:solidFill>
+                <a:latin typeface="Microsoft YaHei"/>
+              </a:rPr>
+              <a:t>许可证</a:t>
+            </a:r>
+          </a:p>
+        </p:txBody>
+      </p:sp>
+      <p:sp>
+        <p:nvSpPr>
+          <p:cNvPr id="10" name="TextBox 9"/>
+          <p:cNvSpPr txBox="1"/>
+          <p:nvPr/>
+        </p:nvSpPr>
+        <p:spPr>
+          <a:xfrm>
+            <a:off x="3886200" y="3236976"/>
+            <a:ext cx="7589520" cy="822960"/>
+          </a:xfrm>
+          <a:prstGeom prst="rect">
+            <a:avLst/>
+          </a:prstGeom>
+          <a:noFill/>
+        </p:spPr>
+        <p:txBody>
+          <a:bodyPr wrap="square" anchor="t">
+            <a:spAutoFit/>
+          </a:bodyPr>
+          <a:lstStyle/>
+          <a:p>
+            <a:pPr algn="l">
+              <a:lnSpc>
+                <a:spcPct val="120000"/>
+              </a:lnSpc>
+            </a:pPr>
+            <a:r>
+              <a:rPr sz="1300" b="0">
+                <a:solidFill>
+                  <a:srgbClr val="113B3A"/>
+                </a:solidFill>
+                <a:latin typeface="Microsoft YaHei"/>
+              </a:rPr>
+              <a:t>本项目 MIT；框架 MIT、驱动 Apache-2.0；仓颉运行时 Apache-2.0 含 Runtime Library Exception</a:t>
+            </a:r>
+          </a:p>
+        </p:txBody>
+      </p:sp>
+      <p:sp>
+        <p:nvSpPr>
+          <p:cNvPr id="11" name="TextBox 10"/>
+          <p:cNvSpPr txBox="1"/>
+          <p:nvPr/>
+        </p:nvSpPr>
+        <p:spPr>
+          <a:xfrm>
+            <a:off x="685800" y="4169664"/>
+            <a:ext cx="3108960" cy="411480"/>
+          </a:xfrm>
+          <a:prstGeom prst="rect">
+            <a:avLst/>
+          </a:prstGeom>
+          <a:noFill/>
+        </p:spPr>
+        <p:txBody>
+          <a:bodyPr wrap="square" anchor="t">
+            <a:spAutoFit/>
+          </a:bodyPr>
+          <a:lstStyle/>
+          <a:p>
+            <a:pPr algn="l">
+              <a:lnSpc>
+                <a:spcPct val="125000"/>
+              </a:lnSpc>
+            </a:pPr>
+            <a:r>
+              <a:rPr sz="1500" b="1">
+                <a:solidFill>
+                  <a:srgbClr val="0E8C82"/>
+                </a:solidFill>
+                <a:latin typeface="Microsoft YaHei"/>
+              </a:rPr>
+              <a:t>分发包</a:t>
+            </a:r>
+          </a:p>
+        </p:txBody>
+      </p:sp>
+      <p:sp>
+        <p:nvSpPr>
+          <p:cNvPr id="12" name="TextBox 11"/>
+          <p:cNvSpPr txBox="1"/>
+          <p:nvPr/>
+        </p:nvSpPr>
+        <p:spPr>
+          <a:xfrm>
+            <a:off x="3886200" y="4169664"/>
+            <a:ext cx="7589520" cy="822960"/>
+          </a:xfrm>
+          <a:prstGeom prst="rect">
+            <a:avLst/>
+          </a:prstGeom>
+          <a:noFill/>
+        </p:spPr>
+        <p:txBody>
+          <a:bodyPr wrap="square" anchor="t">
+            <a:spAutoFit/>
+          </a:bodyPr>
+          <a:lstStyle/>
+          <a:p>
+            <a:pPr algn="l">
+              <a:lnSpc>
+                <a:spcPct val="120000"/>
+              </a:lnSpc>
+            </a:pPr>
+            <a:r>
+              <a:rPr sz="1300" b="0">
+                <a:solidFill>
+                  <a:srgbClr val="113B3A"/>
+                </a:solidFill>
+                <a:latin typeface="Microsoft YaHei"/>
+              </a:rPr>
+              <a:t>25 个文件，含 LICENSE / NOTICE / THIRD-PARTY.md 与 licenses/ 下 6 份全文</a:t>
+            </a:r>
+          </a:p>
+        </p:txBody>
+      </p:sp>
+      <p:sp>
+        <p:nvSpPr>
+          <p:cNvPr id="13" name="TextBox 12"/>
+          <p:cNvSpPr txBox="1"/>
+          <p:nvPr/>
+        </p:nvSpPr>
+        <p:spPr>
+          <a:xfrm>
+            <a:off x="685800" y="5102352"/>
+            <a:ext cx="3108960" cy="411480"/>
+          </a:xfrm>
+          <a:prstGeom prst="rect">
+            <a:avLst/>
+          </a:prstGeom>
+          <a:noFill/>
+        </p:spPr>
+        <p:txBody>
+          <a:bodyPr wrap="square" anchor="t">
+            <a:spAutoFit/>
+          </a:bodyPr>
+          <a:lstStyle/>
+          <a:p>
+            <a:pPr algn="l">
+              <a:lnSpc>
+                <a:spcPct val="125000"/>
+              </a:lnSpc>
+            </a:pPr>
+            <a:r>
+              <a:rPr sz="1500" b="1">
+                <a:solidFill>
+                  <a:srgbClr val="0E8C82"/>
+                </a:solidFill>
+                <a:latin typeface="Microsoft YaHei"/>
+              </a:rPr>
+              <a:t>如实标注的缺口</a:t>
+            </a:r>
+          </a:p>
+        </p:txBody>
+      </p:sp>
+      <p:sp>
+        <p:nvSpPr>
+          <p:cNvPr id="14" name="TextBox 13"/>
+          <p:cNvSpPr txBox="1"/>
+          <p:nvPr/>
+        </p:nvSpPr>
+        <p:spPr>
+          <a:xfrm>
+            <a:off x="3886200" y="5102352"/>
+            <a:ext cx="7589520" cy="822960"/>
+          </a:xfrm>
+          <a:prstGeom prst="rect">
+            <a:avLst/>
+          </a:prstGeom>
+          <a:noFill/>
+        </p:spPr>
+        <p:txBody>
+          <a:bodyPr wrap="square" anchor="t">
+            <a:spAutoFit/>
+          </a:bodyPr>
+          <a:lstStyle/>
+          <a:p>
+            <a:pPr algn="l">
+              <a:lnSpc>
+                <a:spcPct val="120000"/>
+              </a:lnSpc>
+            </a:pPr>
+            <a:r>
+              <a:rPr sz="1300" b="0">
+                <a:solidFill>
+                  <a:srgbClr val="113B3A"/>
+                </a:solidFill>
+                <a:latin typeface="Microsoft YaHei"/>
+              </a:rPr>
+              <a:t>向量检索未接（关键词为默认）；工具开关是预留闸门，生产路径无派发器</a:t>
+            </a:r>
+          </a:p>
+        </p:txBody>
+      </p:sp>
+      <p:sp>
+        <p:nvSpPr>
+          <p:cNvPr id="15" name="TextBox 14"/>
+          <p:cNvSpPr txBox="1"/>
+          <p:nvPr/>
+        </p:nvSpPr>
+        <p:spPr>
+          <a:xfrm>
+            <a:off x="10881360" y="6446520"/>
+            <a:ext cx="1005840" cy="274320"/>
+          </a:xfrm>
+          <a:prstGeom prst="rect">
+            <a:avLst/>
+          </a:prstGeom>
+          <a:noFill/>
+        </p:spPr>
+        <p:txBody>
+          <a:bodyPr wrap="square" anchor="t">
+            <a:spAutoFit/>
+          </a:bodyPr>
+          <a:lstStyle/>
+          <a:p>
+            <a:pPr algn="r">
+              <a:lnSpc>
+                <a:spcPct val="125000"/>
+              </a:lnSpc>
+            </a:pPr>
+            <a:r>
+              <a:rPr sz="1000" b="0">
+                <a:solidFill>
+                  <a:srgbClr val="5B6B6A"/>
+                </a:solidFill>
+                <a:latin typeface="Microsoft YaHei"/>
+              </a:rPr>
+              <a:t>10 / 11</a:t>
+            </a:r>
+          </a:p>
+        </p:txBody>
+      </p:sp>
+    </p:spTree>
+  </p:cSld>
+  <p:clrMapOvr>
+    <a:masterClrMapping/>
+  </p:clrMapOvr>
+</p:sld>
+</file>
+
+<file path=ppt/slides/slide11.xml><?xml version="1.0" encoding="utf-8"?>
+<p:sld xmlns:a="http://schemas.openxmlformats.org/drawingml/2006/main" xmlns:p="http://schemas.openxmlformats.org/presentationml/2006/main" xmlns:r="http://schemas.openxmlformats.org/officeDocument/2006/relationships">
+  <p:cSld>
+    <p:spTree>
+      <p:nvGrpSpPr>
+        <p:cNvPr id="1" name=""/>
+        <p:cNvGrpSpPr/>
+        <p:nvPr/>
+      </p:nvGrpSpPr>
+      <p:grpSpPr/>
+      <p:sp>
+        <p:nvSpPr>
+          <p:cNvPr id="2" name="Rectangle 1"/>
+          <p:cNvSpPr/>
+          <p:nvPr/>
+        </p:nvSpPr>
+        <p:spPr>
+          <a:xfrm>
+            <a:off x="0" y="0"/>
+            <a:ext cx="12191695" cy="960120"/>
+          </a:xfrm>
+          <a:prstGeom prst="rect">
+            <a:avLst/>
+          </a:prstGeom>
+          <a:solidFill>
+            <a:srgbClr val="113B3A"/>
+          </a:solidFill>
+          <a:ln>
+            <a:noFill/>
+          </a:ln>
+        </p:spPr>
+        <p:style>
+          <a:lnRef idx="1">
+            <a:schemeClr val="accent1"/>
+          </a:lnRef>
+          <a:fillRef idx="3">
+            <a:schemeClr val="accent1"/>
+          </a:fillRef>
+          <a:effectRef idx="2">
+            <a:schemeClr val="accent1"/>
+          </a:effectRef>
+          <a:fontRef idx="minor">
+            <a:schemeClr val="lt1"/>
+          </a:fontRef>
+        </p:style>
+        <p:txBody>
+          <a:bodyPr rtlCol="0" anchor="ctr"/>
+          <a:lstStyle/>
+          <a:p>
+            <a:pPr algn="ctr"/>
+          </a:p>
+        </p:txBody>
+      </p:sp>
+      <p:sp>
+        <p:nvSpPr>
+          <p:cNvPr id="3" name="TextBox 2"/>
+          <p:cNvSpPr txBox="1"/>
+          <p:nvPr/>
+        </p:nvSpPr>
+        <p:spPr>
+          <a:xfrm>
+            <a:off x="502920" y="146304"/>
+            <a:ext cx="10515600" cy="457200"/>
+          </a:xfrm>
+          <a:prstGeom prst="rect">
+            <a:avLst/>
+          </a:prstGeom>
+          <a:noFill/>
+        </p:spPr>
+        <p:txBody>
+          <a:bodyPr wrap="square" anchor="t">
+            <a:spAutoFit/>
+          </a:bodyPr>
+          <a:lstStyle/>
+          <a:p>
+            <a:pPr algn="l">
+              <a:lnSpc>
+                <a:spcPct val="125000"/>
+              </a:lnSpc>
+            </a:pPr>
+            <a:r>
+              <a:rPr sz="2600" b="1">
+                <a:solidFill>
+                  <a:srgbClr val="FFFFFF"/>
+                </a:solidFill>
+                <a:latin typeface="Microsoft YaHei"/>
+              </a:rPr>
               <a:t>这套东西现在能做什么，还不能做什么</a:t>
             </a:r>
           </a:p>
@@ -5085,7 +5735,7 @@
                 </a:solidFill>
                 <a:latin typeface="Microsoft YaHei"/>
               </a:rPr>
-              <a:t>10 / 10</a:t>
+              <a:t>11 / 11</a:t>
             </a:r>
           </a:p>
         </p:txBody>
@@ -5878,7 +6528,7 @@
                 </a:solidFill>
                 <a:latin typeface="Microsoft YaHei"/>
               </a:rPr>
-              <a:t>2 / 10</a:t>
+              <a:t>2 / 11</a:t>
             </a:r>
           </a:p>
         </p:txBody>
@@ -5978,7 +6628,7 @@
                 </a:solidFill>
                 <a:latin typeface="Microsoft YaHei"/>
               </a:rPr>
-              <a:t>架构：一个可执行文件 + 一套契约 + 三个客户端</a:t>
+              <a:t>五个创新点：每一条都能指到源码</a:t>
             </a:r>
           </a:p>
         </p:txBody>
@@ -6017,7 +6667,7 @@
                 </a:solidFill>
                 <a:latin typeface="Microsoft YaHei"/>
               </a:rPr>
-              <a:t>服务端不依赖任何应用框架的魔法，路由表能一眼数清</a:t>
+              <a:t>不是概念，是能指给你看的实现选择（每条的边界写在 docs/PROJECT-OVERVIEW.md §4.2）</a:t>
             </a:r>
           </a:p>
         </p:txBody>
@@ -6030,19 +6680,17 @@
         </p:nvSpPr>
         <p:spPr>
           <a:xfrm>
-            <a:off x="960120" y="1417320"/>
-            <a:ext cx="2743200" cy="603504"/>
+            <a:off x="566928" y="1261872"/>
+            <a:ext cx="658368" cy="566928"/>
           </a:xfrm>
           <a:prstGeom prst="roundRect">
             <a:avLst/>
           </a:prstGeom>
           <a:solidFill>
-            <a:srgbClr val="EAF4F2"/>
+            <a:srgbClr val="0E8C82"/>
           </a:solidFill>
           <a:ln>
-            <a:solidFill>
-              <a:srgbClr val="0E8C82"/>
-            </a:solidFill>
+            <a:noFill/>
           </a:ln>
         </p:spPr>
         <p:style>
@@ -6075,8 +6723,8 @@
         </p:nvSpPr>
         <p:spPr>
           <a:xfrm>
-            <a:off x="960120" y="1554480"/>
-            <a:ext cx="2743200" cy="365760"/>
+            <a:off x="566928" y="1371600"/>
+            <a:ext cx="658368" cy="365760"/>
           </a:xfrm>
           <a:prstGeom prst="rect">
             <a:avLst/>
@@ -6095,38 +6743,114 @@
               </a:lnSpc>
             </a:pPr>
             <a:r>
-              <a:rPr sz="1300" b="1">
-                <a:solidFill>
-                  <a:srgbClr val="0E8C82"/>
-                </a:solidFill>
-                <a:latin typeface="Microsoft YaHei"/>
-              </a:rPr>
-              <a:t>鸿蒙端 3 个 HAP 入口</a:t>
-            </a:r>
-          </a:p>
-        </p:txBody>
-      </p:sp>
-      <p:sp>
-        <p:nvSpPr>
-          <p:cNvPr id="7" name="Rounded Rectangle 6"/>
+              <a:rPr sz="1600" b="1">
+                <a:solidFill>
+                  <a:srgbClr val="FFFFFF"/>
+                </a:solidFill>
+                <a:latin typeface="Microsoft YaHei"/>
+              </a:rPr>
+              <a:t>01</a:t>
+            </a:r>
+          </a:p>
+        </p:txBody>
+      </p:sp>
+      <p:sp>
+        <p:nvSpPr>
+          <p:cNvPr id="7" name="TextBox 6"/>
+          <p:cNvSpPr txBox="1"/>
+          <p:nvPr/>
+        </p:nvSpPr>
+        <p:spPr>
+          <a:xfrm>
+            <a:off x="1371600" y="1280160"/>
+            <a:ext cx="10241280" cy="310896"/>
+          </a:xfrm>
+          <a:prstGeom prst="rect">
+            <a:avLst/>
+          </a:prstGeom>
+          <a:noFill/>
+        </p:spPr>
+        <p:txBody>
+          <a:bodyPr wrap="square" anchor="t">
+            <a:spAutoFit/>
+          </a:bodyPr>
+          <a:lstStyle/>
+          <a:p>
+            <a:pPr algn="l">
+              <a:lnSpc>
+                <a:spcPct val="125000"/>
+              </a:lnSpc>
+            </a:pPr>
+            <a:r>
+              <a:rPr sz="1550" b="1">
+                <a:solidFill>
+                  <a:srgbClr val="113B3A"/>
+                </a:solidFill>
+                <a:latin typeface="Microsoft YaHei"/>
+              </a:rPr>
+              <a:t>模型只负责「怎么说」，结论与号源由规则 + 数据库给</a:t>
+            </a:r>
+          </a:p>
+        </p:txBody>
+      </p:sp>
+      <p:sp>
+        <p:nvSpPr>
+          <p:cNvPr id="8" name="TextBox 7"/>
+          <p:cNvSpPr txBox="1"/>
+          <p:nvPr/>
+        </p:nvSpPr>
+        <p:spPr>
+          <a:xfrm>
+            <a:off x="1371600" y="1572768"/>
+            <a:ext cx="10332720" cy="274320"/>
+          </a:xfrm>
+          <a:prstGeom prst="rect">
+            <a:avLst/>
+          </a:prstGeom>
+          <a:noFill/>
+        </p:spPr>
+        <p:txBody>
+          <a:bodyPr wrap="square" anchor="t">
+            <a:spAutoFit/>
+          </a:bodyPr>
+          <a:lstStyle/>
+          <a:p>
+            <a:pPr algn="l">
+              <a:lnSpc>
+                <a:spcPct val="125000"/>
+              </a:lnSpc>
+            </a:pPr>
+            <a:r>
+              <a:rPr sz="1150" b="0">
+                <a:solidFill>
+                  <a:srgbClr val="3E6A66"/>
+                </a:solidFill>
+                <a:latin typeface="Microsoft YaHei"/>
+              </a:rPr>
+              <a:t>ai_triage.cj / triage.cj：模型给科室名，服务端拿真实号源校验，不通过就降级成备选号源</a:t>
+            </a:r>
+          </a:p>
+        </p:txBody>
+      </p:sp>
+      <p:sp>
+        <p:nvSpPr>
+          <p:cNvPr id="9" name="Rounded Rectangle 8"/>
           <p:cNvSpPr/>
           <p:nvPr/>
         </p:nvSpPr>
         <p:spPr>
           <a:xfrm>
-            <a:off x="960120" y="2240280"/>
-            <a:ext cx="2743200" cy="603504"/>
+            <a:off x="566928" y="2231136"/>
+            <a:ext cx="658368" cy="566928"/>
           </a:xfrm>
           <a:prstGeom prst="roundRect">
             <a:avLst/>
           </a:prstGeom>
           <a:solidFill>
-            <a:srgbClr val="EAF4F2"/>
+            <a:srgbClr val="0E8C82"/>
           </a:solidFill>
           <a:ln>
-            <a:solidFill>
-              <a:srgbClr val="0E8C82"/>
-            </a:solidFill>
+            <a:noFill/>
           </a:ln>
         </p:spPr>
         <p:style>
@@ -6153,14 +6877,14 @@
       </p:sp>
       <p:sp>
         <p:nvSpPr>
-          <p:cNvPr id="8" name="TextBox 7"/>
-          <p:cNvSpPr txBox="1"/>
-          <p:nvPr/>
-        </p:nvSpPr>
-        <p:spPr>
-          <a:xfrm>
-            <a:off x="960120" y="2377440"/>
-            <a:ext cx="2743200" cy="365760"/>
+          <p:cNvPr id="10" name="TextBox 9"/>
+          <p:cNvSpPr txBox="1"/>
+          <p:nvPr/>
+        </p:nvSpPr>
+        <p:spPr>
+          <a:xfrm>
+            <a:off x="566928" y="2340864"/>
+            <a:ext cx="658368" cy="365760"/>
           </a:xfrm>
           <a:prstGeom prst="rect">
             <a:avLst/>
@@ -6179,38 +6903,114 @@
               </a:lnSpc>
             </a:pPr>
             <a:r>
-              <a:rPr sz="1300" b="1">
-                <a:solidFill>
-                  <a:srgbClr val="0E8C82"/>
-                </a:solidFill>
-                <a:latin typeface="Microsoft YaHei"/>
-              </a:rPr>
-              <a:t>安卓端 1 个 APK</a:t>
-            </a:r>
-          </a:p>
-        </p:txBody>
-      </p:sp>
-      <p:sp>
-        <p:nvSpPr>
-          <p:cNvPr id="9" name="Rounded Rectangle 8"/>
+              <a:rPr sz="1600" b="1">
+                <a:solidFill>
+                  <a:srgbClr val="FFFFFF"/>
+                </a:solidFill>
+                <a:latin typeface="Microsoft YaHei"/>
+              </a:rPr>
+              <a:t>02</a:t>
+            </a:r>
+          </a:p>
+        </p:txBody>
+      </p:sp>
+      <p:sp>
+        <p:nvSpPr>
+          <p:cNvPr id="11" name="TextBox 10"/>
+          <p:cNvSpPr txBox="1"/>
+          <p:nvPr/>
+        </p:nvSpPr>
+        <p:spPr>
+          <a:xfrm>
+            <a:off x="1371600" y="2249424"/>
+            <a:ext cx="10241280" cy="310896"/>
+          </a:xfrm>
+          <a:prstGeom prst="rect">
+            <a:avLst/>
+          </a:prstGeom>
+          <a:noFill/>
+        </p:spPr>
+        <p:txBody>
+          <a:bodyPr wrap="square" anchor="t">
+            <a:spAutoFit/>
+          </a:bodyPr>
+          <a:lstStyle/>
+          <a:p>
+            <a:pPr algn="l">
+              <a:lnSpc>
+                <a:spcPct val="125000"/>
+              </a:lnSpc>
+            </a:pPr>
+            <a:r>
+              <a:rPr sz="1550" b="1">
+                <a:solidFill>
+                  <a:srgbClr val="113B3A"/>
+                </a:solidFill>
+                <a:latin typeface="Microsoft YaHei"/>
+              </a:rPr>
+              <a:t>危急征象的「三段式否定窗口」</a:t>
+            </a:r>
+          </a:p>
+        </p:txBody>
+      </p:sp>
+      <p:sp>
+        <p:nvSpPr>
+          <p:cNvPr id="12" name="TextBox 11"/>
+          <p:cNvSpPr txBox="1"/>
+          <p:nvPr/>
+        </p:nvSpPr>
+        <p:spPr>
+          <a:xfrm>
+            <a:off x="1371600" y="2542032"/>
+            <a:ext cx="10332720" cy="274320"/>
+          </a:xfrm>
+          <a:prstGeom prst="rect">
+            <a:avLst/>
+          </a:prstGeom>
+          <a:noFill/>
+        </p:spPr>
+        <p:txBody>
+          <a:bodyPr wrap="square" anchor="t">
+            <a:spAutoFit/>
+          </a:bodyPr>
+          <a:lstStyle/>
+          <a:p>
+            <a:pPr algn="l">
+              <a:lnSpc>
+                <a:spcPct val="125000"/>
+              </a:lnSpc>
+            </a:pPr>
+            <a:r>
+              <a:rPr sz="1150" b="0">
+                <a:solidFill>
+                  <a:srgbClr val="3E6A66"/>
+                </a:solidFill>
+                <a:latin typeface="Microsoft YaHei"/>
+              </a:rPr>
+              <a:t>triage_redflag.cj：否定窗口 8 字、间隔分档（6/1）、阻断词分段；「无法缓解的胸痛」也必须报红</a:t>
+            </a:r>
+          </a:p>
+        </p:txBody>
+      </p:sp>
+      <p:sp>
+        <p:nvSpPr>
+          <p:cNvPr id="13" name="Rounded Rectangle 12"/>
           <p:cNvSpPr/>
           <p:nvPr/>
         </p:nvSpPr>
         <p:spPr>
           <a:xfrm>
-            <a:off x="960120" y="3063240"/>
-            <a:ext cx="2743200" cy="603504"/>
+            <a:off x="566928" y="3200400"/>
+            <a:ext cx="658368" cy="566928"/>
           </a:xfrm>
           <a:prstGeom prst="roundRect">
             <a:avLst/>
           </a:prstGeom>
           <a:solidFill>
-            <a:srgbClr val="EAF4F2"/>
+            <a:srgbClr val="0E8C82"/>
           </a:solidFill>
           <a:ln>
-            <a:solidFill>
-              <a:srgbClr val="0E8C82"/>
-            </a:solidFill>
+            <a:noFill/>
           </a:ln>
         </p:spPr>
         <p:style>
@@ -6237,14 +7037,14 @@
       </p:sp>
       <p:sp>
         <p:nvSpPr>
-          <p:cNvPr id="10" name="TextBox 9"/>
-          <p:cNvSpPr txBox="1"/>
-          <p:nvPr/>
-        </p:nvSpPr>
-        <p:spPr>
-          <a:xfrm>
-            <a:off x="960120" y="3200400"/>
-            <a:ext cx="2743200" cy="365760"/>
+          <p:cNvPr id="14" name="TextBox 13"/>
+          <p:cNvSpPr txBox="1"/>
+          <p:nvPr/>
+        </p:nvSpPr>
+        <p:spPr>
+          <a:xfrm>
+            <a:off x="566928" y="3310128"/>
+            <a:ext cx="658368" cy="365760"/>
           </a:xfrm>
           <a:prstGeom prst="rect">
             <a:avLst/>
@@ -6263,33 +7063,111 @@
               </a:lnSpc>
             </a:pPr>
             <a:r>
-              <a:rPr sz="1300" b="1">
-                <a:solidFill>
-                  <a:srgbClr val="0E8C82"/>
-                </a:solidFill>
-                <a:latin typeface="Microsoft YaHei"/>
-              </a:rPr>
-              <a:t>管理台网页 7 个文件</a:t>
-            </a:r>
-          </a:p>
-        </p:txBody>
-      </p:sp>
-      <p:sp>
-        <p:nvSpPr>
-          <p:cNvPr id="11" name="Rounded Rectangle 10"/>
+              <a:rPr sz="1600" b="1">
+                <a:solidFill>
+                  <a:srgbClr val="FFFFFF"/>
+                </a:solidFill>
+                <a:latin typeface="Microsoft YaHei"/>
+              </a:rPr>
+              <a:t>03</a:t>
+            </a:r>
+          </a:p>
+        </p:txBody>
+      </p:sp>
+      <p:sp>
+        <p:nvSpPr>
+          <p:cNvPr id="15" name="TextBox 14"/>
+          <p:cNvSpPr txBox="1"/>
+          <p:nvPr/>
+        </p:nvSpPr>
+        <p:spPr>
+          <a:xfrm>
+            <a:off x="1371600" y="3218688"/>
+            <a:ext cx="10241280" cy="310896"/>
+          </a:xfrm>
+          <a:prstGeom prst="rect">
+            <a:avLst/>
+          </a:prstGeom>
+          <a:noFill/>
+        </p:spPr>
+        <p:txBody>
+          <a:bodyPr wrap="square" anchor="t">
+            <a:spAutoFit/>
+          </a:bodyPr>
+          <a:lstStyle/>
+          <a:p>
+            <a:pPr algn="l">
+              <a:lnSpc>
+                <a:spcPct val="125000"/>
+              </a:lnSpc>
+            </a:pPr>
+            <a:r>
+              <a:rPr sz="1550" b="1">
+                <a:solidFill>
+                  <a:srgbClr val="113B3A"/>
+                </a:solidFill>
+                <a:latin typeface="Microsoft YaHei"/>
+              </a:rPr>
+              <a:t>AI 能力中心改完即生效，零重启</a:t>
+            </a:r>
+          </a:p>
+        </p:txBody>
+      </p:sp>
+      <p:sp>
+        <p:nvSpPr>
+          <p:cNvPr id="16" name="TextBox 15"/>
+          <p:cNvSpPr txBox="1"/>
+          <p:nvPr/>
+        </p:nvSpPr>
+        <p:spPr>
+          <a:xfrm>
+            <a:off x="1371600" y="3511296"/>
+            <a:ext cx="10332720" cy="274320"/>
+          </a:xfrm>
+          <a:prstGeom prst="rect">
+            <a:avLst/>
+          </a:prstGeom>
+          <a:noFill/>
+        </p:spPr>
+        <p:txBody>
+          <a:bodyPr wrap="square" anchor="t">
+            <a:spAutoFit/>
+          </a:bodyPr>
+          <a:lstStyle/>
+          <a:p>
+            <a:pPr algn="l">
+              <a:lnSpc>
+                <a:spcPct val="125000"/>
+              </a:lnSpc>
+            </a:pPr>
+            <a:r>
+              <a:rPr sz="1150" b="0">
+                <a:solidFill>
+                  <a:srgbClr val="3E6A66"/>
+                </a:solidFill>
+                <a:latin typeface="Microsoft YaHei"/>
+              </a:rPr>
+              <a:t>ai_settings.cj 写库即清缓存 + 5 s TTL；改 Prompt 或切模型，下一次调用就用新值</a:t>
+            </a:r>
+          </a:p>
+        </p:txBody>
+      </p:sp>
+      <p:sp>
+        <p:nvSpPr>
+          <p:cNvPr id="17" name="Rounded Rectangle 16"/>
           <p:cNvSpPr/>
           <p:nvPr/>
         </p:nvSpPr>
         <p:spPr>
           <a:xfrm>
-            <a:off x="4343400" y="1874519"/>
-            <a:ext cx="3108960" cy="1417320"/>
+            <a:off x="566928" y="4169664"/>
+            <a:ext cx="658368" cy="566928"/>
           </a:xfrm>
           <a:prstGeom prst="roundRect">
             <a:avLst/>
           </a:prstGeom>
           <a:solidFill>
-            <a:srgbClr val="113B3A"/>
+            <a:srgbClr val="0E8C82"/>
           </a:solidFill>
           <a:ln>
             <a:noFill/>
@@ -6319,14 +7197,14 @@
       </p:sp>
       <p:sp>
         <p:nvSpPr>
-          <p:cNvPr id="12" name="TextBox 11"/>
-          <p:cNvSpPr txBox="1"/>
-          <p:nvPr/>
-        </p:nvSpPr>
-        <p:spPr>
-          <a:xfrm>
-            <a:off x="4343400" y="2084831"/>
-            <a:ext cx="3108960" cy="1005840"/>
+          <p:cNvPr id="18" name="TextBox 17"/>
+          <p:cNvSpPr txBox="1"/>
+          <p:nvPr/>
+        </p:nvSpPr>
+        <p:spPr>
+          <a:xfrm>
+            <a:off x="566928" y="4279392"/>
+            <a:ext cx="658368" cy="365760"/>
           </a:xfrm>
           <a:prstGeom prst="rect">
             <a:avLst/>
@@ -6345,70 +7223,114 @@
               </a:lnSpc>
             </a:pPr>
             <a:r>
-              <a:rPr sz="1400" b="1">
+              <a:rPr sz="1600" b="1">
                 <a:solidFill>
                   <a:srgbClr val="FFFFFF"/>
                 </a:solidFill>
                 <a:latin typeface="Microsoft YaHei"/>
               </a:rPr>
-              <a:t>hospital-server.exe</a:t>
-            </a:r>
-          </a:p>
-          <a:p>
-            <a:pPr algn="ctr">
+              <a:t>04</a:t>
+            </a:r>
+          </a:p>
+        </p:txBody>
+      </p:sp>
+      <p:sp>
+        <p:nvSpPr>
+          <p:cNvPr id="19" name="TextBox 18"/>
+          <p:cNvSpPr txBox="1"/>
+          <p:nvPr/>
+        </p:nvSpPr>
+        <p:spPr>
+          <a:xfrm>
+            <a:off x="1371600" y="4187952"/>
+            <a:ext cx="10241280" cy="310896"/>
+          </a:xfrm>
+          <a:prstGeom prst="rect">
+            <a:avLst/>
+          </a:prstGeom>
+          <a:noFill/>
+        </p:spPr>
+        <p:txBody>
+          <a:bodyPr wrap="square" anchor="t">
+            <a:spAutoFit/>
+          </a:bodyPr>
+          <a:lstStyle/>
+          <a:p>
+            <a:pPr algn="l">
               <a:lnSpc>
                 <a:spcPct val="125000"/>
               </a:lnSpc>
             </a:pPr>
             <a:r>
-              <a:rPr sz="1400" b="1">
-                <a:solidFill>
-                  <a:srgbClr val="FFFFFF"/>
-                </a:solidFill>
-                <a:latin typeface="Microsoft YaHei"/>
-              </a:rPr>
-              <a:t>仓颉 + 轻舟（参与开发）</a:t>
-            </a:r>
-          </a:p>
-          <a:p>
-            <a:pPr algn="ctr">
+              <a:rPr sz="1550" b="1">
+                <a:solidFill>
+                  <a:srgbClr val="113B3A"/>
+                </a:solidFill>
+                <a:latin typeface="Microsoft YaHei"/>
+              </a:rPr>
+              <a:t>单实例零中间件</a:t>
+            </a:r>
+          </a:p>
+        </p:txBody>
+      </p:sp>
+      <p:sp>
+        <p:nvSpPr>
+          <p:cNvPr id="20" name="TextBox 19"/>
+          <p:cNvSpPr txBox="1"/>
+          <p:nvPr/>
+        </p:nvSpPr>
+        <p:spPr>
+          <a:xfrm>
+            <a:off x="1371600" y="4480560"/>
+            <a:ext cx="10332720" cy="274320"/>
+          </a:xfrm>
+          <a:prstGeom prst="rect">
+            <a:avLst/>
+          </a:prstGeom>
+          <a:noFill/>
+        </p:spPr>
+        <p:txBody>
+          <a:bodyPr wrap="square" anchor="t">
+            <a:spAutoFit/>
+          </a:bodyPr>
+          <a:lstStyle/>
+          <a:p>
+            <a:pPr algn="l">
               <a:lnSpc>
                 <a:spcPct val="125000"/>
               </a:lnSpc>
             </a:pPr>
             <a:r>
-              <a:rPr sz="1400" b="1">
-                <a:solidFill>
-                  <a:srgbClr val="FFFFFF"/>
-                </a:solidFill>
-                <a:latin typeface="Microsoft YaHei"/>
-              </a:rPr>
-              <a:t>81 条路由</a:t>
-            </a:r>
-          </a:p>
-        </p:txBody>
-      </p:sp>
-      <p:sp>
-        <p:nvSpPr>
-          <p:cNvPr id="13" name="Rounded Rectangle 12"/>
+              <a:rPr sz="1150" b="0">
+                <a:solidFill>
+                  <a:srgbClr val="3E6A66"/>
+                </a:solidFill>
+                <a:latin typeface="Microsoft YaHei"/>
+              </a:rPr>
+              <a:t>SSE、事务、静态托管、AI 编排都在同一个 exe 里：没有 Redis、没有 MQ、没有网关</a:t>
+            </a:r>
+          </a:p>
+        </p:txBody>
+      </p:sp>
+      <p:sp>
+        <p:nvSpPr>
+          <p:cNvPr id="21" name="Rounded Rectangle 20"/>
           <p:cNvSpPr/>
           <p:nvPr/>
         </p:nvSpPr>
         <p:spPr>
           <a:xfrm>
-            <a:off x="8183879" y="1874519"/>
-            <a:ext cx="3017520" cy="1417320"/>
+            <a:off x="566928" y="5138928"/>
+            <a:ext cx="658368" cy="566928"/>
           </a:xfrm>
           <a:prstGeom prst="roundRect">
             <a:avLst/>
           </a:prstGeom>
           <a:solidFill>
-            <a:srgbClr val="EAF4F2"/>
+            <a:srgbClr val="0E8C82"/>
           </a:solidFill>
           <a:ln>
-            <a:solidFill>
-              <a:srgbClr val="B46A0B"/>
-            </a:solidFill>
+            <a:noFill/>
           </a:ln>
         </p:spPr>
         <p:style>
@@ -6435,14 +7357,14 @@
       </p:sp>
       <p:sp>
         <p:nvSpPr>
-          <p:cNvPr id="14" name="TextBox 13"/>
-          <p:cNvSpPr txBox="1"/>
-          <p:nvPr/>
-        </p:nvSpPr>
-        <p:spPr>
-          <a:xfrm>
-            <a:off x="8183879" y="2084831"/>
-            <a:ext cx="3017520" cy="1005840"/>
+          <p:cNvPr id="22" name="TextBox 21"/>
+          <p:cNvSpPr txBox="1"/>
+          <p:nvPr/>
+        </p:nvSpPr>
+        <p:spPr>
+          <a:xfrm>
+            <a:off x="566928" y="5248656"/>
+            <a:ext cx="658368" cy="365760"/>
           </a:xfrm>
           <a:prstGeom prst="rect">
             <a:avLst/>
@@ -6461,309 +7383,98 @@
               </a:lnSpc>
             </a:pPr>
             <a:r>
-              <a:rPr sz="1400" b="1">
-                <a:solidFill>
-                  <a:srgbClr val="B46A0B"/>
-                </a:solidFill>
-                <a:latin typeface="Microsoft YaHei"/>
-              </a:rPr>
-              <a:t>MariaDB 11.4</a:t>
-            </a:r>
-          </a:p>
-          <a:p>
-            <a:pPr algn="ctr">
+              <a:rPr sz="1600" b="1">
+                <a:solidFill>
+                  <a:srgbClr val="FFFFFF"/>
+                </a:solidFill>
+                <a:latin typeface="Microsoft YaHei"/>
+              </a:rPr>
+              <a:t>05</a:t>
+            </a:r>
+          </a:p>
+        </p:txBody>
+      </p:sp>
+      <p:sp>
+        <p:nvSpPr>
+          <p:cNvPr id="23" name="TextBox 22"/>
+          <p:cNvSpPr txBox="1"/>
+          <p:nvPr/>
+        </p:nvSpPr>
+        <p:spPr>
+          <a:xfrm>
+            <a:off x="1371600" y="5157216"/>
+            <a:ext cx="10241280" cy="310896"/>
+          </a:xfrm>
+          <a:prstGeom prst="rect">
+            <a:avLst/>
+          </a:prstGeom>
+          <a:noFill/>
+        </p:spPr>
+        <p:txBody>
+          <a:bodyPr wrap="square" anchor="t">
+            <a:spAutoFit/>
+          </a:bodyPr>
+          <a:lstStyle/>
+          <a:p>
+            <a:pPr algn="l">
               <a:lnSpc>
                 <a:spcPct val="125000"/>
               </a:lnSpc>
             </a:pPr>
             <a:r>
-              <a:rPr sz="1400" b="1">
-                <a:solidFill>
-                  <a:srgbClr val="B46A0B"/>
-                </a:solidFill>
-                <a:latin typeface="Microsoft YaHei"/>
-              </a:rPr>
-              <a:t>17 张表 / 直接 SQL</a:t>
-            </a:r>
-          </a:p>
-          <a:p>
-            <a:pPr algn="ctr">
+              <a:rPr sz="1550" b="1">
+                <a:solidFill>
+                  <a:srgbClr val="113B3A"/>
+                </a:solidFill>
+                <a:latin typeface="Microsoft YaHei"/>
+              </a:rPr>
+              <a:t>交付纪律门禁化</a:t>
+            </a:r>
+          </a:p>
+        </p:txBody>
+      </p:sp>
+      <p:sp>
+        <p:nvSpPr>
+          <p:cNvPr id="24" name="TextBox 23"/>
+          <p:cNvSpPr txBox="1"/>
+          <p:nvPr/>
+        </p:nvSpPr>
+        <p:spPr>
+          <a:xfrm>
+            <a:off x="1371600" y="5449824"/>
+            <a:ext cx="10332720" cy="274320"/>
+          </a:xfrm>
+          <a:prstGeom prst="rect">
+            <a:avLst/>
+          </a:prstGeom>
+          <a:noFill/>
+        </p:spPr>
+        <p:txBody>
+          <a:bodyPr wrap="square" anchor="t">
+            <a:spAutoFit/>
+          </a:bodyPr>
+          <a:lstStyle/>
+          <a:p>
+            <a:pPr algn="l">
               <a:lnSpc>
                 <a:spcPct val="125000"/>
               </a:lnSpc>
             </a:pPr>
             <a:r>
-              <a:rPr sz="1400" b="1">
-                <a:solidFill>
-                  <a:srgbClr val="B46A0B"/>
-                </a:solidFill>
-                <a:latin typeface="Microsoft YaHei"/>
-              </a:rPr>
-              <a:t>号源与挂号域独占</a:t>
-            </a:r>
-          </a:p>
-        </p:txBody>
-      </p:sp>
-      <p:cxnSp>
-        <p:nvCxnSpPr>
-          <p:cNvPr id="15" name="Connector 14"/>
-          <p:cNvCxnSpPr/>
-          <p:nvPr/>
-        </p:nvCxnSpPr>
-        <p:spPr>
-          <a:xfrm>
-            <a:off x="3721608" y="1719072"/>
-            <a:ext cx="594360" cy="859536"/>
-          </a:xfrm>
-          <a:prstGeom prst="line">
-            <a:avLst/>
-          </a:prstGeom>
-          <a:ln>
-            <a:solidFill>
-              <a:srgbClr val="5B6B6A"/>
-            </a:solidFill>
-          </a:ln>
-        </p:spPr>
-        <p:style>
-          <a:lnRef idx="2">
-            <a:schemeClr val="accent1"/>
-          </a:lnRef>
-          <a:fillRef idx="0">
-            <a:schemeClr val="accent1"/>
-          </a:fillRef>
-          <a:effectRef idx="1">
-            <a:schemeClr val="accent1"/>
-          </a:effectRef>
-          <a:fontRef idx="minor">
-            <a:schemeClr val="tx1"/>
-          </a:fontRef>
-        </p:style>
-      </p:cxnSp>
-      <p:cxnSp>
-        <p:nvCxnSpPr>
-          <p:cNvPr id="16" name="Connector 15"/>
-          <p:cNvCxnSpPr/>
-          <p:nvPr/>
-        </p:nvCxnSpPr>
-        <p:spPr>
-          <a:xfrm>
-            <a:off x="3721608" y="2542032"/>
-            <a:ext cx="594360" cy="36576"/>
-          </a:xfrm>
-          <a:prstGeom prst="line">
-            <a:avLst/>
-          </a:prstGeom>
-          <a:ln>
-            <a:solidFill>
-              <a:srgbClr val="5B6B6A"/>
-            </a:solidFill>
-          </a:ln>
-        </p:spPr>
-        <p:style>
-          <a:lnRef idx="2">
-            <a:schemeClr val="accent1"/>
-          </a:lnRef>
-          <a:fillRef idx="0">
-            <a:schemeClr val="accent1"/>
-          </a:fillRef>
-          <a:effectRef idx="1">
-            <a:schemeClr val="accent1"/>
-          </a:effectRef>
-          <a:fontRef idx="minor">
-            <a:schemeClr val="tx1"/>
-          </a:fontRef>
-        </p:style>
-      </p:cxnSp>
-      <p:cxnSp>
-        <p:nvCxnSpPr>
-          <p:cNvPr id="17" name="Connector 16"/>
-          <p:cNvCxnSpPr/>
-          <p:nvPr/>
-        </p:nvCxnSpPr>
-        <p:spPr>
-          <a:xfrm flipV="1">
-            <a:off x="3721608" y="2578608"/>
-            <a:ext cx="594360" cy="786384"/>
-          </a:xfrm>
-          <a:prstGeom prst="line">
-            <a:avLst/>
-          </a:prstGeom>
-          <a:ln>
-            <a:solidFill>
-              <a:srgbClr val="5B6B6A"/>
-            </a:solidFill>
-          </a:ln>
-        </p:spPr>
-        <p:style>
-          <a:lnRef idx="2">
-            <a:schemeClr val="accent1"/>
-          </a:lnRef>
-          <a:fillRef idx="0">
-            <a:schemeClr val="accent1"/>
-          </a:fillRef>
-          <a:effectRef idx="1">
-            <a:schemeClr val="accent1"/>
-          </a:effectRef>
-          <a:fontRef idx="minor">
-            <a:schemeClr val="tx1"/>
-          </a:fontRef>
-        </p:style>
-      </p:cxnSp>
-      <p:cxnSp>
-        <p:nvCxnSpPr>
-          <p:cNvPr id="18" name="Connector 17"/>
-          <p:cNvCxnSpPr/>
-          <p:nvPr/>
-        </p:nvCxnSpPr>
-        <p:spPr>
-          <a:xfrm>
-            <a:off x="7470648" y="2578608"/>
-            <a:ext cx="685800" cy="0"/>
-          </a:xfrm>
-          <a:prstGeom prst="line">
-            <a:avLst/>
-          </a:prstGeom>
-          <a:ln>
-            <a:solidFill>
-              <a:srgbClr val="5B6B6A"/>
-            </a:solidFill>
-          </a:ln>
-        </p:spPr>
-        <p:style>
-          <a:lnRef idx="2">
-            <a:schemeClr val="accent1"/>
-          </a:lnRef>
-          <a:fillRef idx="0">
-            <a:schemeClr val="accent1"/>
-          </a:fillRef>
-          <a:effectRef idx="1">
-            <a:schemeClr val="accent1"/>
-          </a:effectRef>
-          <a:fontRef idx="minor">
-            <a:schemeClr val="tx1"/>
-          </a:fontRef>
-        </p:style>
-      </p:cxnSp>
-      <p:sp>
-        <p:nvSpPr>
-          <p:cNvPr id="19" name="TextBox 18"/>
-          <p:cNvSpPr txBox="1"/>
-          <p:nvPr/>
-        </p:nvSpPr>
-        <p:spPr>
-          <a:xfrm>
-            <a:off x="685800" y="4069080"/>
-            <a:ext cx="10881360" cy="475488"/>
-          </a:xfrm>
-          <a:prstGeom prst="rect">
-            <a:avLst/>
-          </a:prstGeom>
-          <a:noFill/>
-        </p:spPr>
-        <p:txBody>
-          <a:bodyPr wrap="square" anchor="t">
-            <a:spAutoFit/>
-          </a:bodyPr>
-          <a:lstStyle/>
-          <a:p>
-            <a:pPr algn="l">
-              <a:lnSpc>
-                <a:spcPct val="110000"/>
-              </a:lnSpc>
-            </a:pPr>
-            <a:r>
-              <a:rPr sz="1400" b="0">
-                <a:solidFill>
-                  <a:srgbClr val="113B3A"/>
-                </a:solidFill>
-                <a:latin typeface="Microsoft YaHei"/>
-              </a:rPr>
-              <a:t>· 契约先行：contract/ 下 24 个 Schema 是三方唯一真源，字段类型错误在编译期就被三端拦下</a:t>
-            </a:r>
-          </a:p>
-        </p:txBody>
-      </p:sp>
-      <p:sp>
-        <p:nvSpPr>
-          <p:cNvPr id="20" name="TextBox 19"/>
-          <p:cNvSpPr txBox="1"/>
-          <p:nvPr/>
-        </p:nvSpPr>
-        <p:spPr>
-          <a:xfrm>
-            <a:off x="685800" y="4544568"/>
-            <a:ext cx="10881360" cy="475488"/>
-          </a:xfrm>
-          <a:prstGeom prst="rect">
-            <a:avLst/>
-          </a:prstGeom>
-          <a:noFill/>
-        </p:spPr>
-        <p:txBody>
-          <a:bodyPr wrap="square" anchor="t">
-            <a:spAutoFit/>
-          </a:bodyPr>
-          <a:lstStyle/>
-          <a:p>
-            <a:pPr algn="l">
-              <a:lnSpc>
-                <a:spcPct val="110000"/>
-              </a:lnSpc>
-            </a:pPr>
-            <a:r>
-              <a:rPr sz="1400" b="0">
-                <a:solidFill>
-                  <a:srgbClr val="113B3A"/>
-                </a:solidFill>
-                <a:latin typeface="Microsoft YaHei"/>
-              </a:rPr>
-              <a:t>· 单进程 + 单连接：事务与请求同一条链，读一致性靠事务隔离，不靠缓存对齐</a:t>
-            </a:r>
-          </a:p>
-        </p:txBody>
-      </p:sp>
-      <p:sp>
-        <p:nvSpPr>
-          <p:cNvPr id="21" name="TextBox 20"/>
-          <p:cNvSpPr txBox="1"/>
-          <p:nvPr/>
-        </p:nvSpPr>
-        <p:spPr>
-          <a:xfrm>
-            <a:off x="685800" y="5020056"/>
-            <a:ext cx="10881360" cy="475488"/>
-          </a:xfrm>
-          <a:prstGeom prst="rect">
-            <a:avLst/>
-          </a:prstGeom>
-          <a:noFill/>
-        </p:spPr>
-        <p:txBody>
-          <a:bodyPr wrap="square" anchor="t">
-            <a:spAutoFit/>
-          </a:bodyPr>
-          <a:lstStyle/>
-          <a:p>
-            <a:pPr algn="l">
-              <a:lnSpc>
-                <a:spcPct val="110000"/>
-              </a:lnSpc>
-            </a:pPr>
-            <a:r>
-              <a:rPr sz="1400" b="0">
-                <a:solidFill>
-                  <a:srgbClr val="113B3A"/>
-                </a:solidFill>
-                <a:latin typeface="Microsoft YaHei"/>
-              </a:rPr>
-              <a:t>· 零外部服务依赖：TLS 走 OpenSSL 3 运行时，AI 出站只需一次 HTTPS</a:t>
-            </a:r>
-          </a:p>
-        </p:txBody>
-      </p:sp>
-      <p:sp>
-        <p:nvSpPr>
-          <p:cNvPr id="22" name="TextBox 21"/>
+              <a:rPr sz="1150" b="0">
+                <a:solidFill>
+                  <a:srgbClr val="3E6A66"/>
+                </a:solidFill>
+                <a:latin typeface="Microsoft YaHei"/>
+              </a:rPr>
+              <a:t>821 条断言 / 18 项 live 门禁 / 24+67 契约 / 三层 CI，文档数字由脚本对账、快照由脚本校验</a:t>
+            </a:r>
+          </a:p>
+        </p:txBody>
+      </p:sp>
+      <p:sp>
+        <p:nvSpPr>
+          <p:cNvPr id="25" name="TextBox 24"/>
           <p:cNvSpPr txBox="1"/>
           <p:nvPr/>
         </p:nvSpPr>
@@ -6795,7 +7506,7 @@
                 </a:solidFill>
                 <a:latin typeface="Microsoft YaHei"/>
               </a:rPr>
-              <a:t>3 / 10</a:t>
+              <a:t>3 / 11</a:t>
             </a:r>
           </a:p>
         </p:txBody>
@@ -6895,7 +7606,7 @@
                 </a:solidFill>
                 <a:latin typeface="Microsoft YaHei"/>
               </a:rPr>
-              <a:t>患者端：一次就诊的完整闭环</a:t>
+              <a:t>架构：一个可执行文件 + 一套契约 + 三个客户端</a:t>
             </a:r>
           </a:p>
         </p:txBody>
@@ -6934,7 +7645,7 @@
                 </a:solidFill>
                 <a:latin typeface="Microsoft YaHei"/>
               </a:rPr>
-              <a:t>从「我不舒服」到「拿到病历」，中间没有断点</a:t>
+              <a:t>服务端不依赖任何应用框架的魔法，路由表能一眼数清</a:t>
             </a:r>
           </a:p>
         </p:txBody>
@@ -6947,17 +7658,19 @@
         </p:nvSpPr>
         <p:spPr>
           <a:xfrm>
-            <a:off x="566928" y="1371600"/>
-            <a:ext cx="1572768" cy="713232"/>
+            <a:off x="960120" y="1417320"/>
+            <a:ext cx="2743200" cy="603504"/>
           </a:xfrm>
           <a:prstGeom prst="roundRect">
             <a:avLst/>
           </a:prstGeom>
           <a:solidFill>
-            <a:srgbClr val="0E8C82"/>
+            <a:srgbClr val="EAF4F2"/>
           </a:solidFill>
           <a:ln>
-            <a:noFill/>
+            <a:solidFill>
+              <a:srgbClr val="0E8C82"/>
+            </a:solidFill>
           </a:ln>
         </p:spPr>
         <p:style>
@@ -6990,8 +7703,8 @@
         </p:nvSpPr>
         <p:spPr>
           <a:xfrm>
-            <a:off x="566928" y="1536192"/>
-            <a:ext cx="1572768" cy="384048"/>
+            <a:off x="960120" y="1554480"/>
+            <a:ext cx="2743200" cy="365760"/>
           </a:xfrm>
           <a:prstGeom prst="rect">
             <a:avLst/>
@@ -7012,11 +7725,11 @@
             <a:r>
               <a:rPr sz="1300" b="1">
                 <a:solidFill>
-                  <a:srgbClr val="FFFFFF"/>
-                </a:solidFill>
-                <a:latin typeface="Microsoft YaHei"/>
-              </a:rPr>
-              <a:t>智能分诊</a:t>
+                  <a:srgbClr val="0E8C82"/>
+                </a:solidFill>
+                <a:latin typeface="Microsoft YaHei"/>
+              </a:rPr>
+              <a:t>鸿蒙端 3 个 HAP 入口</a:t>
             </a:r>
           </a:p>
         </p:txBody>
@@ -7029,17 +7742,19 @@
         </p:nvSpPr>
         <p:spPr>
           <a:xfrm>
-            <a:off x="2359152" y="1371600"/>
-            <a:ext cx="1572768" cy="713232"/>
+            <a:off x="960120" y="2240280"/>
+            <a:ext cx="2743200" cy="603504"/>
           </a:xfrm>
           <a:prstGeom prst="roundRect">
             <a:avLst/>
           </a:prstGeom>
           <a:solidFill>
-            <a:srgbClr val="0E8C82"/>
+            <a:srgbClr val="EAF4F2"/>
           </a:solidFill>
           <a:ln>
-            <a:noFill/>
+            <a:solidFill>
+              <a:srgbClr val="0E8C82"/>
+            </a:solidFill>
           </a:ln>
         </p:spPr>
         <p:style>
@@ -7072,8 +7787,8 @@
         </p:nvSpPr>
         <p:spPr>
           <a:xfrm>
-            <a:off x="2359152" y="1536192"/>
-            <a:ext cx="1572768" cy="384048"/>
+            <a:off x="960120" y="2377440"/>
+            <a:ext cx="2743200" cy="365760"/>
           </a:xfrm>
           <a:prstGeom prst="rect">
             <a:avLst/>
@@ -7094,11 +7809,11 @@
             <a:r>
               <a:rPr sz="1300" b="1">
                 <a:solidFill>
-                  <a:srgbClr val="FFFFFF"/>
-                </a:solidFill>
-                <a:latin typeface="Microsoft YaHei"/>
-              </a:rPr>
-              <a:t>预问诊 6 问</a:t>
+                  <a:srgbClr val="0E8C82"/>
+                </a:solidFill>
+                <a:latin typeface="Microsoft YaHei"/>
+              </a:rPr>
+              <a:t>安卓端 1 个 APK</a:t>
             </a:r>
           </a:p>
         </p:txBody>
@@ -7111,17 +7826,19 @@
         </p:nvSpPr>
         <p:spPr>
           <a:xfrm>
-            <a:off x="4151376" y="1371600"/>
-            <a:ext cx="1572768" cy="713232"/>
+            <a:off x="960120" y="3063240"/>
+            <a:ext cx="2743200" cy="603504"/>
           </a:xfrm>
           <a:prstGeom prst="roundRect">
             <a:avLst/>
           </a:prstGeom>
           <a:solidFill>
-            <a:srgbClr val="0E8C82"/>
+            <a:srgbClr val="EAF4F2"/>
           </a:solidFill>
           <a:ln>
-            <a:noFill/>
+            <a:solidFill>
+              <a:srgbClr val="0E8C82"/>
+            </a:solidFill>
           </a:ln>
         </p:spPr>
         <p:style>
@@ -7154,8 +7871,8 @@
         </p:nvSpPr>
         <p:spPr>
           <a:xfrm>
-            <a:off x="4151376" y="1536192"/>
-            <a:ext cx="1572768" cy="384048"/>
+            <a:off x="960120" y="3200400"/>
+            <a:ext cx="2743200" cy="365760"/>
           </a:xfrm>
           <a:prstGeom prst="rect">
             <a:avLst/>
@@ -7176,11 +7893,11 @@
             <a:r>
               <a:rPr sz="1300" b="1">
                 <a:solidFill>
-                  <a:srgbClr val="FFFFFF"/>
-                </a:solidFill>
-                <a:latin typeface="Microsoft YaHei"/>
-              </a:rPr>
-              <a:t>预约挂号</a:t>
+                  <a:srgbClr val="0E8C82"/>
+                </a:solidFill>
+                <a:latin typeface="Microsoft YaHei"/>
+              </a:rPr>
+              <a:t>管理台网页 7 个文件</a:t>
             </a:r>
           </a:p>
         </p:txBody>
@@ -7193,8 +7910,8 @@
         </p:nvSpPr>
         <p:spPr>
           <a:xfrm>
-            <a:off x="5943600" y="1371600"/>
-            <a:ext cx="1572768" cy="713232"/>
+            <a:off x="4343400" y="1874519"/>
+            <a:ext cx="3108960" cy="1417320"/>
           </a:xfrm>
           <a:prstGeom prst="roundRect">
             <a:avLst/>
@@ -7236,8 +7953,8 @@
         </p:nvSpPr>
         <p:spPr>
           <a:xfrm>
-            <a:off x="5943600" y="1536192"/>
-            <a:ext cx="1572768" cy="384048"/>
+            <a:off x="4343400" y="2084831"/>
+            <a:ext cx="3108960" cy="1005840"/>
           </a:xfrm>
           <a:prstGeom prst="rect">
             <a:avLst/>
@@ -7256,13 +7973,45 @@
               </a:lnSpc>
             </a:pPr>
             <a:r>
-              <a:rPr sz="1300" b="1">
+              <a:rPr sz="1400" b="1">
                 <a:solidFill>
                   <a:srgbClr val="FFFFFF"/>
                 </a:solidFill>
                 <a:latin typeface="Microsoft YaHei"/>
               </a:rPr>
-              <a:t>到院候诊</a:t>
+              <a:t>hospital-server.exe</a:t>
+            </a:r>
+          </a:p>
+          <a:p>
+            <a:pPr algn="ctr">
+              <a:lnSpc>
+                <a:spcPct val="125000"/>
+              </a:lnSpc>
+            </a:pPr>
+            <a:r>
+              <a:rPr sz="1400" b="1">
+                <a:solidFill>
+                  <a:srgbClr val="FFFFFF"/>
+                </a:solidFill>
+                <a:latin typeface="Microsoft YaHei"/>
+              </a:rPr>
+              <a:t>仓颉 + 轻舟（参与开发）</a:t>
+            </a:r>
+          </a:p>
+          <a:p>
+            <a:pPr algn="ctr">
+              <a:lnSpc>
+                <a:spcPct val="125000"/>
+              </a:lnSpc>
+            </a:pPr>
+            <a:r>
+              <a:rPr sz="1400" b="1">
+                <a:solidFill>
+                  <a:srgbClr val="FFFFFF"/>
+                </a:solidFill>
+                <a:latin typeface="Microsoft YaHei"/>
+              </a:rPr>
+              <a:t>81 条路由</a:t>
             </a:r>
           </a:p>
         </p:txBody>
@@ -7275,17 +8024,19 @@
         </p:nvSpPr>
         <p:spPr>
           <a:xfrm>
-            <a:off x="7735823" y="1371600"/>
-            <a:ext cx="1572768" cy="713232"/>
+            <a:off x="8183879" y="1874519"/>
+            <a:ext cx="3017520" cy="1417320"/>
           </a:xfrm>
           <a:prstGeom prst="roundRect">
             <a:avLst/>
           </a:prstGeom>
           <a:solidFill>
-            <a:srgbClr val="113B3A"/>
+            <a:srgbClr val="EAF4F2"/>
           </a:solidFill>
           <a:ln>
-            <a:noFill/>
+            <a:solidFill>
+              <a:srgbClr val="B46A0B"/>
+            </a:solidFill>
           </a:ln>
         </p:spPr>
         <p:style>
@@ -7318,8 +8069,8 @@
         </p:nvSpPr>
         <p:spPr>
           <a:xfrm>
-            <a:off x="7735823" y="1536192"/>
-            <a:ext cx="1572768" cy="384048"/>
+            <a:off x="8183879" y="2084831"/>
+            <a:ext cx="3017520" cy="1005840"/>
           </a:xfrm>
           <a:prstGeom prst="rect">
             <a:avLst/>
@@ -7338,109 +8089,199 @@
               </a:lnSpc>
             </a:pPr>
             <a:r>
-              <a:rPr sz="1300" b="1">
-                <a:solidFill>
-                  <a:srgbClr val="FFFFFF"/>
-                </a:solidFill>
-                <a:latin typeface="Microsoft YaHei"/>
-              </a:rPr>
-              <a:t>医生接诊</a:t>
-            </a:r>
-          </a:p>
-        </p:txBody>
-      </p:sp>
-      <p:sp>
-        <p:nvSpPr>
-          <p:cNvPr id="15" name="Rounded Rectangle 14"/>
-          <p:cNvSpPr/>
-          <p:nvPr/>
-        </p:nvSpPr>
-        <p:spPr>
-          <a:xfrm>
-            <a:off x="9528048" y="1371600"/>
-            <a:ext cx="1572768" cy="713232"/>
-          </a:xfrm>
-          <a:prstGeom prst="roundRect">
-            <a:avLst/>
-          </a:prstGeom>
-          <a:solidFill>
-            <a:srgbClr val="113B3A"/>
-          </a:solidFill>
+              <a:rPr sz="1400" b="1">
+                <a:solidFill>
+                  <a:srgbClr val="B46A0B"/>
+                </a:solidFill>
+                <a:latin typeface="Microsoft YaHei"/>
+              </a:rPr>
+              <a:t>MariaDB 11.4</a:t>
+            </a:r>
+          </a:p>
+          <a:p>
+            <a:pPr algn="ctr">
+              <a:lnSpc>
+                <a:spcPct val="125000"/>
+              </a:lnSpc>
+            </a:pPr>
+            <a:r>
+              <a:rPr sz="1400" b="1">
+                <a:solidFill>
+                  <a:srgbClr val="B46A0B"/>
+                </a:solidFill>
+                <a:latin typeface="Microsoft YaHei"/>
+              </a:rPr>
+              <a:t>17 张表 / 直接 SQL</a:t>
+            </a:r>
+          </a:p>
+          <a:p>
+            <a:pPr algn="ctr">
+              <a:lnSpc>
+                <a:spcPct val="125000"/>
+              </a:lnSpc>
+            </a:pPr>
+            <a:r>
+              <a:rPr sz="1400" b="1">
+                <a:solidFill>
+                  <a:srgbClr val="B46A0B"/>
+                </a:solidFill>
+                <a:latin typeface="Microsoft YaHei"/>
+              </a:rPr>
+              <a:t>号源与挂号域独占</a:t>
+            </a:r>
+          </a:p>
+        </p:txBody>
+      </p:sp>
+      <p:cxnSp>
+        <p:nvCxnSpPr>
+          <p:cNvPr id="15" name="Connector 14"/>
+          <p:cNvCxnSpPr/>
+          <p:nvPr/>
+        </p:nvCxnSpPr>
+        <p:spPr>
+          <a:xfrm>
+            <a:off x="3721608" y="1719072"/>
+            <a:ext cx="594360" cy="859536"/>
+          </a:xfrm>
+          <a:prstGeom prst="line">
+            <a:avLst/>
+          </a:prstGeom>
           <a:ln>
-            <a:noFill/>
+            <a:solidFill>
+              <a:srgbClr val="5B6B6A"/>
+            </a:solidFill>
           </a:ln>
         </p:spPr>
         <p:style>
-          <a:lnRef idx="1">
+          <a:lnRef idx="2">
             <a:schemeClr val="accent1"/>
           </a:lnRef>
-          <a:fillRef idx="3">
+          <a:fillRef idx="0">
             <a:schemeClr val="accent1"/>
           </a:fillRef>
-          <a:effectRef idx="2">
+          <a:effectRef idx="1">
             <a:schemeClr val="accent1"/>
           </a:effectRef>
           <a:fontRef idx="minor">
-            <a:schemeClr val="lt1"/>
+            <a:schemeClr val="tx1"/>
           </a:fontRef>
         </p:style>
-        <p:txBody>
-          <a:bodyPr rtlCol="0" anchor="ctr"/>
-          <a:lstStyle/>
-          <a:p>
-            <a:pPr algn="ctr"/>
-          </a:p>
-        </p:txBody>
-      </p:sp>
-      <p:sp>
-        <p:nvSpPr>
-          <p:cNvPr id="16" name="TextBox 15"/>
-          <p:cNvSpPr txBox="1"/>
-          <p:nvPr/>
-        </p:nvSpPr>
-        <p:spPr>
-          <a:xfrm>
-            <a:off x="9528048" y="1536192"/>
-            <a:ext cx="1572768" cy="384048"/>
-          </a:xfrm>
-          <a:prstGeom prst="rect">
-            <a:avLst/>
-          </a:prstGeom>
-          <a:noFill/>
-        </p:spPr>
-        <p:txBody>
-          <a:bodyPr wrap="square" anchor="t">
-            <a:spAutoFit/>
-          </a:bodyPr>
-          <a:lstStyle/>
-          <a:p>
-            <a:pPr algn="ctr">
-              <a:lnSpc>
-                <a:spcPct val="125000"/>
-              </a:lnSpc>
-            </a:pPr>
-            <a:r>
-              <a:rPr sz="1300" b="1">
-                <a:solidFill>
-                  <a:srgbClr val="FFFFFF"/>
-                </a:solidFill>
-                <a:latin typeface="Microsoft YaHei"/>
-              </a:rPr>
-              <a:t>七段病历</a:t>
-            </a:r>
-          </a:p>
-        </p:txBody>
-      </p:sp>
-      <p:sp>
-        <p:nvSpPr>
-          <p:cNvPr id="17" name="TextBox 16"/>
-          <p:cNvSpPr txBox="1"/>
-          <p:nvPr/>
-        </p:nvSpPr>
-        <p:spPr>
-          <a:xfrm>
-            <a:off x="685800" y="2514600"/>
-            <a:ext cx="10881360" cy="548640"/>
+      </p:cxnSp>
+      <p:cxnSp>
+        <p:nvCxnSpPr>
+          <p:cNvPr id="16" name="Connector 15"/>
+          <p:cNvCxnSpPr/>
+          <p:nvPr/>
+        </p:nvCxnSpPr>
+        <p:spPr>
+          <a:xfrm>
+            <a:off x="3721608" y="2542032"/>
+            <a:ext cx="594360" cy="36576"/>
+          </a:xfrm>
+          <a:prstGeom prst="line">
+            <a:avLst/>
+          </a:prstGeom>
+          <a:ln>
+            <a:solidFill>
+              <a:srgbClr val="5B6B6A"/>
+            </a:solidFill>
+          </a:ln>
+        </p:spPr>
+        <p:style>
+          <a:lnRef idx="2">
+            <a:schemeClr val="accent1"/>
+          </a:lnRef>
+          <a:fillRef idx="0">
+            <a:schemeClr val="accent1"/>
+          </a:fillRef>
+          <a:effectRef idx="1">
+            <a:schemeClr val="accent1"/>
+          </a:effectRef>
+          <a:fontRef idx="minor">
+            <a:schemeClr val="tx1"/>
+          </a:fontRef>
+        </p:style>
+      </p:cxnSp>
+      <p:cxnSp>
+        <p:nvCxnSpPr>
+          <p:cNvPr id="17" name="Connector 16"/>
+          <p:cNvCxnSpPr/>
+          <p:nvPr/>
+        </p:nvCxnSpPr>
+        <p:spPr>
+          <a:xfrm flipV="1">
+            <a:off x="3721608" y="2578608"/>
+            <a:ext cx="594360" cy="786384"/>
+          </a:xfrm>
+          <a:prstGeom prst="line">
+            <a:avLst/>
+          </a:prstGeom>
+          <a:ln>
+            <a:solidFill>
+              <a:srgbClr val="5B6B6A"/>
+            </a:solidFill>
+          </a:ln>
+        </p:spPr>
+        <p:style>
+          <a:lnRef idx="2">
+            <a:schemeClr val="accent1"/>
+          </a:lnRef>
+          <a:fillRef idx="0">
+            <a:schemeClr val="accent1"/>
+          </a:fillRef>
+          <a:effectRef idx="1">
+            <a:schemeClr val="accent1"/>
+          </a:effectRef>
+          <a:fontRef idx="minor">
+            <a:schemeClr val="tx1"/>
+          </a:fontRef>
+        </p:style>
+      </p:cxnSp>
+      <p:cxnSp>
+        <p:nvCxnSpPr>
+          <p:cNvPr id="18" name="Connector 17"/>
+          <p:cNvCxnSpPr/>
+          <p:nvPr/>
+        </p:nvCxnSpPr>
+        <p:spPr>
+          <a:xfrm>
+            <a:off x="7470648" y="2578608"/>
+            <a:ext cx="685800" cy="0"/>
+          </a:xfrm>
+          <a:prstGeom prst="line">
+            <a:avLst/>
+          </a:prstGeom>
+          <a:ln>
+            <a:solidFill>
+              <a:srgbClr val="5B6B6A"/>
+            </a:solidFill>
+          </a:ln>
+        </p:spPr>
+        <p:style>
+          <a:lnRef idx="2">
+            <a:schemeClr val="accent1"/>
+          </a:lnRef>
+          <a:fillRef idx="0">
+            <a:schemeClr val="accent1"/>
+          </a:fillRef>
+          <a:effectRef idx="1">
+            <a:schemeClr val="accent1"/>
+          </a:effectRef>
+          <a:fontRef idx="minor">
+            <a:schemeClr val="tx1"/>
+          </a:fontRef>
+        </p:style>
+      </p:cxnSp>
+      <p:sp>
+        <p:nvSpPr>
+          <p:cNvPr id="19" name="TextBox 18"/>
+          <p:cNvSpPr txBox="1"/>
+          <p:nvPr/>
+        </p:nvSpPr>
+        <p:spPr>
+          <a:xfrm>
+            <a:off x="685800" y="4069080"/>
+            <a:ext cx="10881360" cy="475488"/>
           </a:xfrm>
           <a:prstGeom prst="rect">
             <a:avLst/>
@@ -7465,21 +8306,21 @@
                 </a:solidFill>
                 <a:latin typeface="Microsoft YaHei"/>
               </a:rPr>
-              <a:t>· 分诊由服务端规则引擎判定科室，模型只负责把结论转写成患者能读的一两句；可用号源由服务端实时校验</a:t>
-            </a:r>
-          </a:p>
-        </p:txBody>
-      </p:sp>
-      <p:sp>
-        <p:nvSpPr>
-          <p:cNvPr id="18" name="TextBox 17"/>
-          <p:cNvSpPr txBox="1"/>
-          <p:nvPr/>
-        </p:nvSpPr>
-        <p:spPr>
-          <a:xfrm>
-            <a:off x="685800" y="3063240"/>
-            <a:ext cx="10881360" cy="548640"/>
+              <a:t>· 契约先行：contract/ 下 24 个 Schema 是三方唯一真源，字段类型错误在编译期就被三端拦下</a:t>
+            </a:r>
+          </a:p>
+        </p:txBody>
+      </p:sp>
+      <p:sp>
+        <p:nvSpPr>
+          <p:cNvPr id="20" name="TextBox 19"/>
+          <p:cNvSpPr txBox="1"/>
+          <p:nvPr/>
+        </p:nvSpPr>
+        <p:spPr>
+          <a:xfrm>
+            <a:off x="685800" y="4544568"/>
+            <a:ext cx="10881360" cy="475488"/>
           </a:xfrm>
           <a:prstGeom prst="rect">
             <a:avLst/>
@@ -7504,21 +8345,21 @@
                 </a:solidFill>
                 <a:latin typeface="Microsoft YaHei"/>
               </a:rPr>
-              <a:t>· 预问诊把主诉、病程、程度、伴随症状、既往史、过敏史结构化，直接喂给医生端病历</a:t>
-            </a:r>
-          </a:p>
-        </p:txBody>
-      </p:sp>
-      <p:sp>
-        <p:nvSpPr>
-          <p:cNvPr id="19" name="TextBox 18"/>
-          <p:cNvSpPr txBox="1"/>
-          <p:nvPr/>
-        </p:nvSpPr>
-        <p:spPr>
-          <a:xfrm>
-            <a:off x="685800" y="3611880"/>
-            <a:ext cx="10881360" cy="548640"/>
+              <a:t>· 单进程 + 单连接：事务与请求同一条链，读一致性靠事务隔离，不靠缓存对齐</a:t>
+            </a:r>
+          </a:p>
+        </p:txBody>
+      </p:sp>
+      <p:sp>
+        <p:nvSpPr>
+          <p:cNvPr id="21" name="TextBox 20"/>
+          <p:cNvSpPr txBox="1"/>
+          <p:nvPr/>
+        </p:nvSpPr>
+        <p:spPr>
+          <a:xfrm>
+            <a:off x="685800" y="5020056"/>
+            <a:ext cx="10881360" cy="475488"/>
           </a:xfrm>
           <a:prstGeom prst="rect">
             <a:avLst/>
@@ -7543,85 +8384,7 @@
                 </a:solidFill>
                 <a:latin typeface="Microsoft YaHei"/>
               </a:rPr>
-              <a:t>· 挂号走真实扣号（UPDATE … WHERE remain_num &gt; 0），列表自带科室与医生名，不用客户端拼 id</a:t>
-            </a:r>
-          </a:p>
-        </p:txBody>
-      </p:sp>
-      <p:sp>
-        <p:nvSpPr>
-          <p:cNvPr id="20" name="TextBox 19"/>
-          <p:cNvSpPr txBox="1"/>
-          <p:nvPr/>
-        </p:nvSpPr>
-        <p:spPr>
-          <a:xfrm>
-            <a:off x="685800" y="4160520"/>
-            <a:ext cx="10881360" cy="548640"/>
-          </a:xfrm>
-          <a:prstGeom prst="rect">
-            <a:avLst/>
-          </a:prstGeom>
-          <a:noFill/>
-        </p:spPr>
-        <p:txBody>
-          <a:bodyPr wrap="square" anchor="t">
-            <a:spAutoFit/>
-          </a:bodyPr>
-          <a:lstStyle/>
-          <a:p>
-            <a:pPr algn="l">
-              <a:lnSpc>
-                <a:spcPct val="110000"/>
-              </a:lnSpc>
-            </a:pPr>
-            <a:r>
-              <a:rPr sz="1400" b="0">
-                <a:solidFill>
-                  <a:srgbClr val="113B3A"/>
-                </a:solidFill>
-                <a:latin typeface="Microsoft YaHei"/>
-              </a:rPr>
-              <a:t>· 病历锁定后患者可读、不可改；医生改病历留修订历史</a:t>
-            </a:r>
-          </a:p>
-        </p:txBody>
-      </p:sp>
-      <p:sp>
-        <p:nvSpPr>
-          <p:cNvPr id="21" name="TextBox 20"/>
-          <p:cNvSpPr txBox="1"/>
-          <p:nvPr/>
-        </p:nvSpPr>
-        <p:spPr>
-          <a:xfrm>
-            <a:off x="685800" y="5440680"/>
-            <a:ext cx="10881360" cy="731520"/>
-          </a:xfrm>
-          <a:prstGeom prst="rect">
-            <a:avLst/>
-          </a:prstGeom>
-          <a:noFill/>
-        </p:spPr>
-        <p:txBody>
-          <a:bodyPr wrap="square" anchor="t">
-            <a:spAutoFit/>
-          </a:bodyPr>
-          <a:lstStyle/>
-          <a:p>
-            <a:pPr algn="l">
-              <a:lnSpc>
-                <a:spcPct val="125000"/>
-              </a:lnSpc>
-            </a:pPr>
-            <a:r>
-              <a:rPr sz="1300" b="1">
-                <a:solidFill>
-                  <a:srgbClr val="0E8C82"/>
-                </a:solidFill>
-                <a:latin typeface="Microsoft YaHei"/>
-              </a:rPr>
-              <a:t>实测：患者 demo_patient 挂号 → 医生接诊 → 提交锁定 → 患者端「医疗档案」看到 7/7 段完整病历</a:t>
+              <a:t>· 零外部服务依赖：TLS 走 OpenSSL 3 运行时，AI 出站只需一次 HTTPS</a:t>
             </a:r>
           </a:p>
         </p:txBody>
@@ -7660,7 +8423,7 @@
                 </a:solidFill>
                 <a:latin typeface="Microsoft YaHei"/>
               </a:rPr>
-              <a:t>4 / 10</a:t>
+              <a:t>4 / 11</a:t>
             </a:r>
           </a:p>
         </p:txBody>
@@ -7760,7 +8523,7 @@
                 </a:solidFill>
                 <a:latin typeface="Microsoft YaHei"/>
               </a:rPr>
-              <a:t>AI：真接线，不是 PPT 里的框</a:t>
+              <a:t>患者端：一次就诊的完整闭环</a:t>
             </a:r>
           </a:p>
         </p:txBody>
@@ -7799,7 +8562,7 @@
                 </a:solidFill>
                 <a:latin typeface="Microsoft YaHei"/>
               </a:rPr>
-              <a:t>四层证据都能现场复现</a:t>
+              <a:t>从「我不舒服」到「拿到病历」，中间没有断点</a:t>
             </a:r>
           </a:p>
         </p:txBody>
@@ -7812,19 +8575,17 @@
         </p:nvSpPr>
         <p:spPr>
           <a:xfrm>
-            <a:off x="566928" y="1325880"/>
-            <a:ext cx="2606040" cy="2148840"/>
+            <a:off x="566928" y="1371600"/>
+            <a:ext cx="1572768" cy="713232"/>
           </a:xfrm>
           <a:prstGeom prst="roundRect">
             <a:avLst/>
           </a:prstGeom>
           <a:solidFill>
-            <a:srgbClr val="EAF4F2"/>
+            <a:srgbClr val="0E8C82"/>
           </a:solidFill>
           <a:ln>
-            <a:solidFill>
-              <a:srgbClr val="0E8C82"/>
-            </a:solidFill>
+            <a:noFill/>
           </a:ln>
         </p:spPr>
         <p:style>
@@ -7857,129 +8618,56 @@
         </p:nvSpPr>
         <p:spPr>
           <a:xfrm>
-            <a:off x="731520" y="1481328"/>
-            <a:ext cx="2286000" cy="365760"/>
-          </a:xfrm>
-          <a:prstGeom prst="rect">
-            <a:avLst/>
-          </a:prstGeom>
-          <a:noFill/>
-        </p:spPr>
-        <p:txBody>
-          <a:bodyPr wrap="square" anchor="t">
-            <a:spAutoFit/>
-          </a:bodyPr>
-          <a:lstStyle/>
-          <a:p>
-            <a:pPr algn="l">
+            <a:off x="566928" y="1536192"/>
+            <a:ext cx="1572768" cy="384048"/>
+          </a:xfrm>
+          <a:prstGeom prst="rect">
+            <a:avLst/>
+          </a:prstGeom>
+          <a:noFill/>
+        </p:spPr>
+        <p:txBody>
+          <a:bodyPr wrap="square" anchor="t">
+            <a:spAutoFit/>
+          </a:bodyPr>
+          <a:lstStyle/>
+          <a:p>
+            <a:pPr algn="ctr">
               <a:lnSpc>
                 <a:spcPct val="125000"/>
               </a:lnSpc>
             </a:pPr>
             <a:r>
-              <a:rPr sz="1700" b="1">
-                <a:solidFill>
-                  <a:srgbClr val="0E8C82"/>
-                </a:solidFill>
-                <a:latin typeface="Microsoft YaHei"/>
-              </a:rPr>
-              <a:t>模型</a:t>
-            </a:r>
-          </a:p>
-        </p:txBody>
-      </p:sp>
-      <p:sp>
-        <p:nvSpPr>
-          <p:cNvPr id="7" name="TextBox 6"/>
-          <p:cNvSpPr txBox="1"/>
-          <p:nvPr/>
-        </p:nvSpPr>
-        <p:spPr>
-          <a:xfrm>
-            <a:off x="731520" y="1938528"/>
-            <a:ext cx="2331720" cy="1371600"/>
-          </a:xfrm>
-          <a:prstGeom prst="rect">
-            <a:avLst/>
-          </a:prstGeom>
-          <a:noFill/>
-        </p:spPr>
-        <p:txBody>
-          <a:bodyPr wrap="square" anchor="t">
-            <a:spAutoFit/>
-          </a:bodyPr>
-          <a:lstStyle/>
-          <a:p>
-            <a:pPr algn="l">
-              <a:lnSpc>
-                <a:spcPct val="130000"/>
-              </a:lnSpc>
-            </a:pPr>
-            <a:r>
-              <a:rPr sz="1200" b="0">
-                <a:solidFill>
-                  <a:srgbClr val="113B3A"/>
-                </a:solidFill>
-                <a:latin typeface="Microsoft YaHei"/>
-              </a:rPr>
-              <a:t>deepseek-chat</a:t>
-            </a:r>
-          </a:p>
-          <a:p>
-            <a:pPr algn="l">
-              <a:lnSpc>
-                <a:spcPct val="130000"/>
-              </a:lnSpc>
-            </a:pPr>
-            <a:r>
-              <a:rPr sz="1200" b="0">
-                <a:solidFill>
-                  <a:srgbClr val="113B3A"/>
-                </a:solidFill>
-                <a:latin typeface="Microsoft YaHei"/>
-              </a:rPr>
-              <a:t>真实 HTTPS 出站</a:t>
-            </a:r>
-          </a:p>
-          <a:p>
-            <a:pPr algn="l">
-              <a:lnSpc>
-                <a:spcPct val="130000"/>
-              </a:lnSpc>
-            </a:pPr>
-            <a:r>
-              <a:rPr sz="1200" b="0">
-                <a:solidFill>
-                  <a:srgbClr val="113B3A"/>
-                </a:solidFill>
-                <a:latin typeface="Microsoft YaHei"/>
-              </a:rPr>
-              <a:t>TLS 走本地 CA bundle</a:t>
-            </a:r>
-          </a:p>
-        </p:txBody>
-      </p:sp>
-      <p:sp>
-        <p:nvSpPr>
-          <p:cNvPr id="8" name="Rounded Rectangle 7"/>
+              <a:rPr sz="1300" b="1">
+                <a:solidFill>
+                  <a:srgbClr val="FFFFFF"/>
+                </a:solidFill>
+                <a:latin typeface="Microsoft YaHei"/>
+              </a:rPr>
+              <a:t>智能分诊</a:t>
+            </a:r>
+          </a:p>
+        </p:txBody>
+      </p:sp>
+      <p:sp>
+        <p:nvSpPr>
+          <p:cNvPr id="7" name="Rounded Rectangle 6"/>
           <p:cNvSpPr/>
           <p:nvPr/>
         </p:nvSpPr>
         <p:spPr>
           <a:xfrm>
-            <a:off x="3429000" y="1325880"/>
-            <a:ext cx="2606040" cy="2148840"/>
+            <a:off x="2359152" y="1371600"/>
+            <a:ext cx="1572768" cy="713232"/>
           </a:xfrm>
           <a:prstGeom prst="roundRect">
             <a:avLst/>
           </a:prstGeom>
           <a:solidFill>
-            <a:srgbClr val="EAF4F2"/>
+            <a:srgbClr val="0E8C82"/>
           </a:solidFill>
           <a:ln>
-            <a:solidFill>
-              <a:srgbClr val="0E8C82"/>
-            </a:solidFill>
+            <a:noFill/>
           </a:ln>
         </p:spPr>
         <p:style>
@@ -8006,135 +8694,62 @@
       </p:sp>
       <p:sp>
         <p:nvSpPr>
-          <p:cNvPr id="9" name="TextBox 8"/>
-          <p:cNvSpPr txBox="1"/>
-          <p:nvPr/>
-        </p:nvSpPr>
-        <p:spPr>
-          <a:xfrm>
-            <a:off x="3593592" y="1481328"/>
-            <a:ext cx="2286000" cy="365760"/>
-          </a:xfrm>
-          <a:prstGeom prst="rect">
-            <a:avLst/>
-          </a:prstGeom>
-          <a:noFill/>
-        </p:spPr>
-        <p:txBody>
-          <a:bodyPr wrap="square" anchor="t">
-            <a:spAutoFit/>
-          </a:bodyPr>
-          <a:lstStyle/>
-          <a:p>
-            <a:pPr algn="l">
+          <p:cNvPr id="8" name="TextBox 7"/>
+          <p:cNvSpPr txBox="1"/>
+          <p:nvPr/>
+        </p:nvSpPr>
+        <p:spPr>
+          <a:xfrm>
+            <a:off x="2359152" y="1536192"/>
+            <a:ext cx="1572768" cy="384048"/>
+          </a:xfrm>
+          <a:prstGeom prst="rect">
+            <a:avLst/>
+          </a:prstGeom>
+          <a:noFill/>
+        </p:spPr>
+        <p:txBody>
+          <a:bodyPr wrap="square" anchor="t">
+            <a:spAutoFit/>
+          </a:bodyPr>
+          <a:lstStyle/>
+          <a:p>
+            <a:pPr algn="ctr">
               <a:lnSpc>
                 <a:spcPct val="125000"/>
               </a:lnSpc>
             </a:pPr>
             <a:r>
-              <a:rPr sz="1700" b="1">
-                <a:solidFill>
-                  <a:srgbClr val="0E8C82"/>
-                </a:solidFill>
-                <a:latin typeface="Microsoft YaHei"/>
-              </a:rPr>
-              <a:t>Prompt</a:t>
-            </a:r>
-          </a:p>
-        </p:txBody>
-      </p:sp>
-      <p:sp>
-        <p:nvSpPr>
-          <p:cNvPr id="10" name="TextBox 9"/>
-          <p:cNvSpPr txBox="1"/>
-          <p:nvPr/>
-        </p:nvSpPr>
-        <p:spPr>
-          <a:xfrm>
-            <a:off x="3593592" y="1938528"/>
-            <a:ext cx="2331720" cy="1371600"/>
-          </a:xfrm>
-          <a:prstGeom prst="rect">
-            <a:avLst/>
-          </a:prstGeom>
-          <a:noFill/>
-        </p:spPr>
-        <p:txBody>
-          <a:bodyPr wrap="square" anchor="t">
-            <a:spAutoFit/>
-          </a:bodyPr>
-          <a:lstStyle/>
-          <a:p>
-            <a:pPr algn="l">
-              <a:lnSpc>
-                <a:spcPct val="130000"/>
-              </a:lnSpc>
-            </a:pPr>
-            <a:r>
-              <a:rPr sz="1200" b="0">
-                <a:solidFill>
-                  <a:srgbClr val="113B3A"/>
-                </a:solidFill>
-                <a:latin typeface="Microsoft YaHei"/>
-              </a:rPr>
-              <a:t>4 个槽位</a:t>
-            </a:r>
-          </a:p>
-          <a:p>
-            <a:pPr algn="l">
-              <a:lnSpc>
-                <a:spcPct val="130000"/>
-              </a:lnSpc>
-            </a:pPr>
-            <a:r>
-              <a:rPr sz="1200" b="0">
-                <a:solidFill>
-                  <a:srgbClr val="113B3A"/>
-                </a:solidFill>
-                <a:latin typeface="Microsoft YaHei"/>
-              </a:rPr>
-              <a:t>管理者改模板零重启生效</a:t>
-            </a:r>
-          </a:p>
-          <a:p>
-            <a:pPr algn="l">
-              <a:lnSpc>
-                <a:spcPct val="130000"/>
-              </a:lnSpc>
-            </a:pPr>
-            <a:r>
-              <a:rPr sz="1200" b="0">
-                <a:solidFill>
-                  <a:srgbClr val="113B3A"/>
-                </a:solidFill>
-                <a:latin typeface="Microsoft YaHei"/>
-              </a:rPr>
-              <a:t>triage 已真接线</a:t>
-            </a:r>
-          </a:p>
-        </p:txBody>
-      </p:sp>
-      <p:sp>
-        <p:nvSpPr>
-          <p:cNvPr id="11" name="Rounded Rectangle 10"/>
+              <a:rPr sz="1300" b="1">
+                <a:solidFill>
+                  <a:srgbClr val="FFFFFF"/>
+                </a:solidFill>
+                <a:latin typeface="Microsoft YaHei"/>
+              </a:rPr>
+              <a:t>预问诊 6 问</a:t>
+            </a:r>
+          </a:p>
+        </p:txBody>
+      </p:sp>
+      <p:sp>
+        <p:nvSpPr>
+          <p:cNvPr id="9" name="Rounded Rectangle 8"/>
           <p:cNvSpPr/>
           <p:nvPr/>
         </p:nvSpPr>
         <p:spPr>
           <a:xfrm>
-            <a:off x="6291072" y="1325880"/>
-            <a:ext cx="2606040" cy="2148840"/>
+            <a:off x="4151376" y="1371600"/>
+            <a:ext cx="1572768" cy="713232"/>
           </a:xfrm>
           <a:prstGeom prst="roundRect">
             <a:avLst/>
           </a:prstGeom>
           <a:solidFill>
-            <a:srgbClr val="EAF4F2"/>
+            <a:srgbClr val="0E8C82"/>
           </a:solidFill>
           <a:ln>
-            <a:solidFill>
-              <a:srgbClr val="0E8C82"/>
-            </a:solidFill>
+            <a:noFill/>
           </a:ln>
         </p:spPr>
         <p:style>
@@ -8161,135 +8776,62 @@
       </p:sp>
       <p:sp>
         <p:nvSpPr>
-          <p:cNvPr id="12" name="TextBox 11"/>
-          <p:cNvSpPr txBox="1"/>
-          <p:nvPr/>
-        </p:nvSpPr>
-        <p:spPr>
-          <a:xfrm>
-            <a:off x="6455664" y="1481328"/>
-            <a:ext cx="2286000" cy="365760"/>
-          </a:xfrm>
-          <a:prstGeom prst="rect">
-            <a:avLst/>
-          </a:prstGeom>
-          <a:noFill/>
-        </p:spPr>
-        <p:txBody>
-          <a:bodyPr wrap="square" anchor="t">
-            <a:spAutoFit/>
-          </a:bodyPr>
-          <a:lstStyle/>
-          <a:p>
-            <a:pPr algn="l">
+          <p:cNvPr id="10" name="TextBox 9"/>
+          <p:cNvSpPr txBox="1"/>
+          <p:nvPr/>
+        </p:nvSpPr>
+        <p:spPr>
+          <a:xfrm>
+            <a:off x="4151376" y="1536192"/>
+            <a:ext cx="1572768" cy="384048"/>
+          </a:xfrm>
+          <a:prstGeom prst="rect">
+            <a:avLst/>
+          </a:prstGeom>
+          <a:noFill/>
+        </p:spPr>
+        <p:txBody>
+          <a:bodyPr wrap="square" anchor="t">
+            <a:spAutoFit/>
+          </a:bodyPr>
+          <a:lstStyle/>
+          <a:p>
+            <a:pPr algn="ctr">
               <a:lnSpc>
                 <a:spcPct val="125000"/>
               </a:lnSpc>
             </a:pPr>
             <a:r>
-              <a:rPr sz="1700" b="1">
-                <a:solidFill>
-                  <a:srgbClr val="0E8C82"/>
-                </a:solidFill>
-                <a:latin typeface="Microsoft YaHei"/>
-              </a:rPr>
-              <a:t>知识库</a:t>
-            </a:r>
-          </a:p>
-        </p:txBody>
-      </p:sp>
-      <p:sp>
-        <p:nvSpPr>
-          <p:cNvPr id="13" name="TextBox 12"/>
-          <p:cNvSpPr txBox="1"/>
-          <p:nvPr/>
-        </p:nvSpPr>
-        <p:spPr>
-          <a:xfrm>
-            <a:off x="6455664" y="1938528"/>
-            <a:ext cx="2331720" cy="1371600"/>
-          </a:xfrm>
-          <a:prstGeom prst="rect">
-            <a:avLst/>
-          </a:prstGeom>
-          <a:noFill/>
-        </p:spPr>
-        <p:txBody>
-          <a:bodyPr wrap="square" anchor="t">
-            <a:spAutoFit/>
-          </a:bodyPr>
-          <a:lstStyle/>
-          <a:p>
-            <a:pPr algn="l">
-              <a:lnSpc>
-                <a:spcPct val="130000"/>
-              </a:lnSpc>
-            </a:pPr>
-            <a:r>
-              <a:rPr sz="1200" b="0">
-                <a:solidFill>
-                  <a:srgbClr val="113B3A"/>
-                </a:solidFill>
-                <a:latin typeface="Microsoft YaHei"/>
-              </a:rPr>
-              <a:t>关键词检索端到端</a:t>
-            </a:r>
-          </a:p>
-          <a:p>
-            <a:pPr algn="l">
-              <a:lnSpc>
-                <a:spcPct val="130000"/>
-              </a:lnSpc>
-            </a:pPr>
-            <a:r>
-              <a:rPr sz="1200" b="0">
-                <a:solidFill>
-                  <a:srgbClr val="113B3A"/>
-                </a:solidFill>
-                <a:latin typeface="Microsoft YaHei"/>
-              </a:rPr>
-              <a:t>used_kb=true 实测</a:t>
-            </a:r>
-          </a:p>
-          <a:p>
-            <a:pPr algn="l">
-              <a:lnSpc>
-                <a:spcPct val="130000"/>
-              </a:lnSpc>
-            </a:pPr>
-            <a:r>
-              <a:rPr sz="1200" b="0">
-                <a:solidFill>
-                  <a:srgbClr val="113B3A"/>
-                </a:solidFill>
-                <a:latin typeface="Microsoft YaHei"/>
-              </a:rPr>
-              <a:t>kb_doc_ids=1734,1738</a:t>
-            </a:r>
-          </a:p>
-        </p:txBody>
-      </p:sp>
-      <p:sp>
-        <p:nvSpPr>
-          <p:cNvPr id="14" name="Rounded Rectangle 13"/>
+              <a:rPr sz="1300" b="1">
+                <a:solidFill>
+                  <a:srgbClr val="FFFFFF"/>
+                </a:solidFill>
+                <a:latin typeface="Microsoft YaHei"/>
+              </a:rPr>
+              <a:t>预约挂号</a:t>
+            </a:r>
+          </a:p>
+        </p:txBody>
+      </p:sp>
+      <p:sp>
+        <p:nvSpPr>
+          <p:cNvPr id="11" name="Rounded Rectangle 10"/>
           <p:cNvSpPr/>
           <p:nvPr/>
         </p:nvSpPr>
         <p:spPr>
           <a:xfrm>
-            <a:off x="9153144" y="1325880"/>
-            <a:ext cx="2606040" cy="2148840"/>
+            <a:off x="5943600" y="1371600"/>
+            <a:ext cx="1572768" cy="713232"/>
           </a:xfrm>
           <a:prstGeom prst="roundRect">
             <a:avLst/>
           </a:prstGeom>
           <a:solidFill>
-            <a:srgbClr val="EAF4F2"/>
+            <a:srgbClr val="113B3A"/>
           </a:solidFill>
           <a:ln>
-            <a:solidFill>
-              <a:srgbClr val="0E8C82"/>
-            </a:solidFill>
+            <a:noFill/>
           </a:ln>
         </p:spPr>
         <p:style>
@@ -8316,14 +8858,217 @@
       </p:sp>
       <p:sp>
         <p:nvSpPr>
-          <p:cNvPr id="15" name="TextBox 14"/>
-          <p:cNvSpPr txBox="1"/>
-          <p:nvPr/>
-        </p:nvSpPr>
-        <p:spPr>
-          <a:xfrm>
-            <a:off x="9317736" y="1481328"/>
-            <a:ext cx="2286000" cy="365760"/>
+          <p:cNvPr id="12" name="TextBox 11"/>
+          <p:cNvSpPr txBox="1"/>
+          <p:nvPr/>
+        </p:nvSpPr>
+        <p:spPr>
+          <a:xfrm>
+            <a:off x="5943600" y="1536192"/>
+            <a:ext cx="1572768" cy="384048"/>
+          </a:xfrm>
+          <a:prstGeom prst="rect">
+            <a:avLst/>
+          </a:prstGeom>
+          <a:noFill/>
+        </p:spPr>
+        <p:txBody>
+          <a:bodyPr wrap="square" anchor="t">
+            <a:spAutoFit/>
+          </a:bodyPr>
+          <a:lstStyle/>
+          <a:p>
+            <a:pPr algn="ctr">
+              <a:lnSpc>
+                <a:spcPct val="125000"/>
+              </a:lnSpc>
+            </a:pPr>
+            <a:r>
+              <a:rPr sz="1300" b="1">
+                <a:solidFill>
+                  <a:srgbClr val="FFFFFF"/>
+                </a:solidFill>
+                <a:latin typeface="Microsoft YaHei"/>
+              </a:rPr>
+              <a:t>到院候诊</a:t>
+            </a:r>
+          </a:p>
+        </p:txBody>
+      </p:sp>
+      <p:sp>
+        <p:nvSpPr>
+          <p:cNvPr id="13" name="Rounded Rectangle 12"/>
+          <p:cNvSpPr/>
+          <p:nvPr/>
+        </p:nvSpPr>
+        <p:spPr>
+          <a:xfrm>
+            <a:off x="7735823" y="1371600"/>
+            <a:ext cx="1572768" cy="713232"/>
+          </a:xfrm>
+          <a:prstGeom prst="roundRect">
+            <a:avLst/>
+          </a:prstGeom>
+          <a:solidFill>
+            <a:srgbClr val="113B3A"/>
+          </a:solidFill>
+          <a:ln>
+            <a:noFill/>
+          </a:ln>
+        </p:spPr>
+        <p:style>
+          <a:lnRef idx="1">
+            <a:schemeClr val="accent1"/>
+          </a:lnRef>
+          <a:fillRef idx="3">
+            <a:schemeClr val="accent1"/>
+          </a:fillRef>
+          <a:effectRef idx="2">
+            <a:schemeClr val="accent1"/>
+          </a:effectRef>
+          <a:fontRef idx="minor">
+            <a:schemeClr val="lt1"/>
+          </a:fontRef>
+        </p:style>
+        <p:txBody>
+          <a:bodyPr rtlCol="0" anchor="ctr"/>
+          <a:lstStyle/>
+          <a:p>
+            <a:pPr algn="ctr"/>
+          </a:p>
+        </p:txBody>
+      </p:sp>
+      <p:sp>
+        <p:nvSpPr>
+          <p:cNvPr id="14" name="TextBox 13"/>
+          <p:cNvSpPr txBox="1"/>
+          <p:nvPr/>
+        </p:nvSpPr>
+        <p:spPr>
+          <a:xfrm>
+            <a:off x="7735823" y="1536192"/>
+            <a:ext cx="1572768" cy="384048"/>
+          </a:xfrm>
+          <a:prstGeom prst="rect">
+            <a:avLst/>
+          </a:prstGeom>
+          <a:noFill/>
+        </p:spPr>
+        <p:txBody>
+          <a:bodyPr wrap="square" anchor="t">
+            <a:spAutoFit/>
+          </a:bodyPr>
+          <a:lstStyle/>
+          <a:p>
+            <a:pPr algn="ctr">
+              <a:lnSpc>
+                <a:spcPct val="125000"/>
+              </a:lnSpc>
+            </a:pPr>
+            <a:r>
+              <a:rPr sz="1300" b="1">
+                <a:solidFill>
+                  <a:srgbClr val="FFFFFF"/>
+                </a:solidFill>
+                <a:latin typeface="Microsoft YaHei"/>
+              </a:rPr>
+              <a:t>医生接诊</a:t>
+            </a:r>
+          </a:p>
+        </p:txBody>
+      </p:sp>
+      <p:sp>
+        <p:nvSpPr>
+          <p:cNvPr id="15" name="Rounded Rectangle 14"/>
+          <p:cNvSpPr/>
+          <p:nvPr/>
+        </p:nvSpPr>
+        <p:spPr>
+          <a:xfrm>
+            <a:off x="9528048" y="1371600"/>
+            <a:ext cx="1572768" cy="713232"/>
+          </a:xfrm>
+          <a:prstGeom prst="roundRect">
+            <a:avLst/>
+          </a:prstGeom>
+          <a:solidFill>
+            <a:srgbClr val="113B3A"/>
+          </a:solidFill>
+          <a:ln>
+            <a:noFill/>
+          </a:ln>
+        </p:spPr>
+        <p:style>
+          <a:lnRef idx="1">
+            <a:schemeClr val="accent1"/>
+          </a:lnRef>
+          <a:fillRef idx="3">
+            <a:schemeClr val="accent1"/>
+          </a:fillRef>
+          <a:effectRef idx="2">
+            <a:schemeClr val="accent1"/>
+          </a:effectRef>
+          <a:fontRef idx="minor">
+            <a:schemeClr val="lt1"/>
+          </a:fontRef>
+        </p:style>
+        <p:txBody>
+          <a:bodyPr rtlCol="0" anchor="ctr"/>
+          <a:lstStyle/>
+          <a:p>
+            <a:pPr algn="ctr"/>
+          </a:p>
+        </p:txBody>
+      </p:sp>
+      <p:sp>
+        <p:nvSpPr>
+          <p:cNvPr id="16" name="TextBox 15"/>
+          <p:cNvSpPr txBox="1"/>
+          <p:nvPr/>
+        </p:nvSpPr>
+        <p:spPr>
+          <a:xfrm>
+            <a:off x="9528048" y="1536192"/>
+            <a:ext cx="1572768" cy="384048"/>
+          </a:xfrm>
+          <a:prstGeom prst="rect">
+            <a:avLst/>
+          </a:prstGeom>
+          <a:noFill/>
+        </p:spPr>
+        <p:txBody>
+          <a:bodyPr wrap="square" anchor="t">
+            <a:spAutoFit/>
+          </a:bodyPr>
+          <a:lstStyle/>
+          <a:p>
+            <a:pPr algn="ctr">
+              <a:lnSpc>
+                <a:spcPct val="125000"/>
+              </a:lnSpc>
+            </a:pPr>
+            <a:r>
+              <a:rPr sz="1300" b="1">
+                <a:solidFill>
+                  <a:srgbClr val="FFFFFF"/>
+                </a:solidFill>
+                <a:latin typeface="Microsoft YaHei"/>
+              </a:rPr>
+              <a:t>七段病历</a:t>
+            </a:r>
+          </a:p>
+        </p:txBody>
+      </p:sp>
+      <p:sp>
+        <p:nvSpPr>
+          <p:cNvPr id="17" name="TextBox 16"/>
+          <p:cNvSpPr txBox="1"/>
+          <p:nvPr/>
+        </p:nvSpPr>
+        <p:spPr>
+          <a:xfrm>
+            <a:off x="685800" y="2514600"/>
+            <a:ext cx="10881360" cy="548640"/>
           </a:xfrm>
           <a:prstGeom prst="rect">
             <a:avLst/>
@@ -8338,267 +9083,180 @@
           <a:p>
             <a:pPr algn="l">
               <a:lnSpc>
+                <a:spcPct val="110000"/>
+              </a:lnSpc>
+            </a:pPr>
+            <a:r>
+              <a:rPr sz="1400" b="0">
+                <a:solidFill>
+                  <a:srgbClr val="113B3A"/>
+                </a:solidFill>
+                <a:latin typeface="Microsoft YaHei"/>
+              </a:rPr>
+              <a:t>· 分诊由服务端规则引擎判定科室，模型只负责把结论转写成患者能读的一两句；可用号源由服务端实时校验</a:t>
+            </a:r>
+          </a:p>
+        </p:txBody>
+      </p:sp>
+      <p:sp>
+        <p:nvSpPr>
+          <p:cNvPr id="18" name="TextBox 17"/>
+          <p:cNvSpPr txBox="1"/>
+          <p:nvPr/>
+        </p:nvSpPr>
+        <p:spPr>
+          <a:xfrm>
+            <a:off x="685800" y="3063240"/>
+            <a:ext cx="10881360" cy="548640"/>
+          </a:xfrm>
+          <a:prstGeom prst="rect">
+            <a:avLst/>
+          </a:prstGeom>
+          <a:noFill/>
+        </p:spPr>
+        <p:txBody>
+          <a:bodyPr wrap="square" anchor="t">
+            <a:spAutoFit/>
+          </a:bodyPr>
+          <a:lstStyle/>
+          <a:p>
+            <a:pPr algn="l">
+              <a:lnSpc>
+                <a:spcPct val="110000"/>
+              </a:lnSpc>
+            </a:pPr>
+            <a:r>
+              <a:rPr sz="1400" b="0">
+                <a:solidFill>
+                  <a:srgbClr val="113B3A"/>
+                </a:solidFill>
+                <a:latin typeface="Microsoft YaHei"/>
+              </a:rPr>
+              <a:t>· 预问诊把主诉、病程、程度、伴随症状、既往史、过敏史结构化，直接喂给医生端病历</a:t>
+            </a:r>
+          </a:p>
+        </p:txBody>
+      </p:sp>
+      <p:sp>
+        <p:nvSpPr>
+          <p:cNvPr id="19" name="TextBox 18"/>
+          <p:cNvSpPr txBox="1"/>
+          <p:nvPr/>
+        </p:nvSpPr>
+        <p:spPr>
+          <a:xfrm>
+            <a:off x="685800" y="3611880"/>
+            <a:ext cx="10881360" cy="548640"/>
+          </a:xfrm>
+          <a:prstGeom prst="rect">
+            <a:avLst/>
+          </a:prstGeom>
+          <a:noFill/>
+        </p:spPr>
+        <p:txBody>
+          <a:bodyPr wrap="square" anchor="t">
+            <a:spAutoFit/>
+          </a:bodyPr>
+          <a:lstStyle/>
+          <a:p>
+            <a:pPr algn="l">
+              <a:lnSpc>
+                <a:spcPct val="110000"/>
+              </a:lnSpc>
+            </a:pPr>
+            <a:r>
+              <a:rPr sz="1400" b="0">
+                <a:solidFill>
+                  <a:srgbClr val="113B3A"/>
+                </a:solidFill>
+                <a:latin typeface="Microsoft YaHei"/>
+              </a:rPr>
+              <a:t>· 挂号走真实扣号（UPDATE … WHERE remain_num &gt; 0），列表自带科室与医生名，不用客户端拼 id</a:t>
+            </a:r>
+          </a:p>
+        </p:txBody>
+      </p:sp>
+      <p:sp>
+        <p:nvSpPr>
+          <p:cNvPr id="20" name="TextBox 19"/>
+          <p:cNvSpPr txBox="1"/>
+          <p:nvPr/>
+        </p:nvSpPr>
+        <p:spPr>
+          <a:xfrm>
+            <a:off x="685800" y="4160520"/>
+            <a:ext cx="10881360" cy="548640"/>
+          </a:xfrm>
+          <a:prstGeom prst="rect">
+            <a:avLst/>
+          </a:prstGeom>
+          <a:noFill/>
+        </p:spPr>
+        <p:txBody>
+          <a:bodyPr wrap="square" anchor="t">
+            <a:spAutoFit/>
+          </a:bodyPr>
+          <a:lstStyle/>
+          <a:p>
+            <a:pPr algn="l">
+              <a:lnSpc>
+                <a:spcPct val="110000"/>
+              </a:lnSpc>
+            </a:pPr>
+            <a:r>
+              <a:rPr sz="1400" b="0">
+                <a:solidFill>
+                  <a:srgbClr val="113B3A"/>
+                </a:solidFill>
+                <a:latin typeface="Microsoft YaHei"/>
+              </a:rPr>
+              <a:t>· 病历锁定后患者可读、不可改；医生改病历留修订历史</a:t>
+            </a:r>
+          </a:p>
+        </p:txBody>
+      </p:sp>
+      <p:sp>
+        <p:nvSpPr>
+          <p:cNvPr id="21" name="TextBox 20"/>
+          <p:cNvSpPr txBox="1"/>
+          <p:nvPr/>
+        </p:nvSpPr>
+        <p:spPr>
+          <a:xfrm>
+            <a:off x="685800" y="5440680"/>
+            <a:ext cx="10881360" cy="731520"/>
+          </a:xfrm>
+          <a:prstGeom prst="rect">
+            <a:avLst/>
+          </a:prstGeom>
+          <a:noFill/>
+        </p:spPr>
+        <p:txBody>
+          <a:bodyPr wrap="square" anchor="t">
+            <a:spAutoFit/>
+          </a:bodyPr>
+          <a:lstStyle/>
+          <a:p>
+            <a:pPr algn="l">
+              <a:lnSpc>
                 <a:spcPct val="125000"/>
               </a:lnSpc>
             </a:pPr>
             <a:r>
-              <a:rPr sz="1700" b="1">
+              <a:rPr sz="1300" b="1">
                 <a:solidFill>
                   <a:srgbClr val="0E8C82"/>
                 </a:solidFill>
                 <a:latin typeface="Microsoft YaHei"/>
               </a:rPr>
-              <a:t>降级</a:t>
-            </a:r>
-          </a:p>
-        </p:txBody>
-      </p:sp>
-      <p:sp>
-        <p:nvSpPr>
-          <p:cNvPr id="16" name="TextBox 15"/>
-          <p:cNvSpPr txBox="1"/>
-          <p:nvPr/>
-        </p:nvSpPr>
-        <p:spPr>
-          <a:xfrm>
-            <a:off x="9317736" y="1938528"/>
-            <a:ext cx="2331720" cy="1371600"/>
-          </a:xfrm>
-          <a:prstGeom prst="rect">
-            <a:avLst/>
-          </a:prstGeom>
-          <a:noFill/>
-        </p:spPr>
-        <p:txBody>
-          <a:bodyPr wrap="square" anchor="t">
-            <a:spAutoFit/>
-          </a:bodyPr>
-          <a:lstStyle/>
-          <a:p>
-            <a:pPr algn="l">
-              <a:lnSpc>
-                <a:spcPct val="130000"/>
-              </a:lnSpc>
-            </a:pPr>
-            <a:r>
-              <a:rPr sz="1200" b="0">
-                <a:solidFill>
-                  <a:srgbClr val="113B3A"/>
-                </a:solidFill>
-                <a:latin typeface="Microsoft YaHei"/>
-              </a:rPr>
-              <a:t>失败可解释</a:t>
-            </a:r>
-          </a:p>
-          <a:p>
-            <a:pPr algn="l">
-              <a:lnSpc>
-                <a:spcPct val="130000"/>
-              </a:lnSpc>
-            </a:pPr>
-            <a:r>
-              <a:rPr sz="1200" b="0">
-                <a:solidFill>
-                  <a:srgbClr val="113B3A"/>
-                </a:solidFill>
-                <a:latin typeface="Microsoft YaHei"/>
-              </a:rPr>
-              <a:t>reason=CALL_FAILED</a:t>
-            </a:r>
-          </a:p>
-          <a:p>
-            <a:pPr algn="l">
-              <a:lnSpc>
-                <a:spcPct val="130000"/>
-              </a:lnSpc>
-            </a:pPr>
-            <a:r>
-              <a:rPr sz="1200" b="0">
-                <a:solidFill>
-                  <a:srgbClr val="113B3A"/>
-                </a:solidFill>
-                <a:latin typeface="Microsoft YaHei"/>
-              </a:rPr>
-              <a:t>超时与重试有上限</a:t>
-            </a:r>
-          </a:p>
-          <a:p>
-            <a:pPr algn="l">
-              <a:lnSpc>
-                <a:spcPct val="130000"/>
-              </a:lnSpc>
-            </a:pPr>
-            <a:r>
-              <a:rPr sz="1200" b="0">
-                <a:solidFill>
-                  <a:srgbClr val="113B3A"/>
-                </a:solidFill>
-                <a:latin typeface="Microsoft YaHei"/>
-              </a:rPr>
-              <a:t>规则兜底不空转</a:t>
-            </a:r>
-          </a:p>
-        </p:txBody>
-      </p:sp>
-      <p:sp>
-        <p:nvSpPr>
-          <p:cNvPr id="17" name="TextBox 16"/>
-          <p:cNvSpPr txBox="1"/>
-          <p:nvPr/>
-        </p:nvSpPr>
-        <p:spPr>
-          <a:xfrm>
-            <a:off x="685800" y="3703320"/>
-            <a:ext cx="10881360" cy="411480"/>
-          </a:xfrm>
-          <a:prstGeom prst="rect">
-            <a:avLst/>
-          </a:prstGeom>
-          <a:noFill/>
-        </p:spPr>
-        <p:txBody>
-          <a:bodyPr wrap="square" anchor="t">
-            <a:spAutoFit/>
-          </a:bodyPr>
-          <a:lstStyle/>
-          <a:p>
-            <a:pPr algn="l">
-              <a:lnSpc>
-                <a:spcPct val="125000"/>
-              </a:lnSpc>
-            </a:pPr>
-            <a:r>
-              <a:rPr sz="1600" b="1">
-                <a:solidFill>
-                  <a:srgbClr val="113B3A"/>
-                </a:solidFill>
-                <a:latin typeface="Microsoft YaHei"/>
-              </a:rPr>
-              <a:t>现场可复现的三条命令</a:t>
-            </a:r>
-          </a:p>
-        </p:txBody>
-      </p:sp>
-      <p:sp>
-        <p:nvSpPr>
-          <p:cNvPr id="18" name="TextBox 17"/>
-          <p:cNvSpPr txBox="1"/>
-          <p:nvPr/>
-        </p:nvSpPr>
-        <p:spPr>
-          <a:xfrm>
-            <a:off x="685800" y="4160520"/>
-            <a:ext cx="10881360" cy="475488"/>
-          </a:xfrm>
-          <a:prstGeom prst="rect">
-            <a:avLst/>
-          </a:prstGeom>
-          <a:noFill/>
-        </p:spPr>
-        <p:txBody>
-          <a:bodyPr wrap="square" anchor="t">
-            <a:spAutoFit/>
-          </a:bodyPr>
-          <a:lstStyle/>
-          <a:p>
-            <a:pPr algn="l">
-              <a:lnSpc>
-                <a:spcPct val="110000"/>
-              </a:lnSpc>
-            </a:pPr>
-            <a:r>
-              <a:rPr sz="1300" b="0">
-                <a:solidFill>
-                  <a:srgbClr val="113B3A"/>
-                </a:solidFill>
-                <a:latin typeface="Microsoft YaHei"/>
-              </a:rPr>
-              <a:t>· POST /api/v1/triage  →  响应 source=model，ai_note 是真模型文本</a:t>
-            </a:r>
-          </a:p>
-        </p:txBody>
-      </p:sp>
-      <p:sp>
-        <p:nvSpPr>
-          <p:cNvPr id="19" name="TextBox 18"/>
-          <p:cNvSpPr txBox="1"/>
-          <p:nvPr/>
-        </p:nvSpPr>
-        <p:spPr>
-          <a:xfrm>
-            <a:off x="685800" y="4636008"/>
-            <a:ext cx="10881360" cy="475488"/>
-          </a:xfrm>
-          <a:prstGeom prst="rect">
-            <a:avLst/>
-          </a:prstGeom>
-          <a:noFill/>
-        </p:spPr>
-        <p:txBody>
-          <a:bodyPr wrap="square" anchor="t">
-            <a:spAutoFit/>
-          </a:bodyPr>
-          <a:lstStyle/>
-          <a:p>
-            <a:pPr algn="l">
-              <a:lnSpc>
-                <a:spcPct val="110000"/>
-              </a:lnSpc>
-            </a:pPr>
-            <a:r>
-              <a:rPr sz="1300" b="0">
-                <a:solidFill>
-                  <a:srgbClr val="113B3A"/>
-                </a:solidFill>
-                <a:latin typeface="Microsoft YaHei"/>
-              </a:rPr>
-              <a:t>· GET  /api/v1/admin/ai/triage-calls/&lt;request_id&gt;  →  used_kb=true，命中知识库 2 篇</a:t>
-            </a:r>
-          </a:p>
-        </p:txBody>
-      </p:sp>
-      <p:sp>
-        <p:nvSpPr>
-          <p:cNvPr id="20" name="TextBox 19"/>
-          <p:cNvSpPr txBox="1"/>
-          <p:nvPr/>
-        </p:nvSpPr>
-        <p:spPr>
-          <a:xfrm>
-            <a:off x="685800" y="5111496"/>
-            <a:ext cx="10881360" cy="475488"/>
-          </a:xfrm>
-          <a:prstGeom prst="rect">
-            <a:avLst/>
-          </a:prstGeom>
-          <a:noFill/>
-        </p:spPr>
-        <p:txBody>
-          <a:bodyPr wrap="square" anchor="t">
-            <a:spAutoFit/>
-          </a:bodyPr>
-          <a:lstStyle/>
-          <a:p>
-            <a:pPr algn="l">
-              <a:lnSpc>
-                <a:spcPct val="110000"/>
-              </a:lnSpc>
-            </a:pPr>
-            <a:r>
-              <a:rPr sz="1300" b="0">
-                <a:solidFill>
-                  <a:srgbClr val="113B3A"/>
-                </a:solidFill>
-                <a:latin typeface="Microsoft YaHei"/>
-              </a:rPr>
-              <a:t>· PUT  /api/v1/admin/ai/prompts/triage  →  customized=true，下一次分诊即用新模板（零重启）</a:t>
-            </a:r>
-          </a:p>
-        </p:txBody>
-      </p:sp>
-      <p:sp>
-        <p:nvSpPr>
-          <p:cNvPr id="21" name="TextBox 20"/>
+              <a:t>实测：患者 demo_patient 挂号 → 医生接诊 → 提交锁定 → 患者端「医疗档案」看到 7/7 段完整病历</a:t>
+            </a:r>
+          </a:p>
+        </p:txBody>
+      </p:sp>
+      <p:sp>
+        <p:nvSpPr>
+          <p:cNvPr id="22" name="TextBox 21"/>
           <p:cNvSpPr txBox="1"/>
           <p:nvPr/>
         </p:nvSpPr>
@@ -8630,7 +9288,7 @@
                 </a:solidFill>
                 <a:latin typeface="Microsoft YaHei"/>
               </a:rPr>
-              <a:t>5 / 10</a:t>
+              <a:t>5 / 11</a:t>
             </a:r>
           </a:p>
         </p:txBody>
@@ -8730,7 +9388,7 @@
                 </a:solidFill>
                 <a:latin typeface="Microsoft YaHei"/>
               </a:rPr>
-              <a:t>医生端：按真实接诊顺序设计</a:t>
+              <a:t>AI：真接线，不是 PPT 里的框</a:t>
             </a:r>
           </a:p>
         </p:txBody>
@@ -8769,21 +9427,66 @@
                 </a:solidFill>
                 <a:latin typeface="Microsoft YaHei"/>
               </a:rPr>
-              <a:t>队列只看该看的，病历只改该改的</a:t>
-            </a:r>
-          </a:p>
-        </p:txBody>
-      </p:sp>
-      <p:sp>
-        <p:nvSpPr>
-          <p:cNvPr id="5" name="TextBox 4"/>
-          <p:cNvSpPr txBox="1"/>
-          <p:nvPr/>
-        </p:nvSpPr>
-        <p:spPr>
-          <a:xfrm>
-            <a:off x="685800" y="1371600"/>
-            <a:ext cx="10881360" cy="566928"/>
+              <a:t>四层证据都能现场复现</a:t>
+            </a:r>
+          </a:p>
+        </p:txBody>
+      </p:sp>
+      <p:sp>
+        <p:nvSpPr>
+          <p:cNvPr id="5" name="Rounded Rectangle 4"/>
+          <p:cNvSpPr/>
+          <p:nvPr/>
+        </p:nvSpPr>
+        <p:spPr>
+          <a:xfrm>
+            <a:off x="566928" y="1325880"/>
+            <a:ext cx="2606040" cy="2148840"/>
+          </a:xfrm>
+          <a:prstGeom prst="roundRect">
+            <a:avLst/>
+          </a:prstGeom>
+          <a:solidFill>
+            <a:srgbClr val="EAF4F2"/>
+          </a:solidFill>
+          <a:ln>
+            <a:solidFill>
+              <a:srgbClr val="0E8C82"/>
+            </a:solidFill>
+          </a:ln>
+        </p:spPr>
+        <p:style>
+          <a:lnRef idx="1">
+            <a:schemeClr val="accent1"/>
+          </a:lnRef>
+          <a:fillRef idx="3">
+            <a:schemeClr val="accent1"/>
+          </a:fillRef>
+          <a:effectRef idx="2">
+            <a:schemeClr val="accent1"/>
+          </a:effectRef>
+          <a:fontRef idx="minor">
+            <a:schemeClr val="lt1"/>
+          </a:fontRef>
+        </p:style>
+        <p:txBody>
+          <a:bodyPr rtlCol="0" anchor="ctr"/>
+          <a:lstStyle/>
+          <a:p>
+            <a:pPr algn="ctr"/>
+          </a:p>
+        </p:txBody>
+      </p:sp>
+      <p:sp>
+        <p:nvSpPr>
+          <p:cNvPr id="6" name="TextBox 5"/>
+          <p:cNvSpPr txBox="1"/>
+          <p:nvPr/>
+        </p:nvSpPr>
+        <p:spPr>
+          <a:xfrm>
+            <a:off x="731520" y="1481328"/>
+            <a:ext cx="2286000" cy="365760"/>
           </a:xfrm>
           <a:prstGeom prst="rect">
             <a:avLst/>
@@ -8798,31 +9501,661 @@
           <a:p>
             <a:pPr algn="l">
               <a:lnSpc>
+                <a:spcPct val="125000"/>
+              </a:lnSpc>
+            </a:pPr>
+            <a:r>
+              <a:rPr sz="1700" b="1">
+                <a:solidFill>
+                  <a:srgbClr val="0E8C82"/>
+                </a:solidFill>
+                <a:latin typeface="Microsoft YaHei"/>
+              </a:rPr>
+              <a:t>模型</a:t>
+            </a:r>
+          </a:p>
+        </p:txBody>
+      </p:sp>
+      <p:sp>
+        <p:nvSpPr>
+          <p:cNvPr id="7" name="TextBox 6"/>
+          <p:cNvSpPr txBox="1"/>
+          <p:nvPr/>
+        </p:nvSpPr>
+        <p:spPr>
+          <a:xfrm>
+            <a:off x="731520" y="1938528"/>
+            <a:ext cx="2331720" cy="1371600"/>
+          </a:xfrm>
+          <a:prstGeom prst="rect">
+            <a:avLst/>
+          </a:prstGeom>
+          <a:noFill/>
+        </p:spPr>
+        <p:txBody>
+          <a:bodyPr wrap="square" anchor="t">
+            <a:spAutoFit/>
+          </a:bodyPr>
+          <a:lstStyle/>
+          <a:p>
+            <a:pPr algn="l">
+              <a:lnSpc>
+                <a:spcPct val="130000"/>
+              </a:lnSpc>
+            </a:pPr>
+            <a:r>
+              <a:rPr sz="1200" b="0">
+                <a:solidFill>
+                  <a:srgbClr val="113B3A"/>
+                </a:solidFill>
+                <a:latin typeface="Microsoft YaHei"/>
+              </a:rPr>
+              <a:t>deepseek-chat</a:t>
+            </a:r>
+          </a:p>
+          <a:p>
+            <a:pPr algn="l">
+              <a:lnSpc>
+                <a:spcPct val="130000"/>
+              </a:lnSpc>
+            </a:pPr>
+            <a:r>
+              <a:rPr sz="1200" b="0">
+                <a:solidFill>
+                  <a:srgbClr val="113B3A"/>
+                </a:solidFill>
+                <a:latin typeface="Microsoft YaHei"/>
+              </a:rPr>
+              <a:t>真实 HTTPS 出站</a:t>
+            </a:r>
+          </a:p>
+          <a:p>
+            <a:pPr algn="l">
+              <a:lnSpc>
+                <a:spcPct val="130000"/>
+              </a:lnSpc>
+            </a:pPr>
+            <a:r>
+              <a:rPr sz="1200" b="0">
+                <a:solidFill>
+                  <a:srgbClr val="113B3A"/>
+                </a:solidFill>
+                <a:latin typeface="Microsoft YaHei"/>
+              </a:rPr>
+              <a:t>TLS 走本地 CA bundle</a:t>
+            </a:r>
+          </a:p>
+        </p:txBody>
+      </p:sp>
+      <p:sp>
+        <p:nvSpPr>
+          <p:cNvPr id="8" name="Rounded Rectangle 7"/>
+          <p:cNvSpPr/>
+          <p:nvPr/>
+        </p:nvSpPr>
+        <p:spPr>
+          <a:xfrm>
+            <a:off x="3429000" y="1325880"/>
+            <a:ext cx="2606040" cy="2148840"/>
+          </a:xfrm>
+          <a:prstGeom prst="roundRect">
+            <a:avLst/>
+          </a:prstGeom>
+          <a:solidFill>
+            <a:srgbClr val="EAF4F2"/>
+          </a:solidFill>
+          <a:ln>
+            <a:solidFill>
+              <a:srgbClr val="0E8C82"/>
+            </a:solidFill>
+          </a:ln>
+        </p:spPr>
+        <p:style>
+          <a:lnRef idx="1">
+            <a:schemeClr val="accent1"/>
+          </a:lnRef>
+          <a:fillRef idx="3">
+            <a:schemeClr val="accent1"/>
+          </a:fillRef>
+          <a:effectRef idx="2">
+            <a:schemeClr val="accent1"/>
+          </a:effectRef>
+          <a:fontRef idx="minor">
+            <a:schemeClr val="lt1"/>
+          </a:fontRef>
+        </p:style>
+        <p:txBody>
+          <a:bodyPr rtlCol="0" anchor="ctr"/>
+          <a:lstStyle/>
+          <a:p>
+            <a:pPr algn="ctr"/>
+          </a:p>
+        </p:txBody>
+      </p:sp>
+      <p:sp>
+        <p:nvSpPr>
+          <p:cNvPr id="9" name="TextBox 8"/>
+          <p:cNvSpPr txBox="1"/>
+          <p:nvPr/>
+        </p:nvSpPr>
+        <p:spPr>
+          <a:xfrm>
+            <a:off x="3593592" y="1481328"/>
+            <a:ext cx="2286000" cy="365760"/>
+          </a:xfrm>
+          <a:prstGeom prst="rect">
+            <a:avLst/>
+          </a:prstGeom>
+          <a:noFill/>
+        </p:spPr>
+        <p:txBody>
+          <a:bodyPr wrap="square" anchor="t">
+            <a:spAutoFit/>
+          </a:bodyPr>
+          <a:lstStyle/>
+          <a:p>
+            <a:pPr algn="l">
+              <a:lnSpc>
+                <a:spcPct val="125000"/>
+              </a:lnSpc>
+            </a:pPr>
+            <a:r>
+              <a:rPr sz="1700" b="1">
+                <a:solidFill>
+                  <a:srgbClr val="0E8C82"/>
+                </a:solidFill>
+                <a:latin typeface="Microsoft YaHei"/>
+              </a:rPr>
+              <a:t>Prompt</a:t>
+            </a:r>
+          </a:p>
+        </p:txBody>
+      </p:sp>
+      <p:sp>
+        <p:nvSpPr>
+          <p:cNvPr id="10" name="TextBox 9"/>
+          <p:cNvSpPr txBox="1"/>
+          <p:nvPr/>
+        </p:nvSpPr>
+        <p:spPr>
+          <a:xfrm>
+            <a:off x="3593592" y="1938528"/>
+            <a:ext cx="2331720" cy="1371600"/>
+          </a:xfrm>
+          <a:prstGeom prst="rect">
+            <a:avLst/>
+          </a:prstGeom>
+          <a:noFill/>
+        </p:spPr>
+        <p:txBody>
+          <a:bodyPr wrap="square" anchor="t">
+            <a:spAutoFit/>
+          </a:bodyPr>
+          <a:lstStyle/>
+          <a:p>
+            <a:pPr algn="l">
+              <a:lnSpc>
+                <a:spcPct val="130000"/>
+              </a:lnSpc>
+            </a:pPr>
+            <a:r>
+              <a:rPr sz="1200" b="0">
+                <a:solidFill>
+                  <a:srgbClr val="113B3A"/>
+                </a:solidFill>
+                <a:latin typeface="Microsoft YaHei"/>
+              </a:rPr>
+              <a:t>4 个槽位</a:t>
+            </a:r>
+          </a:p>
+          <a:p>
+            <a:pPr algn="l">
+              <a:lnSpc>
+                <a:spcPct val="130000"/>
+              </a:lnSpc>
+            </a:pPr>
+            <a:r>
+              <a:rPr sz="1200" b="0">
+                <a:solidFill>
+                  <a:srgbClr val="113B3A"/>
+                </a:solidFill>
+                <a:latin typeface="Microsoft YaHei"/>
+              </a:rPr>
+              <a:t>管理者改模板零重启生效</a:t>
+            </a:r>
+          </a:p>
+          <a:p>
+            <a:pPr algn="l">
+              <a:lnSpc>
+                <a:spcPct val="130000"/>
+              </a:lnSpc>
+            </a:pPr>
+            <a:r>
+              <a:rPr sz="1200" b="0">
+                <a:solidFill>
+                  <a:srgbClr val="113B3A"/>
+                </a:solidFill>
+                <a:latin typeface="Microsoft YaHei"/>
+              </a:rPr>
+              <a:t>triage 已真接线</a:t>
+            </a:r>
+          </a:p>
+        </p:txBody>
+      </p:sp>
+      <p:sp>
+        <p:nvSpPr>
+          <p:cNvPr id="11" name="Rounded Rectangle 10"/>
+          <p:cNvSpPr/>
+          <p:nvPr/>
+        </p:nvSpPr>
+        <p:spPr>
+          <a:xfrm>
+            <a:off x="6291072" y="1325880"/>
+            <a:ext cx="2606040" cy="2148840"/>
+          </a:xfrm>
+          <a:prstGeom prst="roundRect">
+            <a:avLst/>
+          </a:prstGeom>
+          <a:solidFill>
+            <a:srgbClr val="EAF4F2"/>
+          </a:solidFill>
+          <a:ln>
+            <a:solidFill>
+              <a:srgbClr val="0E8C82"/>
+            </a:solidFill>
+          </a:ln>
+        </p:spPr>
+        <p:style>
+          <a:lnRef idx="1">
+            <a:schemeClr val="accent1"/>
+          </a:lnRef>
+          <a:fillRef idx="3">
+            <a:schemeClr val="accent1"/>
+          </a:fillRef>
+          <a:effectRef idx="2">
+            <a:schemeClr val="accent1"/>
+          </a:effectRef>
+          <a:fontRef idx="minor">
+            <a:schemeClr val="lt1"/>
+          </a:fontRef>
+        </p:style>
+        <p:txBody>
+          <a:bodyPr rtlCol="0" anchor="ctr"/>
+          <a:lstStyle/>
+          <a:p>
+            <a:pPr algn="ctr"/>
+          </a:p>
+        </p:txBody>
+      </p:sp>
+      <p:sp>
+        <p:nvSpPr>
+          <p:cNvPr id="12" name="TextBox 11"/>
+          <p:cNvSpPr txBox="1"/>
+          <p:nvPr/>
+        </p:nvSpPr>
+        <p:spPr>
+          <a:xfrm>
+            <a:off x="6455664" y="1481328"/>
+            <a:ext cx="2286000" cy="365760"/>
+          </a:xfrm>
+          <a:prstGeom prst="rect">
+            <a:avLst/>
+          </a:prstGeom>
+          <a:noFill/>
+        </p:spPr>
+        <p:txBody>
+          <a:bodyPr wrap="square" anchor="t">
+            <a:spAutoFit/>
+          </a:bodyPr>
+          <a:lstStyle/>
+          <a:p>
+            <a:pPr algn="l">
+              <a:lnSpc>
+                <a:spcPct val="125000"/>
+              </a:lnSpc>
+            </a:pPr>
+            <a:r>
+              <a:rPr sz="1700" b="1">
+                <a:solidFill>
+                  <a:srgbClr val="0E8C82"/>
+                </a:solidFill>
+                <a:latin typeface="Microsoft YaHei"/>
+              </a:rPr>
+              <a:t>知识库</a:t>
+            </a:r>
+          </a:p>
+        </p:txBody>
+      </p:sp>
+      <p:sp>
+        <p:nvSpPr>
+          <p:cNvPr id="13" name="TextBox 12"/>
+          <p:cNvSpPr txBox="1"/>
+          <p:nvPr/>
+        </p:nvSpPr>
+        <p:spPr>
+          <a:xfrm>
+            <a:off x="6455664" y="1938528"/>
+            <a:ext cx="2331720" cy="1371600"/>
+          </a:xfrm>
+          <a:prstGeom prst="rect">
+            <a:avLst/>
+          </a:prstGeom>
+          <a:noFill/>
+        </p:spPr>
+        <p:txBody>
+          <a:bodyPr wrap="square" anchor="t">
+            <a:spAutoFit/>
+          </a:bodyPr>
+          <a:lstStyle/>
+          <a:p>
+            <a:pPr algn="l">
+              <a:lnSpc>
+                <a:spcPct val="130000"/>
+              </a:lnSpc>
+            </a:pPr>
+            <a:r>
+              <a:rPr sz="1200" b="0">
+                <a:solidFill>
+                  <a:srgbClr val="113B3A"/>
+                </a:solidFill>
+                <a:latin typeface="Microsoft YaHei"/>
+              </a:rPr>
+              <a:t>关键词检索端到端</a:t>
+            </a:r>
+          </a:p>
+          <a:p>
+            <a:pPr algn="l">
+              <a:lnSpc>
+                <a:spcPct val="130000"/>
+              </a:lnSpc>
+            </a:pPr>
+            <a:r>
+              <a:rPr sz="1200" b="0">
+                <a:solidFill>
+                  <a:srgbClr val="113B3A"/>
+                </a:solidFill>
+                <a:latin typeface="Microsoft YaHei"/>
+              </a:rPr>
+              <a:t>used_kb=true 实测</a:t>
+            </a:r>
+          </a:p>
+          <a:p>
+            <a:pPr algn="l">
+              <a:lnSpc>
+                <a:spcPct val="130000"/>
+              </a:lnSpc>
+            </a:pPr>
+            <a:r>
+              <a:rPr sz="1200" b="0">
+                <a:solidFill>
+                  <a:srgbClr val="113B3A"/>
+                </a:solidFill>
+                <a:latin typeface="Microsoft YaHei"/>
+              </a:rPr>
+              <a:t>kb_doc_ids=1734,1738</a:t>
+            </a:r>
+          </a:p>
+        </p:txBody>
+      </p:sp>
+      <p:sp>
+        <p:nvSpPr>
+          <p:cNvPr id="14" name="Rounded Rectangle 13"/>
+          <p:cNvSpPr/>
+          <p:nvPr/>
+        </p:nvSpPr>
+        <p:spPr>
+          <a:xfrm>
+            <a:off x="9153144" y="1325880"/>
+            <a:ext cx="2606040" cy="2148840"/>
+          </a:xfrm>
+          <a:prstGeom prst="roundRect">
+            <a:avLst/>
+          </a:prstGeom>
+          <a:solidFill>
+            <a:srgbClr val="EAF4F2"/>
+          </a:solidFill>
+          <a:ln>
+            <a:solidFill>
+              <a:srgbClr val="0E8C82"/>
+            </a:solidFill>
+          </a:ln>
+        </p:spPr>
+        <p:style>
+          <a:lnRef idx="1">
+            <a:schemeClr val="accent1"/>
+          </a:lnRef>
+          <a:fillRef idx="3">
+            <a:schemeClr val="accent1"/>
+          </a:fillRef>
+          <a:effectRef idx="2">
+            <a:schemeClr val="accent1"/>
+          </a:effectRef>
+          <a:fontRef idx="minor">
+            <a:schemeClr val="lt1"/>
+          </a:fontRef>
+        </p:style>
+        <p:txBody>
+          <a:bodyPr rtlCol="0" anchor="ctr"/>
+          <a:lstStyle/>
+          <a:p>
+            <a:pPr algn="ctr"/>
+          </a:p>
+        </p:txBody>
+      </p:sp>
+      <p:sp>
+        <p:nvSpPr>
+          <p:cNvPr id="15" name="TextBox 14"/>
+          <p:cNvSpPr txBox="1"/>
+          <p:nvPr/>
+        </p:nvSpPr>
+        <p:spPr>
+          <a:xfrm>
+            <a:off x="9317736" y="1481328"/>
+            <a:ext cx="2286000" cy="365760"/>
+          </a:xfrm>
+          <a:prstGeom prst="rect">
+            <a:avLst/>
+          </a:prstGeom>
+          <a:noFill/>
+        </p:spPr>
+        <p:txBody>
+          <a:bodyPr wrap="square" anchor="t">
+            <a:spAutoFit/>
+          </a:bodyPr>
+          <a:lstStyle/>
+          <a:p>
+            <a:pPr algn="l">
+              <a:lnSpc>
+                <a:spcPct val="125000"/>
+              </a:lnSpc>
+            </a:pPr>
+            <a:r>
+              <a:rPr sz="1700" b="1">
+                <a:solidFill>
+                  <a:srgbClr val="0E8C82"/>
+                </a:solidFill>
+                <a:latin typeface="Microsoft YaHei"/>
+              </a:rPr>
+              <a:t>降级</a:t>
+            </a:r>
+          </a:p>
+        </p:txBody>
+      </p:sp>
+      <p:sp>
+        <p:nvSpPr>
+          <p:cNvPr id="16" name="TextBox 15"/>
+          <p:cNvSpPr txBox="1"/>
+          <p:nvPr/>
+        </p:nvSpPr>
+        <p:spPr>
+          <a:xfrm>
+            <a:off x="9317736" y="1938528"/>
+            <a:ext cx="2331720" cy="1371600"/>
+          </a:xfrm>
+          <a:prstGeom prst="rect">
+            <a:avLst/>
+          </a:prstGeom>
+          <a:noFill/>
+        </p:spPr>
+        <p:txBody>
+          <a:bodyPr wrap="square" anchor="t">
+            <a:spAutoFit/>
+          </a:bodyPr>
+          <a:lstStyle/>
+          <a:p>
+            <a:pPr algn="l">
+              <a:lnSpc>
+                <a:spcPct val="130000"/>
+              </a:lnSpc>
+            </a:pPr>
+            <a:r>
+              <a:rPr sz="1200" b="0">
+                <a:solidFill>
+                  <a:srgbClr val="113B3A"/>
+                </a:solidFill>
+                <a:latin typeface="Microsoft YaHei"/>
+              </a:rPr>
+              <a:t>失败可解释</a:t>
+            </a:r>
+          </a:p>
+          <a:p>
+            <a:pPr algn="l">
+              <a:lnSpc>
+                <a:spcPct val="130000"/>
+              </a:lnSpc>
+            </a:pPr>
+            <a:r>
+              <a:rPr sz="1200" b="0">
+                <a:solidFill>
+                  <a:srgbClr val="113B3A"/>
+                </a:solidFill>
+                <a:latin typeface="Microsoft YaHei"/>
+              </a:rPr>
+              <a:t>reason=CALL_FAILED</a:t>
+            </a:r>
+          </a:p>
+          <a:p>
+            <a:pPr algn="l">
+              <a:lnSpc>
+                <a:spcPct val="130000"/>
+              </a:lnSpc>
+            </a:pPr>
+            <a:r>
+              <a:rPr sz="1200" b="0">
+                <a:solidFill>
+                  <a:srgbClr val="113B3A"/>
+                </a:solidFill>
+                <a:latin typeface="Microsoft YaHei"/>
+              </a:rPr>
+              <a:t>超时与重试有上限</a:t>
+            </a:r>
+          </a:p>
+          <a:p>
+            <a:pPr algn="l">
+              <a:lnSpc>
+                <a:spcPct val="130000"/>
+              </a:lnSpc>
+            </a:pPr>
+            <a:r>
+              <a:rPr sz="1200" b="0">
+                <a:solidFill>
+                  <a:srgbClr val="113B3A"/>
+                </a:solidFill>
+                <a:latin typeface="Microsoft YaHei"/>
+              </a:rPr>
+              <a:t>规则兜底不空转</a:t>
+            </a:r>
+          </a:p>
+        </p:txBody>
+      </p:sp>
+      <p:sp>
+        <p:nvSpPr>
+          <p:cNvPr id="17" name="TextBox 16"/>
+          <p:cNvSpPr txBox="1"/>
+          <p:nvPr/>
+        </p:nvSpPr>
+        <p:spPr>
+          <a:xfrm>
+            <a:off x="685800" y="3703320"/>
+            <a:ext cx="10881360" cy="411480"/>
+          </a:xfrm>
+          <a:prstGeom prst="rect">
+            <a:avLst/>
+          </a:prstGeom>
+          <a:noFill/>
+        </p:spPr>
+        <p:txBody>
+          <a:bodyPr wrap="square" anchor="t">
+            <a:spAutoFit/>
+          </a:bodyPr>
+          <a:lstStyle/>
+          <a:p>
+            <a:pPr algn="l">
+              <a:lnSpc>
+                <a:spcPct val="125000"/>
+              </a:lnSpc>
+            </a:pPr>
+            <a:r>
+              <a:rPr sz="1600" b="1">
+                <a:solidFill>
+                  <a:srgbClr val="113B3A"/>
+                </a:solidFill>
+                <a:latin typeface="Microsoft YaHei"/>
+              </a:rPr>
+              <a:t>现场可复现的三条命令</a:t>
+            </a:r>
+          </a:p>
+        </p:txBody>
+      </p:sp>
+      <p:sp>
+        <p:nvSpPr>
+          <p:cNvPr id="18" name="TextBox 17"/>
+          <p:cNvSpPr txBox="1"/>
+          <p:nvPr/>
+        </p:nvSpPr>
+        <p:spPr>
+          <a:xfrm>
+            <a:off x="685800" y="4160520"/>
+            <a:ext cx="10881360" cy="475488"/>
+          </a:xfrm>
+          <a:prstGeom prst="rect">
+            <a:avLst/>
+          </a:prstGeom>
+          <a:noFill/>
+        </p:spPr>
+        <p:txBody>
+          <a:bodyPr wrap="square" anchor="t">
+            <a:spAutoFit/>
+          </a:bodyPr>
+          <a:lstStyle/>
+          <a:p>
+            <a:pPr algn="l">
+              <a:lnSpc>
                 <a:spcPct val="110000"/>
               </a:lnSpc>
             </a:pPr>
             <a:r>
-              <a:rPr sz="1400" b="0">
+              <a:rPr sz="1300" b="0">
                 <a:solidFill>
                   <a:srgbClr val="113B3A"/>
                 </a:solidFill>
                 <a:latin typeface="Microsoft YaHei"/>
               </a:rPr>
-              <a:t>· 接诊队列：按状态分段（待到院/候诊/接诊中/已完成），含历史与未来日期，未来日期不能到院登记</a:t>
-            </a:r>
-          </a:p>
-        </p:txBody>
-      </p:sp>
-      <p:sp>
-        <p:nvSpPr>
-          <p:cNvPr id="6" name="TextBox 5"/>
-          <p:cNvSpPr txBox="1"/>
-          <p:nvPr/>
-        </p:nvSpPr>
-        <p:spPr>
-          <a:xfrm>
-            <a:off x="685800" y="1938528"/>
-            <a:ext cx="10881360" cy="566928"/>
+              <a:t>· POST /api/v1/triage  →  响应 source=model，ai_note 是真模型文本</a:t>
+            </a:r>
+          </a:p>
+        </p:txBody>
+      </p:sp>
+      <p:sp>
+        <p:nvSpPr>
+          <p:cNvPr id="19" name="TextBox 18"/>
+          <p:cNvSpPr txBox="1"/>
+          <p:nvPr/>
+        </p:nvSpPr>
+        <p:spPr>
+          <a:xfrm>
+            <a:off x="685800" y="4636008"/>
+            <a:ext cx="10881360" cy="475488"/>
           </a:xfrm>
           <a:prstGeom prst="rect">
             <a:avLst/>
@@ -8841,27 +10174,27 @@
               </a:lnSpc>
             </a:pPr>
             <a:r>
-              <a:rPr sz="1400" b="0">
+              <a:rPr sz="1300" b="0">
                 <a:solidFill>
                   <a:srgbClr val="113B3A"/>
                 </a:solidFill>
                 <a:latin typeface="Microsoft YaHei"/>
               </a:rPr>
-              <a:t>· 病历七段：主诉 / 现病史 / 既往史 / 过敏史 / 体格检查 / 诊断 / 处理意见，诊断与处理意见为锁定必填</a:t>
-            </a:r>
-          </a:p>
-        </p:txBody>
-      </p:sp>
-      <p:sp>
-        <p:nvSpPr>
-          <p:cNvPr id="7" name="TextBox 6"/>
-          <p:cNvSpPr txBox="1"/>
-          <p:nvPr/>
-        </p:nvSpPr>
-        <p:spPr>
-          <a:xfrm>
-            <a:off x="685800" y="2505456"/>
-            <a:ext cx="10881360" cy="566928"/>
+              <a:t>· GET  /api/v1/admin/ai/triage-calls/&lt;request_id&gt;  →  used_kb=true，命中知识库 2 篇</a:t>
+            </a:r>
+          </a:p>
+        </p:txBody>
+      </p:sp>
+      <p:sp>
+        <p:nvSpPr>
+          <p:cNvPr id="20" name="TextBox 19"/>
+          <p:cNvSpPr txBox="1"/>
+          <p:nvPr/>
+        </p:nvSpPr>
+        <p:spPr>
+          <a:xfrm>
+            <a:off x="685800" y="5111496"/>
+            <a:ext cx="10881360" cy="475488"/>
           </a:xfrm>
           <a:prstGeom prst="rect">
             <a:avLst/>
@@ -8880,137 +10213,20 @@
               </a:lnSpc>
             </a:pPr>
             <a:r>
-              <a:rPr sz="1400" b="0">
+              <a:rPr sz="1300" b="0">
                 <a:solidFill>
                   <a:srgbClr val="113B3A"/>
                 </a:solidFill>
                 <a:latin typeface="Microsoft YaHei"/>
               </a:rPr>
-              <a:t>· 一键预填：用预问诊单**补齐空段**，医生已写的内容不覆盖（2026-10-21 从「假复制」改成真补齐）</a:t>
-            </a:r>
-          </a:p>
-        </p:txBody>
-      </p:sp>
-      <p:sp>
-        <p:nvSpPr>
-          <p:cNvPr id="8" name="TextBox 7"/>
-          <p:cNvSpPr txBox="1"/>
-          <p:nvPr/>
-        </p:nvSpPr>
-        <p:spPr>
-          <a:xfrm>
-            <a:off x="685800" y="3072384"/>
-            <a:ext cx="10881360" cy="566928"/>
-          </a:xfrm>
-          <a:prstGeom prst="rect">
-            <a:avLst/>
-          </a:prstGeom>
-          <a:noFill/>
-        </p:spPr>
-        <p:txBody>
-          <a:bodyPr wrap="square" anchor="t">
-            <a:spAutoFit/>
-          </a:bodyPr>
-          <a:lstStyle/>
-          <a:p>
-            <a:pPr algn="l">
-              <a:lnSpc>
-                <a:spcPct val="110000"/>
-              </a:lnSpc>
-            </a:pPr>
-            <a:r>
-              <a:rPr sz="1400" b="0">
-                <a:solidFill>
-                  <a:srgbClr val="113B3A"/>
-                </a:solidFill>
-                <a:latin typeface="Microsoft YaHei"/>
-              </a:rPr>
-              <a:t>· 提交锁定：锁定后不可改；重新打开要写理由，并留修订历史</a:t>
-            </a:r>
-          </a:p>
-        </p:txBody>
-      </p:sp>
-      <p:sp>
-        <p:nvSpPr>
-          <p:cNvPr id="9" name="TextBox 8"/>
-          <p:cNvSpPr txBox="1"/>
-          <p:nvPr/>
-        </p:nvSpPr>
-        <p:spPr>
-          <a:xfrm>
-            <a:off x="685800" y="3639312"/>
-            <a:ext cx="10881360" cy="566928"/>
-          </a:xfrm>
-          <a:prstGeom prst="rect">
-            <a:avLst/>
-          </a:prstGeom>
-          <a:noFill/>
-        </p:spPr>
-        <p:txBody>
-          <a:bodyPr wrap="square" anchor="t">
-            <a:spAutoFit/>
-          </a:bodyPr>
-          <a:lstStyle/>
-          <a:p>
-            <a:pPr algn="l">
-              <a:lnSpc>
-                <a:spcPct val="110000"/>
-              </a:lnSpc>
-            </a:pPr>
-            <a:r>
-              <a:rPr sz="1400" b="0">
-                <a:solidFill>
-                  <a:srgbClr val="113B3A"/>
-                </a:solidFill>
-                <a:latin typeface="Microsoft YaHei"/>
-              </a:rPr>
-              <a:t>· 隐私边界：既往病历只给本人接诊过的最近 5 份，别人的一律不返回</a:t>
-            </a:r>
-          </a:p>
-        </p:txBody>
-      </p:sp>
-      <p:sp>
-        <p:nvSpPr>
-          <p:cNvPr id="10" name="TextBox 9"/>
-          <p:cNvSpPr txBox="1"/>
-          <p:nvPr/>
-        </p:nvSpPr>
-        <p:spPr>
-          <a:xfrm>
-            <a:off x="685800" y="5715000"/>
-            <a:ext cx="10881360" cy="548640"/>
-          </a:xfrm>
-          <a:prstGeom prst="rect">
-            <a:avLst/>
-          </a:prstGeom>
-          <a:noFill/>
-        </p:spPr>
-        <p:txBody>
-          <a:bodyPr wrap="square" anchor="t">
-            <a:spAutoFit/>
-          </a:bodyPr>
-          <a:lstStyle/>
-          <a:p>
-            <a:pPr algn="l">
-              <a:lnSpc>
-                <a:spcPct val="125000"/>
-              </a:lnSpc>
-            </a:pPr>
-            <a:r>
-              <a:rPr sz="1300" b="1">
-                <a:solidFill>
-                  <a:srgbClr val="0E8C82"/>
-                </a:solidFill>
-                <a:latin typeface="Microsoft YaHei"/>
-              </a:rPr>
-              <a:t>实测：doc2e2e 接诊 → 写现病史 → 一键预填 → 现病史/既往史/过敏史当场被补齐，体检与诊断保持为空</a:t>
-            </a:r>
-          </a:p>
-        </p:txBody>
-      </p:sp>
-      <p:sp>
-        <p:nvSpPr>
-          <p:cNvPr id="11" name="TextBox 10"/>
+              <a:t>· PUT  /api/v1/admin/ai/prompts/triage  →  customized=true，下一次分诊即用新模板（零重启）</a:t>
+            </a:r>
+          </a:p>
+        </p:txBody>
+      </p:sp>
+      <p:sp>
+        <p:nvSpPr>
+          <p:cNvPr id="21" name="TextBox 20"/>
           <p:cNvSpPr txBox="1"/>
           <p:nvPr/>
         </p:nvSpPr>
@@ -9042,7 +10258,7 @@
                 </a:solidFill>
                 <a:latin typeface="Microsoft YaHei"/>
               </a:rPr>
-              <a:t>6 / 10</a:t>
+              <a:t>6 / 11</a:t>
             </a:r>
           </a:p>
         </p:txBody>
@@ -9142,7 +10358,7 @@
                 </a:solidFill>
                 <a:latin typeface="Microsoft YaHei"/>
               </a:rPr>
-              <a:t>管理端：运营看板 + 基础数据 + AI 能力中心</a:t>
+              <a:t>医生端：按真实接诊顺序设计</a:t>
             </a:r>
           </a:p>
         </p:txBody>
@@ -9181,51 +10397,47 @@
                 </a:solidFill>
                 <a:latin typeface="Microsoft YaHei"/>
               </a:rPr>
-              <a:t>每一块都能写、能改、能查</a:t>
-            </a:r>
-          </a:p>
-        </p:txBody>
-      </p:sp>
-      <p:sp>
-        <p:nvSpPr>
-          <p:cNvPr id="5" name="Rectangle 4"/>
-          <p:cNvSpPr/>
+              <a:t>队列只看该看的，病历只改该改的</a:t>
+            </a:r>
+          </a:p>
+        </p:txBody>
+      </p:sp>
+      <p:sp>
+        <p:nvSpPr>
+          <p:cNvPr id="5" name="TextBox 4"/>
+          <p:cNvSpPr txBox="1"/>
           <p:nvPr/>
         </p:nvSpPr>
         <p:spPr>
           <a:xfrm>
             <a:off x="685800" y="1371600"/>
-            <a:ext cx="82296" cy="914400"/>
-          </a:xfrm>
-          <a:prstGeom prst="rect">
-            <a:avLst/>
-          </a:prstGeom>
-          <a:solidFill>
-            <a:srgbClr val="0E8C82"/>
-          </a:solidFill>
-          <a:ln>
-            <a:noFill/>
-          </a:ln>
-        </p:spPr>
-        <p:style>
-          <a:lnRef idx="1">
-            <a:schemeClr val="accent1"/>
-          </a:lnRef>
-          <a:fillRef idx="3">
-            <a:schemeClr val="accent1"/>
-          </a:fillRef>
-          <a:effectRef idx="2">
-            <a:schemeClr val="accent1"/>
-          </a:effectRef>
-          <a:fontRef idx="minor">
-            <a:schemeClr val="lt1"/>
-          </a:fontRef>
-        </p:style>
-        <p:txBody>
-          <a:bodyPr rtlCol="0" anchor="ctr"/>
-          <a:lstStyle/>
-          <a:p>
-            <a:pPr algn="ctr"/>
+            <a:ext cx="10881360" cy="566928"/>
+          </a:xfrm>
+          <a:prstGeom prst="rect">
+            <a:avLst/>
+          </a:prstGeom>
+          <a:noFill/>
+        </p:spPr>
+        <p:txBody>
+          <a:bodyPr wrap="square" anchor="t">
+            <a:spAutoFit/>
+          </a:bodyPr>
+          <a:lstStyle/>
+          <a:p>
+            <a:pPr algn="l">
+              <a:lnSpc>
+                <a:spcPct val="110000"/>
+              </a:lnSpc>
+            </a:pPr>
+            <a:r>
+              <a:rPr sz="1400" b="0">
+                <a:solidFill>
+                  <a:srgbClr val="113B3A"/>
+                </a:solidFill>
+                <a:latin typeface="Microsoft YaHei"/>
+              </a:rPr>
+              <a:t>· 接诊队列：按状态分段（待到院/候诊/接诊中/已完成），含历史与未来日期，未来日期不能到院登记</a:t>
+            </a:r>
           </a:p>
         </p:txBody>
       </p:sp>
@@ -9237,8 +10449,8 @@
         </p:nvSpPr>
         <p:spPr>
           <a:xfrm>
-            <a:off x="914400" y="1353312"/>
-            <a:ext cx="2743200" cy="411480"/>
+            <a:off x="685800" y="1938528"/>
+            <a:ext cx="10881360" cy="566928"/>
           </a:xfrm>
           <a:prstGeom prst="rect">
             <a:avLst/>
@@ -9253,426 +10465,180 @@
           <a:p>
             <a:pPr algn="l">
               <a:lnSpc>
+                <a:spcPct val="110000"/>
+              </a:lnSpc>
+            </a:pPr>
+            <a:r>
+              <a:rPr sz="1400" b="0">
+                <a:solidFill>
+                  <a:srgbClr val="113B3A"/>
+                </a:solidFill>
+                <a:latin typeface="Microsoft YaHei"/>
+              </a:rPr>
+              <a:t>· 病历七段：主诉 / 现病史 / 既往史 / 过敏史 / 体格检查 / 诊断 / 处理意见，诊断与处理意见为锁定必填</a:t>
+            </a:r>
+          </a:p>
+        </p:txBody>
+      </p:sp>
+      <p:sp>
+        <p:nvSpPr>
+          <p:cNvPr id="7" name="TextBox 6"/>
+          <p:cNvSpPr txBox="1"/>
+          <p:nvPr/>
+        </p:nvSpPr>
+        <p:spPr>
+          <a:xfrm>
+            <a:off x="685800" y="2505456"/>
+            <a:ext cx="10881360" cy="566928"/>
+          </a:xfrm>
+          <a:prstGeom prst="rect">
+            <a:avLst/>
+          </a:prstGeom>
+          <a:noFill/>
+        </p:spPr>
+        <p:txBody>
+          <a:bodyPr wrap="square" anchor="t">
+            <a:spAutoFit/>
+          </a:bodyPr>
+          <a:lstStyle/>
+          <a:p>
+            <a:pPr algn="l">
+              <a:lnSpc>
+                <a:spcPct val="110000"/>
+              </a:lnSpc>
+            </a:pPr>
+            <a:r>
+              <a:rPr sz="1400" b="0">
+                <a:solidFill>
+                  <a:srgbClr val="113B3A"/>
+                </a:solidFill>
+                <a:latin typeface="Microsoft YaHei"/>
+              </a:rPr>
+              <a:t>· 一键预填：用预问诊单**补齐空段**，医生已写的内容不覆盖（2026-10-21 从「假复制」改成真补齐）</a:t>
+            </a:r>
+          </a:p>
+        </p:txBody>
+      </p:sp>
+      <p:sp>
+        <p:nvSpPr>
+          <p:cNvPr id="8" name="TextBox 7"/>
+          <p:cNvSpPr txBox="1"/>
+          <p:nvPr/>
+        </p:nvSpPr>
+        <p:spPr>
+          <a:xfrm>
+            <a:off x="685800" y="3072384"/>
+            <a:ext cx="10881360" cy="566928"/>
+          </a:xfrm>
+          <a:prstGeom prst="rect">
+            <a:avLst/>
+          </a:prstGeom>
+          <a:noFill/>
+        </p:spPr>
+        <p:txBody>
+          <a:bodyPr wrap="square" anchor="t">
+            <a:spAutoFit/>
+          </a:bodyPr>
+          <a:lstStyle/>
+          <a:p>
+            <a:pPr algn="l">
+              <a:lnSpc>
+                <a:spcPct val="110000"/>
+              </a:lnSpc>
+            </a:pPr>
+            <a:r>
+              <a:rPr sz="1400" b="0">
+                <a:solidFill>
+                  <a:srgbClr val="113B3A"/>
+                </a:solidFill>
+                <a:latin typeface="Microsoft YaHei"/>
+              </a:rPr>
+              <a:t>· 提交锁定：锁定后不可改；重新打开要写理由，并留修订历史</a:t>
+            </a:r>
+          </a:p>
+        </p:txBody>
+      </p:sp>
+      <p:sp>
+        <p:nvSpPr>
+          <p:cNvPr id="9" name="TextBox 8"/>
+          <p:cNvSpPr txBox="1"/>
+          <p:nvPr/>
+        </p:nvSpPr>
+        <p:spPr>
+          <a:xfrm>
+            <a:off x="685800" y="3639312"/>
+            <a:ext cx="10881360" cy="566928"/>
+          </a:xfrm>
+          <a:prstGeom prst="rect">
+            <a:avLst/>
+          </a:prstGeom>
+          <a:noFill/>
+        </p:spPr>
+        <p:txBody>
+          <a:bodyPr wrap="square" anchor="t">
+            <a:spAutoFit/>
+          </a:bodyPr>
+          <a:lstStyle/>
+          <a:p>
+            <a:pPr algn="l">
+              <a:lnSpc>
+                <a:spcPct val="110000"/>
+              </a:lnSpc>
+            </a:pPr>
+            <a:r>
+              <a:rPr sz="1400" b="0">
+                <a:solidFill>
+                  <a:srgbClr val="113B3A"/>
+                </a:solidFill>
+                <a:latin typeface="Microsoft YaHei"/>
+              </a:rPr>
+              <a:t>· 隐私边界：既往病历只给本人接诊过的最近 5 份，别人的一律不返回</a:t>
+            </a:r>
+          </a:p>
+        </p:txBody>
+      </p:sp>
+      <p:sp>
+        <p:nvSpPr>
+          <p:cNvPr id="10" name="TextBox 9"/>
+          <p:cNvSpPr txBox="1"/>
+          <p:nvPr/>
+        </p:nvSpPr>
+        <p:spPr>
+          <a:xfrm>
+            <a:off x="685800" y="5715000"/>
+            <a:ext cx="10881360" cy="548640"/>
+          </a:xfrm>
+          <a:prstGeom prst="rect">
+            <a:avLst/>
+          </a:prstGeom>
+          <a:noFill/>
+        </p:spPr>
+        <p:txBody>
+          <a:bodyPr wrap="square" anchor="t">
+            <a:spAutoFit/>
+          </a:bodyPr>
+          <a:lstStyle/>
+          <a:p>
+            <a:pPr algn="l">
+              <a:lnSpc>
                 <a:spcPct val="125000"/>
               </a:lnSpc>
             </a:pPr>
             <a:r>
-              <a:rPr sz="1700" b="1">
-                <a:solidFill>
-                  <a:srgbClr val="113B3A"/>
-                </a:solidFill>
-                <a:latin typeface="Microsoft YaHei"/>
-              </a:rPr>
-              <a:t>运营看板</a:t>
-            </a:r>
-          </a:p>
-        </p:txBody>
-      </p:sp>
-      <p:sp>
-        <p:nvSpPr>
-          <p:cNvPr id="7" name="TextBox 6"/>
-          <p:cNvSpPr txBox="1"/>
-          <p:nvPr/>
-        </p:nvSpPr>
-        <p:spPr>
-          <a:xfrm>
-            <a:off x="3749039" y="1353312"/>
-            <a:ext cx="7680960" cy="914400"/>
-          </a:xfrm>
-          <a:prstGeom prst="rect">
-            <a:avLst/>
-          </a:prstGeom>
-          <a:noFill/>
-        </p:spPr>
-        <p:txBody>
-          <a:bodyPr wrap="square" anchor="t">
-            <a:spAutoFit/>
-          </a:bodyPr>
-          <a:lstStyle/>
-          <a:p>
-            <a:pPr algn="l">
-              <a:lnSpc>
-                <a:spcPct val="125000"/>
-              </a:lnSpc>
-            </a:pPr>
-            <a:r>
-              <a:rPr sz="1300" b="0">
-                <a:solidFill>
-                  <a:srgbClr val="5B6B6A"/>
-                </a:solidFill>
-                <a:latin typeface="Microsoft YaHei"/>
-              </a:rPr>
-              <a:t>累计挂号 / 号源使用率 / 分诊调用 / 预问诊完成率 / 近 14 日趋势，全部来自真实表</a:t>
-            </a:r>
-          </a:p>
-        </p:txBody>
-      </p:sp>
-      <p:sp>
-        <p:nvSpPr>
-          <p:cNvPr id="8" name="Rectangle 7"/>
-          <p:cNvSpPr/>
-          <p:nvPr/>
-        </p:nvSpPr>
-        <p:spPr>
-          <a:xfrm>
-            <a:off x="685800" y="2542032"/>
-            <a:ext cx="82296" cy="914400"/>
-          </a:xfrm>
-          <a:prstGeom prst="rect">
-            <a:avLst/>
-          </a:prstGeom>
-          <a:solidFill>
-            <a:srgbClr val="0E8C82"/>
-          </a:solidFill>
-          <a:ln>
-            <a:noFill/>
-          </a:ln>
-        </p:spPr>
-        <p:style>
-          <a:lnRef idx="1">
-            <a:schemeClr val="accent1"/>
-          </a:lnRef>
-          <a:fillRef idx="3">
-            <a:schemeClr val="accent1"/>
-          </a:fillRef>
-          <a:effectRef idx="2">
-            <a:schemeClr val="accent1"/>
-          </a:effectRef>
-          <a:fontRef idx="minor">
-            <a:schemeClr val="lt1"/>
-          </a:fontRef>
-        </p:style>
-        <p:txBody>
-          <a:bodyPr rtlCol="0" anchor="ctr"/>
-          <a:lstStyle/>
-          <a:p>
-            <a:pPr algn="ctr"/>
-          </a:p>
-        </p:txBody>
-      </p:sp>
-      <p:sp>
-        <p:nvSpPr>
-          <p:cNvPr id="9" name="TextBox 8"/>
-          <p:cNvSpPr txBox="1"/>
-          <p:nvPr/>
-        </p:nvSpPr>
-        <p:spPr>
-          <a:xfrm>
-            <a:off x="914400" y="2523744"/>
-            <a:ext cx="2743200" cy="411480"/>
-          </a:xfrm>
-          <a:prstGeom prst="rect">
-            <a:avLst/>
-          </a:prstGeom>
-          <a:noFill/>
-        </p:spPr>
-        <p:txBody>
-          <a:bodyPr wrap="square" anchor="t">
-            <a:spAutoFit/>
-          </a:bodyPr>
-          <a:lstStyle/>
-          <a:p>
-            <a:pPr algn="l">
-              <a:lnSpc>
-                <a:spcPct val="125000"/>
-              </a:lnSpc>
-            </a:pPr>
-            <a:r>
-              <a:rPr sz="1700" b="1">
-                <a:solidFill>
-                  <a:srgbClr val="113B3A"/>
-                </a:solidFill>
-                <a:latin typeface="Microsoft YaHei"/>
-              </a:rPr>
-              <a:t>基础数据</a:t>
-            </a:r>
-          </a:p>
-        </p:txBody>
-      </p:sp>
-      <p:sp>
-        <p:nvSpPr>
-          <p:cNvPr id="10" name="TextBox 9"/>
-          <p:cNvSpPr txBox="1"/>
-          <p:nvPr/>
-        </p:nvSpPr>
-        <p:spPr>
-          <a:xfrm>
-            <a:off x="3749039" y="2523744"/>
-            <a:ext cx="7680960" cy="914400"/>
-          </a:xfrm>
-          <a:prstGeom prst="rect">
-            <a:avLst/>
-          </a:prstGeom>
-          <a:noFill/>
-        </p:spPr>
-        <p:txBody>
-          <a:bodyPr wrap="square" anchor="t">
-            <a:spAutoFit/>
-          </a:bodyPr>
-          <a:lstStyle/>
-          <a:p>
-            <a:pPr algn="l">
-              <a:lnSpc>
-                <a:spcPct val="125000"/>
-              </a:lnSpc>
-            </a:pPr>
-            <a:r>
-              <a:rPr sz="1300" b="0">
-                <a:solidFill>
-                  <a:srgbClr val="5B6B6A"/>
-                </a:solidFill>
-                <a:latin typeface="Microsoft YaHei"/>
-              </a:rPr>
-              <a:t>科室、医生有管理端 CRUD；排班与号源可增改；患者档案仍靠 SQL 维护（如实标注）</a:t>
-            </a:r>
-          </a:p>
-        </p:txBody>
-      </p:sp>
-      <p:sp>
-        <p:nvSpPr>
-          <p:cNvPr id="11" name="Rectangle 10"/>
-          <p:cNvSpPr/>
-          <p:nvPr/>
-        </p:nvSpPr>
-        <p:spPr>
-          <a:xfrm>
-            <a:off x="685800" y="3712464"/>
-            <a:ext cx="82296" cy="914400"/>
-          </a:xfrm>
-          <a:prstGeom prst="rect">
-            <a:avLst/>
-          </a:prstGeom>
-          <a:solidFill>
-            <a:srgbClr val="0E8C82"/>
-          </a:solidFill>
-          <a:ln>
-            <a:noFill/>
-          </a:ln>
-        </p:spPr>
-        <p:style>
-          <a:lnRef idx="1">
-            <a:schemeClr val="accent1"/>
-          </a:lnRef>
-          <a:fillRef idx="3">
-            <a:schemeClr val="accent1"/>
-          </a:fillRef>
-          <a:effectRef idx="2">
-            <a:schemeClr val="accent1"/>
-          </a:effectRef>
-          <a:fontRef idx="minor">
-            <a:schemeClr val="lt1"/>
-          </a:fontRef>
-        </p:style>
-        <p:txBody>
-          <a:bodyPr rtlCol="0" anchor="ctr"/>
-          <a:lstStyle/>
-          <a:p>
-            <a:pPr algn="ctr"/>
-          </a:p>
-        </p:txBody>
-      </p:sp>
-      <p:sp>
-        <p:nvSpPr>
-          <p:cNvPr id="12" name="TextBox 11"/>
-          <p:cNvSpPr txBox="1"/>
-          <p:nvPr/>
-        </p:nvSpPr>
-        <p:spPr>
-          <a:xfrm>
-            <a:off x="914400" y="3694176"/>
-            <a:ext cx="2743200" cy="411480"/>
-          </a:xfrm>
-          <a:prstGeom prst="rect">
-            <a:avLst/>
-          </a:prstGeom>
-          <a:noFill/>
-        </p:spPr>
-        <p:txBody>
-          <a:bodyPr wrap="square" anchor="t">
-            <a:spAutoFit/>
-          </a:bodyPr>
-          <a:lstStyle/>
-          <a:p>
-            <a:pPr algn="l">
-              <a:lnSpc>
-                <a:spcPct val="125000"/>
-              </a:lnSpc>
-            </a:pPr>
-            <a:r>
-              <a:rPr sz="1700" b="1">
-                <a:solidFill>
-                  <a:srgbClr val="113B3A"/>
-                </a:solidFill>
-                <a:latin typeface="Microsoft YaHei"/>
-              </a:rPr>
-              <a:t>账号与权限</a:t>
-            </a:r>
-          </a:p>
-        </p:txBody>
-      </p:sp>
-      <p:sp>
-        <p:nvSpPr>
-          <p:cNvPr id="13" name="TextBox 12"/>
-          <p:cNvSpPr txBox="1"/>
-          <p:nvPr/>
-        </p:nvSpPr>
-        <p:spPr>
-          <a:xfrm>
-            <a:off x="3749039" y="3694176"/>
-            <a:ext cx="7680960" cy="914400"/>
-          </a:xfrm>
-          <a:prstGeom prst="rect">
-            <a:avLst/>
-          </a:prstGeom>
-          <a:noFill/>
-        </p:spPr>
-        <p:txBody>
-          <a:bodyPr wrap="square" anchor="t">
-            <a:spAutoFit/>
-          </a:bodyPr>
-          <a:lstStyle/>
-          <a:p>
-            <a:pPr algn="l">
-              <a:lnSpc>
-                <a:spcPct val="125000"/>
-              </a:lnSpc>
-            </a:pPr>
-            <a:r>
-              <a:rPr sz="1300" b="0">
-                <a:solidFill>
-                  <a:srgbClr val="5B6B6A"/>
-                </a:solidFill>
-                <a:latin typeface="Microsoft YaHei"/>
-              </a:rPr>
-              <a:t>患者/医生/管理员三类账号，改密、停用、ref_id 绑定档案</a:t>
-            </a:r>
-          </a:p>
-        </p:txBody>
-      </p:sp>
-      <p:sp>
-        <p:nvSpPr>
-          <p:cNvPr id="14" name="Rectangle 13"/>
-          <p:cNvSpPr/>
-          <p:nvPr/>
-        </p:nvSpPr>
-        <p:spPr>
-          <a:xfrm>
-            <a:off x="685800" y="4882896"/>
-            <a:ext cx="82296" cy="914400"/>
-          </a:xfrm>
-          <a:prstGeom prst="rect">
-            <a:avLst/>
-          </a:prstGeom>
-          <a:solidFill>
-            <a:srgbClr val="0E8C82"/>
-          </a:solidFill>
-          <a:ln>
-            <a:noFill/>
-          </a:ln>
-        </p:spPr>
-        <p:style>
-          <a:lnRef idx="1">
-            <a:schemeClr val="accent1"/>
-          </a:lnRef>
-          <a:fillRef idx="3">
-            <a:schemeClr val="accent1"/>
-          </a:fillRef>
-          <a:effectRef idx="2">
-            <a:schemeClr val="accent1"/>
-          </a:effectRef>
-          <a:fontRef idx="minor">
-            <a:schemeClr val="lt1"/>
-          </a:fontRef>
-        </p:style>
-        <p:txBody>
-          <a:bodyPr rtlCol="0" anchor="ctr"/>
-          <a:lstStyle/>
-          <a:p>
-            <a:pPr algn="ctr"/>
-          </a:p>
-        </p:txBody>
-      </p:sp>
-      <p:sp>
-        <p:nvSpPr>
-          <p:cNvPr id="15" name="TextBox 14"/>
-          <p:cNvSpPr txBox="1"/>
-          <p:nvPr/>
-        </p:nvSpPr>
-        <p:spPr>
-          <a:xfrm>
-            <a:off x="914400" y="4864608"/>
-            <a:ext cx="2743200" cy="411480"/>
-          </a:xfrm>
-          <a:prstGeom prst="rect">
-            <a:avLst/>
-          </a:prstGeom>
-          <a:noFill/>
-        </p:spPr>
-        <p:txBody>
-          <a:bodyPr wrap="square" anchor="t">
-            <a:spAutoFit/>
-          </a:bodyPr>
-          <a:lstStyle/>
-          <a:p>
-            <a:pPr algn="l">
-              <a:lnSpc>
-                <a:spcPct val="125000"/>
-              </a:lnSpc>
-            </a:pPr>
-            <a:r>
-              <a:rPr sz="1700" b="1">
-                <a:solidFill>
-                  <a:srgbClr val="113B3A"/>
-                </a:solidFill>
-                <a:latin typeface="Microsoft YaHei"/>
-              </a:rPr>
-              <a:t>AI 能力中心</a:t>
-            </a:r>
-          </a:p>
-        </p:txBody>
-      </p:sp>
-      <p:sp>
-        <p:nvSpPr>
-          <p:cNvPr id="16" name="TextBox 15"/>
-          <p:cNvSpPr txBox="1"/>
-          <p:nvPr/>
-        </p:nvSpPr>
-        <p:spPr>
-          <a:xfrm>
-            <a:off x="3749039" y="4864608"/>
-            <a:ext cx="7680960" cy="914400"/>
-          </a:xfrm>
-          <a:prstGeom prst="rect">
-            <a:avLst/>
-          </a:prstGeom>
-          <a:noFill/>
-        </p:spPr>
-        <p:txBody>
-          <a:bodyPr wrap="square" anchor="t">
-            <a:spAutoFit/>
-          </a:bodyPr>
-          <a:lstStyle/>
-          <a:p>
-            <a:pPr algn="l">
-              <a:lnSpc>
-                <a:spcPct val="125000"/>
-              </a:lnSpc>
-            </a:pPr>
-            <a:r>
-              <a:rPr sz="1300" b="0">
-                <a:solidFill>
-                  <a:srgbClr val="5B6B6A"/>
-                </a:solidFill>
-                <a:latin typeface="Microsoft YaHei"/>
-              </a:rPr>
-              <a:t>模型配置 / Prompt 四槽位 / 工具开关 / 知识库文档，改动即时生效</a:t>
-            </a:r>
-          </a:p>
-        </p:txBody>
-      </p:sp>
-      <p:sp>
-        <p:nvSpPr>
-          <p:cNvPr id="17" name="TextBox 16"/>
+              <a:rPr sz="1300" b="1">
+                <a:solidFill>
+                  <a:srgbClr val="0E8C82"/>
+                </a:solidFill>
+                <a:latin typeface="Microsoft YaHei"/>
+              </a:rPr>
+              <a:t>实测：doc2e2e 接诊 → 写现病史 → 一键预填 → 现病史/既往史/过敏史当场被补齐，体检与诊断保持为空</a:t>
+            </a:r>
+          </a:p>
+        </p:txBody>
+      </p:sp>
+      <p:sp>
+        <p:nvSpPr>
+          <p:cNvPr id="11" name="TextBox 10"/>
           <p:cNvSpPr txBox="1"/>
           <p:nvPr/>
         </p:nvSpPr>
@@ -9704,7 +10670,7 @@
                 </a:solidFill>
                 <a:latin typeface="Microsoft YaHei"/>
               </a:rPr>
-              <a:t>7 / 10</a:t>
+              <a:t>7 / 11</a:t>
             </a:r>
           </a:p>
         </p:txBody>
@@ -9804,7 +10770,7 @@
                 </a:solidFill>
                 <a:latin typeface="Microsoft YaHei"/>
               </a:rPr>
-              <a:t>工程与质量：数字都是跑出来的</a:t>
+              <a:t>管理端：运营看板 + 基础数据 + AI 能力中心</a:t>
             </a:r>
           </a:p>
         </p:txBody>
@@ -9843,29 +10809,54 @@
                 </a:solidFill>
                 <a:latin typeface="Microsoft YaHei"/>
               </a:rPr>
-              <a:t>同一份源码，同一套断言，谁都能复跑</a:t>
-            </a:r>
-          </a:p>
-        </p:txBody>
-      </p:sp>
-      <p:graphicFrame>
-        <p:nvGraphicFramePr>
-          <p:cNvPr id="5" name="Chart 4"/>
-          <p:cNvGraphicFramePr>
-            <a:graphicFrameLocks noGrp="1"/>
-          </p:cNvGraphicFramePr>
-          <p:nvPr/>
-        </p:nvGraphicFramePr>
-        <p:xfrm>
-          <a:off x="548640" y="1280160"/>
-          <a:ext cx="6583680" cy="4206240"/>
-        </p:xfrm>
-        <a:graphic>
-          <a:graphicData uri="http://schemas.openxmlformats.org/drawingml/2006/chart">
-            <c:chart xmlns:c="http://schemas.openxmlformats.org/drawingml/2006/chart" r:id="rId2"/>
-          </a:graphicData>
-        </a:graphic>
-      </p:graphicFrame>
+              <a:t>每一块都能写、能改、能查</a:t>
+            </a:r>
+          </a:p>
+        </p:txBody>
+      </p:sp>
+      <p:sp>
+        <p:nvSpPr>
+          <p:cNvPr id="5" name="Rectangle 4"/>
+          <p:cNvSpPr/>
+          <p:nvPr/>
+        </p:nvSpPr>
+        <p:spPr>
+          <a:xfrm>
+            <a:off x="685800" y="1371600"/>
+            <a:ext cx="82296" cy="914400"/>
+          </a:xfrm>
+          <a:prstGeom prst="rect">
+            <a:avLst/>
+          </a:prstGeom>
+          <a:solidFill>
+            <a:srgbClr val="0E8C82"/>
+          </a:solidFill>
+          <a:ln>
+            <a:noFill/>
+          </a:ln>
+        </p:spPr>
+        <p:style>
+          <a:lnRef idx="1">
+            <a:schemeClr val="accent1"/>
+          </a:lnRef>
+          <a:fillRef idx="3">
+            <a:schemeClr val="accent1"/>
+          </a:fillRef>
+          <a:effectRef idx="2">
+            <a:schemeClr val="accent1"/>
+          </a:effectRef>
+          <a:fontRef idx="minor">
+            <a:schemeClr val="lt1"/>
+          </a:fontRef>
+        </p:style>
+        <p:txBody>
+          <a:bodyPr rtlCol="0" anchor="ctr"/>
+          <a:lstStyle/>
+          <a:p>
+            <a:pPr algn="ctr"/>
+          </a:p>
+        </p:txBody>
+      </p:sp>
       <p:sp>
         <p:nvSpPr>
           <p:cNvPr id="6" name="TextBox 5"/>
@@ -9874,8 +10865,8 @@
         </p:nvSpPr>
         <p:spPr>
           <a:xfrm>
-            <a:off x="7406640" y="1417320"/>
-            <a:ext cx="4297680" cy="868680"/>
+            <a:off x="914400" y="1353312"/>
+            <a:ext cx="2743200" cy="411480"/>
           </a:xfrm>
           <a:prstGeom prst="rect">
             <a:avLst/>
@@ -9890,17 +10881,17 @@
           <a:p>
             <a:pPr algn="l">
               <a:lnSpc>
-                <a:spcPct val="110000"/>
-              </a:lnSpc>
-            </a:pPr>
-            <a:r>
-              <a:rPr sz="1200" b="0">
+                <a:spcPct val="125000"/>
+              </a:lnSpc>
+            </a:pPr>
+            <a:r>
+              <a:rPr sz="1700" b="1">
                 <a:solidFill>
                   <a:srgbClr val="113B3A"/>
                 </a:solidFill>
                 <a:latin typeface="Microsoft YaHei"/>
               </a:rPr>
-              <a:t>▪ accept：821 条（需 MariaDB，跑在独立测试库）</a:t>
+              <a:t>运营看板</a:t>
             </a:r>
           </a:p>
         </p:txBody>
@@ -9913,8 +10904,8 @@
         </p:nvSpPr>
         <p:spPr>
           <a:xfrm>
-            <a:off x="7406640" y="2286000"/>
-            <a:ext cx="4297680" cy="868680"/>
+            <a:off x="3749039" y="1353312"/>
+            <a:ext cx="7680960" cy="914400"/>
           </a:xfrm>
           <a:prstGeom prst="rect">
             <a:avLst/>
@@ -9929,31 +10920,113 @@
           <a:p>
             <a:pPr algn="l">
               <a:lnSpc>
-                <a:spcPct val="110000"/>
-              </a:lnSpc>
-            </a:pPr>
-            <a:r>
-              <a:rPr sz="1200" b="0">
+                <a:spcPct val="125000"/>
+              </a:lnSpc>
+            </a:pPr>
+            <a:r>
+              <a:rPr sz="1300" b="0">
+                <a:solidFill>
+                  <a:srgbClr val="5B6B6A"/>
+                </a:solidFill>
+                <a:latin typeface="Microsoft YaHei"/>
+              </a:rPr>
+              <a:t>累计挂号 / 号源使用率 / 分诊调用 / 预问诊完成率 / 近 14 日趋势，全部来自真实表</a:t>
+            </a:r>
+          </a:p>
+        </p:txBody>
+      </p:sp>
+      <p:sp>
+        <p:nvSpPr>
+          <p:cNvPr id="8" name="Rectangle 7"/>
+          <p:cNvSpPr/>
+          <p:nvPr/>
+        </p:nvSpPr>
+        <p:spPr>
+          <a:xfrm>
+            <a:off x="685800" y="2542032"/>
+            <a:ext cx="82296" cy="914400"/>
+          </a:xfrm>
+          <a:prstGeom prst="rect">
+            <a:avLst/>
+          </a:prstGeom>
+          <a:solidFill>
+            <a:srgbClr val="0E8C82"/>
+          </a:solidFill>
+          <a:ln>
+            <a:noFill/>
+          </a:ln>
+        </p:spPr>
+        <p:style>
+          <a:lnRef idx="1">
+            <a:schemeClr val="accent1"/>
+          </a:lnRef>
+          <a:fillRef idx="3">
+            <a:schemeClr val="accent1"/>
+          </a:fillRef>
+          <a:effectRef idx="2">
+            <a:schemeClr val="accent1"/>
+          </a:effectRef>
+          <a:fontRef idx="minor">
+            <a:schemeClr val="lt1"/>
+          </a:fontRef>
+        </p:style>
+        <p:txBody>
+          <a:bodyPr rtlCol="0" anchor="ctr"/>
+          <a:lstStyle/>
+          <a:p>
+            <a:pPr algn="ctr"/>
+          </a:p>
+        </p:txBody>
+      </p:sp>
+      <p:sp>
+        <p:nvSpPr>
+          <p:cNvPr id="9" name="TextBox 8"/>
+          <p:cNvSpPr txBox="1"/>
+          <p:nvPr/>
+        </p:nvSpPr>
+        <p:spPr>
+          <a:xfrm>
+            <a:off x="914400" y="2523744"/>
+            <a:ext cx="2743200" cy="411480"/>
+          </a:xfrm>
+          <a:prstGeom prst="rect">
+            <a:avLst/>
+          </a:prstGeom>
+          <a:noFill/>
+        </p:spPr>
+        <p:txBody>
+          <a:bodyPr wrap="square" anchor="t">
+            <a:spAutoFit/>
+          </a:bodyPr>
+          <a:lstStyle/>
+          <a:p>
+            <a:pPr algn="l">
+              <a:lnSpc>
+                <a:spcPct val="125000"/>
+              </a:lnSpc>
+            </a:pPr>
+            <a:r>
+              <a:rPr sz="1700" b="1">
                 <a:solidFill>
                   <a:srgbClr val="113B3A"/>
                 </a:solidFill>
                 <a:latin typeface="Microsoft YaHei"/>
               </a:rPr>
-              <a:t>▪ 纯逻辑：selftest / authtest / triagetest 不需要数据库</a:t>
-            </a:r>
-          </a:p>
-        </p:txBody>
-      </p:sp>
-      <p:sp>
-        <p:nvSpPr>
-          <p:cNvPr id="8" name="TextBox 7"/>
-          <p:cNvSpPr txBox="1"/>
-          <p:nvPr/>
-        </p:nvSpPr>
-        <p:spPr>
-          <a:xfrm>
-            <a:off x="7406640" y="3154680"/>
-            <a:ext cx="4297680" cy="868680"/>
+              <a:t>基础数据</a:t>
+            </a:r>
+          </a:p>
+        </p:txBody>
+      </p:sp>
+      <p:sp>
+        <p:nvSpPr>
+          <p:cNvPr id="10" name="TextBox 9"/>
+          <p:cNvSpPr txBox="1"/>
+          <p:nvPr/>
+        </p:nvSpPr>
+        <p:spPr>
+          <a:xfrm>
+            <a:off x="3749039" y="2523744"/>
+            <a:ext cx="7680960" cy="914400"/>
           </a:xfrm>
           <a:prstGeom prst="rect">
             <a:avLst/>
@@ -9968,31 +11041,113 @@
           <a:p>
             <a:pPr algn="l">
               <a:lnSpc>
-                <a:spcPct val="110000"/>
-              </a:lnSpc>
-            </a:pPr>
-            <a:r>
-              <a:rPr sz="1200" b="0">
+                <a:spcPct val="125000"/>
+              </a:lnSpc>
+            </a:pPr>
+            <a:r>
+              <a:rPr sz="1300" b="0">
+                <a:solidFill>
+                  <a:srgbClr val="5B6B6A"/>
+                </a:solidFill>
+                <a:latin typeface="Microsoft YaHei"/>
+              </a:rPr>
+              <a:t>科室、医生有管理端 CRUD；排班与号源可增改；患者档案仍靠 SQL 维护（如实标注）</a:t>
+            </a:r>
+          </a:p>
+        </p:txBody>
+      </p:sp>
+      <p:sp>
+        <p:nvSpPr>
+          <p:cNvPr id="11" name="Rectangle 10"/>
+          <p:cNvSpPr/>
+          <p:nvPr/>
+        </p:nvSpPr>
+        <p:spPr>
+          <a:xfrm>
+            <a:off x="685800" y="3712464"/>
+            <a:ext cx="82296" cy="914400"/>
+          </a:xfrm>
+          <a:prstGeom prst="rect">
+            <a:avLst/>
+          </a:prstGeom>
+          <a:solidFill>
+            <a:srgbClr val="0E8C82"/>
+          </a:solidFill>
+          <a:ln>
+            <a:noFill/>
+          </a:ln>
+        </p:spPr>
+        <p:style>
+          <a:lnRef idx="1">
+            <a:schemeClr val="accent1"/>
+          </a:lnRef>
+          <a:fillRef idx="3">
+            <a:schemeClr val="accent1"/>
+          </a:fillRef>
+          <a:effectRef idx="2">
+            <a:schemeClr val="accent1"/>
+          </a:effectRef>
+          <a:fontRef idx="minor">
+            <a:schemeClr val="lt1"/>
+          </a:fontRef>
+        </p:style>
+        <p:txBody>
+          <a:bodyPr rtlCol="0" anchor="ctr"/>
+          <a:lstStyle/>
+          <a:p>
+            <a:pPr algn="ctr"/>
+          </a:p>
+        </p:txBody>
+      </p:sp>
+      <p:sp>
+        <p:nvSpPr>
+          <p:cNvPr id="12" name="TextBox 11"/>
+          <p:cNvSpPr txBox="1"/>
+          <p:nvPr/>
+        </p:nvSpPr>
+        <p:spPr>
+          <a:xfrm>
+            <a:off x="914400" y="3694176"/>
+            <a:ext cx="2743200" cy="411480"/>
+          </a:xfrm>
+          <a:prstGeom prst="rect">
+            <a:avLst/>
+          </a:prstGeom>
+          <a:noFill/>
+        </p:spPr>
+        <p:txBody>
+          <a:bodyPr wrap="square" anchor="t">
+            <a:spAutoFit/>
+          </a:bodyPr>
+          <a:lstStyle/>
+          <a:p>
+            <a:pPr algn="l">
+              <a:lnSpc>
+                <a:spcPct val="125000"/>
+              </a:lnSpc>
+            </a:pPr>
+            <a:r>
+              <a:rPr sz="1700" b="1">
                 <a:solidFill>
                   <a:srgbClr val="113B3A"/>
                 </a:solidFill>
                 <a:latin typeface="Microsoft YaHei"/>
               </a:rPr>
-              <a:t>▪ CI：仓库卫生 + 纯逻辑两 job；缺工具链时 SKIP 而不是假绿</a:t>
-            </a:r>
-          </a:p>
-        </p:txBody>
-      </p:sp>
-      <p:sp>
-        <p:nvSpPr>
-          <p:cNvPr id="9" name="TextBox 8"/>
-          <p:cNvSpPr txBox="1"/>
-          <p:nvPr/>
-        </p:nvSpPr>
-        <p:spPr>
-          <a:xfrm>
-            <a:off x="7406640" y="4023359"/>
-            <a:ext cx="4297680" cy="868680"/>
+              <a:t>账号与权限</a:t>
+            </a:r>
+          </a:p>
+        </p:txBody>
+      </p:sp>
+      <p:sp>
+        <p:nvSpPr>
+          <p:cNvPr id="13" name="TextBox 12"/>
+          <p:cNvSpPr txBox="1"/>
+          <p:nvPr/>
+        </p:nvSpPr>
+        <p:spPr>
+          <a:xfrm>
+            <a:off x="3749039" y="3694176"/>
+            <a:ext cx="7680960" cy="914400"/>
           </a:xfrm>
           <a:prstGeom prst="rect">
             <a:avLst/>
@@ -10007,31 +11162,113 @@
           <a:p>
             <a:pPr algn="l">
               <a:lnSpc>
-                <a:spcPct val="110000"/>
-              </a:lnSpc>
-            </a:pPr>
-            <a:r>
-              <a:rPr sz="1200" b="0">
+                <a:spcPct val="125000"/>
+              </a:lnSpc>
+            </a:pPr>
+            <a:r>
+              <a:rPr sz="1300" b="0">
+                <a:solidFill>
+                  <a:srgbClr val="5B6B6A"/>
+                </a:solidFill>
+                <a:latin typeface="Microsoft YaHei"/>
+              </a:rPr>
+              <a:t>患者/医生/管理员三类账号，改密、停用、ref_id 绑定档案</a:t>
+            </a:r>
+          </a:p>
+        </p:txBody>
+      </p:sp>
+      <p:sp>
+        <p:nvSpPr>
+          <p:cNvPr id="14" name="Rectangle 13"/>
+          <p:cNvSpPr/>
+          <p:nvPr/>
+        </p:nvSpPr>
+        <p:spPr>
+          <a:xfrm>
+            <a:off x="685800" y="4882896"/>
+            <a:ext cx="82296" cy="914400"/>
+          </a:xfrm>
+          <a:prstGeom prst="rect">
+            <a:avLst/>
+          </a:prstGeom>
+          <a:solidFill>
+            <a:srgbClr val="0E8C82"/>
+          </a:solidFill>
+          <a:ln>
+            <a:noFill/>
+          </a:ln>
+        </p:spPr>
+        <p:style>
+          <a:lnRef idx="1">
+            <a:schemeClr val="accent1"/>
+          </a:lnRef>
+          <a:fillRef idx="3">
+            <a:schemeClr val="accent1"/>
+          </a:fillRef>
+          <a:effectRef idx="2">
+            <a:schemeClr val="accent1"/>
+          </a:effectRef>
+          <a:fontRef idx="minor">
+            <a:schemeClr val="lt1"/>
+          </a:fontRef>
+        </p:style>
+        <p:txBody>
+          <a:bodyPr rtlCol="0" anchor="ctr"/>
+          <a:lstStyle/>
+          <a:p>
+            <a:pPr algn="ctr"/>
+          </a:p>
+        </p:txBody>
+      </p:sp>
+      <p:sp>
+        <p:nvSpPr>
+          <p:cNvPr id="15" name="TextBox 14"/>
+          <p:cNvSpPr txBox="1"/>
+          <p:nvPr/>
+        </p:nvSpPr>
+        <p:spPr>
+          <a:xfrm>
+            <a:off x="914400" y="4864608"/>
+            <a:ext cx="2743200" cy="411480"/>
+          </a:xfrm>
+          <a:prstGeom prst="rect">
+            <a:avLst/>
+          </a:prstGeom>
+          <a:noFill/>
+        </p:spPr>
+        <p:txBody>
+          <a:bodyPr wrap="square" anchor="t">
+            <a:spAutoFit/>
+          </a:bodyPr>
+          <a:lstStyle/>
+          <a:p>
+            <a:pPr algn="l">
+              <a:lnSpc>
+                <a:spcPct val="125000"/>
+              </a:lnSpc>
+            </a:pPr>
+            <a:r>
+              <a:rPr sz="1700" b="1">
                 <a:solidFill>
                   <a:srgbClr val="113B3A"/>
                 </a:solidFill>
                 <a:latin typeface="Microsoft YaHei"/>
               </a:rPr>
-              <a:t>▪ 门禁：文档链接、数字对账、交付快照三道脚本化校验</a:t>
-            </a:r>
-          </a:p>
-        </p:txBody>
-      </p:sp>
-      <p:sp>
-        <p:nvSpPr>
-          <p:cNvPr id="10" name="TextBox 9"/>
-          <p:cNvSpPr txBox="1"/>
-          <p:nvPr/>
-        </p:nvSpPr>
-        <p:spPr>
-          <a:xfrm>
-            <a:off x="685800" y="5715000"/>
-            <a:ext cx="10881360" cy="457200"/>
+              <a:t>AI 能力中心</a:t>
+            </a:r>
+          </a:p>
+        </p:txBody>
+      </p:sp>
+      <p:sp>
+        <p:nvSpPr>
+          <p:cNvPr id="16" name="TextBox 15"/>
+          <p:cNvSpPr txBox="1"/>
+          <p:nvPr/>
+        </p:nvSpPr>
+        <p:spPr>
+          <a:xfrm>
+            <a:off x="3749039" y="4864608"/>
+            <a:ext cx="7680960" cy="914400"/>
           </a:xfrm>
           <a:prstGeom prst="rect">
             <a:avLst/>
@@ -10050,20 +11287,20 @@
               </a:lnSpc>
             </a:pPr>
             <a:r>
-              <a:rPr sz="1200" b="0">
+              <a:rPr sz="1300" b="0">
                 <a:solidFill>
                   <a:srgbClr val="5B6B6A"/>
                 </a:solidFill>
                 <a:latin typeface="Microsoft YaHei"/>
               </a:rPr>
-              <a:t>76 个参与编译的源文件 = 38 业务 .cj + 38 框架 .cj（框架快照共 46 个，8 个不进编译）；增量构建 2 s 381 ms（65 tasks / 38 up-to-date，非 clean 构建）</a:t>
-            </a:r>
-          </a:p>
-        </p:txBody>
-      </p:sp>
-      <p:sp>
-        <p:nvSpPr>
-          <p:cNvPr id="11" name="TextBox 10"/>
+              <a:t>模型配置 / Prompt 四槽位 / 工具开关 / 知识库文档，改动即时生效</a:t>
+            </a:r>
+          </a:p>
+        </p:txBody>
+      </p:sp>
+      <p:sp>
+        <p:nvSpPr>
+          <p:cNvPr id="17" name="TextBox 16"/>
           <p:cNvSpPr txBox="1"/>
           <p:nvPr/>
         </p:nvSpPr>
@@ -10095,7 +11332,7 @@
                 </a:solidFill>
                 <a:latin typeface="Microsoft YaHei"/>
               </a:rPr>
-              <a:t>8 / 10</a:t>
+              <a:t>8 / 11</a:t>
             </a:r>
           </a:p>
         </p:txBody>
@@ -10195,7 +11432,7 @@
                 </a:solidFill>
                 <a:latin typeface="Microsoft YaHei"/>
               </a:rPr>
-              <a:t>真实性与合规：把边界写在明面上</a:t>
+              <a:t>工程与质量：数字都是跑出来的</a:t>
             </a:r>
           </a:p>
         </p:txBody>
@@ -10234,21 +11471,39 @@
                 </a:solidFill>
                 <a:latin typeface="Microsoft YaHei"/>
               </a:rPr>
-              <a:t>比「看起来很强」更重要的是「经得起问」</a:t>
-            </a:r>
-          </a:p>
-        </p:txBody>
-      </p:sp>
-      <p:sp>
-        <p:nvSpPr>
-          <p:cNvPr id="5" name="TextBox 4"/>
-          <p:cNvSpPr txBox="1"/>
-          <p:nvPr/>
-        </p:nvSpPr>
-        <p:spPr>
-          <a:xfrm>
-            <a:off x="685800" y="1371600"/>
-            <a:ext cx="3108960" cy="411480"/>
+              <a:t>同一份源码，同一套断言，谁都能复跑</a:t>
+            </a:r>
+          </a:p>
+        </p:txBody>
+      </p:sp>
+      <p:graphicFrame>
+        <p:nvGraphicFramePr>
+          <p:cNvPr id="5" name="Chart 4"/>
+          <p:cNvGraphicFramePr>
+            <a:graphicFrameLocks noGrp="1"/>
+          </p:cNvGraphicFramePr>
+          <p:nvPr/>
+        </p:nvGraphicFramePr>
+        <p:xfrm>
+          <a:off x="548640" y="1280160"/>
+          <a:ext cx="6583680" cy="4206240"/>
+        </p:xfrm>
+        <a:graphic>
+          <a:graphicData uri="http://schemas.openxmlformats.org/drawingml/2006/chart">
+            <c:chart xmlns:c="http://schemas.openxmlformats.org/drawingml/2006/chart" r:id="rId2"/>
+          </a:graphicData>
+        </a:graphic>
+      </p:graphicFrame>
+      <p:sp>
+        <p:nvSpPr>
+          <p:cNvPr id="6" name="TextBox 5"/>
+          <p:cNvSpPr txBox="1"/>
+          <p:nvPr/>
+        </p:nvSpPr>
+        <p:spPr>
+          <a:xfrm>
+            <a:off x="7406640" y="1417320"/>
+            <a:ext cx="4297680" cy="868680"/>
           </a:xfrm>
           <a:prstGeom prst="rect">
             <a:avLst/>
@@ -10263,212 +11518,173 @@
           <a:p>
             <a:pPr algn="l">
               <a:lnSpc>
+                <a:spcPct val="110000"/>
+              </a:lnSpc>
+            </a:pPr>
+            <a:r>
+              <a:rPr sz="1200" b="0">
+                <a:solidFill>
+                  <a:srgbClr val="113B3A"/>
+                </a:solidFill>
+                <a:latin typeface="Microsoft YaHei"/>
+              </a:rPr>
+              <a:t>▪ accept：821 条（需 MariaDB，跑在独立测试库）</a:t>
+            </a:r>
+          </a:p>
+        </p:txBody>
+      </p:sp>
+      <p:sp>
+        <p:nvSpPr>
+          <p:cNvPr id="7" name="TextBox 6"/>
+          <p:cNvSpPr txBox="1"/>
+          <p:nvPr/>
+        </p:nvSpPr>
+        <p:spPr>
+          <a:xfrm>
+            <a:off x="7406640" y="2286000"/>
+            <a:ext cx="4297680" cy="868680"/>
+          </a:xfrm>
+          <a:prstGeom prst="rect">
+            <a:avLst/>
+          </a:prstGeom>
+          <a:noFill/>
+        </p:spPr>
+        <p:txBody>
+          <a:bodyPr wrap="square" anchor="t">
+            <a:spAutoFit/>
+          </a:bodyPr>
+          <a:lstStyle/>
+          <a:p>
+            <a:pPr algn="l">
+              <a:lnSpc>
+                <a:spcPct val="110000"/>
+              </a:lnSpc>
+            </a:pPr>
+            <a:r>
+              <a:rPr sz="1200" b="0">
+                <a:solidFill>
+                  <a:srgbClr val="113B3A"/>
+                </a:solidFill>
+                <a:latin typeface="Microsoft YaHei"/>
+              </a:rPr>
+              <a:t>▪ 纯逻辑：selftest / authtest / triagetest 不需要数据库</a:t>
+            </a:r>
+          </a:p>
+        </p:txBody>
+      </p:sp>
+      <p:sp>
+        <p:nvSpPr>
+          <p:cNvPr id="8" name="TextBox 7"/>
+          <p:cNvSpPr txBox="1"/>
+          <p:nvPr/>
+        </p:nvSpPr>
+        <p:spPr>
+          <a:xfrm>
+            <a:off x="7406640" y="3154680"/>
+            <a:ext cx="4297680" cy="868680"/>
+          </a:xfrm>
+          <a:prstGeom prst="rect">
+            <a:avLst/>
+          </a:prstGeom>
+          <a:noFill/>
+        </p:spPr>
+        <p:txBody>
+          <a:bodyPr wrap="square" anchor="t">
+            <a:spAutoFit/>
+          </a:bodyPr>
+          <a:lstStyle/>
+          <a:p>
+            <a:pPr algn="l">
+              <a:lnSpc>
+                <a:spcPct val="110000"/>
+              </a:lnSpc>
+            </a:pPr>
+            <a:r>
+              <a:rPr sz="1200" b="0">
+                <a:solidFill>
+                  <a:srgbClr val="113B3A"/>
+                </a:solidFill>
+                <a:latin typeface="Microsoft YaHei"/>
+              </a:rPr>
+              <a:t>▪ CI：仓库卫生 + 纯逻辑两 job；缺工具链时 SKIP 而不是假绿</a:t>
+            </a:r>
+          </a:p>
+        </p:txBody>
+      </p:sp>
+      <p:sp>
+        <p:nvSpPr>
+          <p:cNvPr id="9" name="TextBox 8"/>
+          <p:cNvSpPr txBox="1"/>
+          <p:nvPr/>
+        </p:nvSpPr>
+        <p:spPr>
+          <a:xfrm>
+            <a:off x="7406640" y="4023359"/>
+            <a:ext cx="4297680" cy="868680"/>
+          </a:xfrm>
+          <a:prstGeom prst="rect">
+            <a:avLst/>
+          </a:prstGeom>
+          <a:noFill/>
+        </p:spPr>
+        <p:txBody>
+          <a:bodyPr wrap="square" anchor="t">
+            <a:spAutoFit/>
+          </a:bodyPr>
+          <a:lstStyle/>
+          <a:p>
+            <a:pPr algn="l">
+              <a:lnSpc>
+                <a:spcPct val="110000"/>
+              </a:lnSpc>
+            </a:pPr>
+            <a:r>
+              <a:rPr sz="1200" b="0">
+                <a:solidFill>
+                  <a:srgbClr val="113B3A"/>
+                </a:solidFill>
+                <a:latin typeface="Microsoft YaHei"/>
+              </a:rPr>
+              <a:t>▪ 门禁：文档链接、数字对账、交付快照三道脚本化校验</a:t>
+            </a:r>
+          </a:p>
+        </p:txBody>
+      </p:sp>
+      <p:sp>
+        <p:nvSpPr>
+          <p:cNvPr id="10" name="TextBox 9"/>
+          <p:cNvSpPr txBox="1"/>
+          <p:nvPr/>
+        </p:nvSpPr>
+        <p:spPr>
+          <a:xfrm>
+            <a:off x="685800" y="5715000"/>
+            <a:ext cx="10881360" cy="457200"/>
+          </a:xfrm>
+          <a:prstGeom prst="rect">
+            <a:avLst/>
+          </a:prstGeom>
+          <a:noFill/>
+        </p:spPr>
+        <p:txBody>
+          <a:bodyPr wrap="square" anchor="t">
+            <a:spAutoFit/>
+          </a:bodyPr>
+          <a:lstStyle/>
+          <a:p>
+            <a:pPr algn="l">
+              <a:lnSpc>
                 <a:spcPct val="125000"/>
               </a:lnSpc>
             </a:pPr>
             <a:r>
-              <a:rPr sz="1500" b="1">
-                <a:solidFill>
-                  <a:srgbClr val="0E8C82"/>
-                </a:solidFill>
-                <a:latin typeface="Microsoft YaHei"/>
-              </a:rPr>
-              <a:t>AI 工具使用声明</a:t>
-            </a:r>
-          </a:p>
-        </p:txBody>
-      </p:sp>
-      <p:sp>
-        <p:nvSpPr>
-          <p:cNvPr id="6" name="TextBox 5"/>
-          <p:cNvSpPr txBox="1"/>
-          <p:nvPr/>
-        </p:nvSpPr>
-        <p:spPr>
-          <a:xfrm>
-            <a:off x="3886200" y="1371600"/>
-            <a:ext cx="7589520" cy="822960"/>
-          </a:xfrm>
-          <a:prstGeom prst="rect">
-            <a:avLst/>
-          </a:prstGeom>
-          <a:noFill/>
-        </p:spPr>
-        <p:txBody>
-          <a:bodyPr wrap="square" anchor="t">
-            <a:spAutoFit/>
-          </a:bodyPr>
-          <a:lstStyle/>
-          <a:p>
-            <a:pPr algn="l">
-              <a:lnSpc>
-                <a:spcPct val="120000"/>
-              </a:lnSpc>
-            </a:pPr>
-            <a:r>
-              <a:rPr sz="1300" b="0">
-                <a:solidFill>
-                  <a:srgbClr val="113B3A"/>
-                </a:solidFill>
-                <a:latin typeface="Microsoft YaHei"/>
-              </a:rPr>
-              <a:t>产品内 AI 与开发期 AI 分开写；模型、范围、核心代码归属都有出处</a:t>
-            </a:r>
-          </a:p>
-        </p:txBody>
-      </p:sp>
-      <p:sp>
-        <p:nvSpPr>
-          <p:cNvPr id="7" name="TextBox 6"/>
-          <p:cNvSpPr txBox="1"/>
-          <p:nvPr/>
-        </p:nvSpPr>
-        <p:spPr>
-          <a:xfrm>
-            <a:off x="685800" y="2304288"/>
-            <a:ext cx="3108960" cy="411480"/>
-          </a:xfrm>
-          <a:prstGeom prst="rect">
-            <a:avLst/>
-          </a:prstGeom>
-          <a:noFill/>
-        </p:spPr>
-        <p:txBody>
-          <a:bodyPr wrap="square" anchor="t">
-            <a:spAutoFit/>
-          </a:bodyPr>
-          <a:lstStyle/>
-          <a:p>
-            <a:pPr algn="l">
-              <a:lnSpc>
-                <a:spcPct val="125000"/>
-              </a:lnSpc>
-            </a:pPr>
-            <a:r>
-              <a:rPr sz="1500" b="1">
-                <a:solidFill>
-                  <a:srgbClr val="0E8C82"/>
-                </a:solidFill>
-                <a:latin typeface="Microsoft YaHei"/>
-              </a:rPr>
-              <a:t>内置演示密钥</a:t>
-            </a:r>
-          </a:p>
-        </p:txBody>
-      </p:sp>
-      <p:sp>
-        <p:nvSpPr>
-          <p:cNvPr id="8" name="TextBox 7"/>
-          <p:cNvSpPr txBox="1"/>
-          <p:nvPr/>
-        </p:nvSpPr>
-        <p:spPr>
-          <a:xfrm>
-            <a:off x="3886200" y="2304288"/>
-            <a:ext cx="7589520" cy="822960"/>
-          </a:xfrm>
-          <a:prstGeom prst="rect">
-            <a:avLst/>
-          </a:prstGeom>
-          <a:noFill/>
-        </p:spPr>
-        <p:txBody>
-          <a:bodyPr wrap="square" anchor="t">
-            <a:spAutoFit/>
-          </a:bodyPr>
-          <a:lstStyle/>
-          <a:p>
-            <a:pPr algn="l">
-              <a:lnSpc>
-                <a:spcPct val="120000"/>
-              </a:lnSpc>
-            </a:pPr>
-            <a:r>
-              <a:rPr sz="1300" b="0">
-                <a:solidFill>
-                  <a:srgbClr val="113B3A"/>
-                </a:solidFill>
-                <a:latin typeface="Microsoft YaHei"/>
-              </a:rPr>
-              <a:t>开箱即用但**限时**（2026-12-31 到期自动拒绝），换法一条命令</a:t>
-            </a:r>
-          </a:p>
-        </p:txBody>
-      </p:sp>
-      <p:sp>
-        <p:nvSpPr>
-          <p:cNvPr id="9" name="TextBox 8"/>
-          <p:cNvSpPr txBox="1"/>
-          <p:nvPr/>
-        </p:nvSpPr>
-        <p:spPr>
-          <a:xfrm>
-            <a:off x="685800" y="3236976"/>
-            <a:ext cx="3108960" cy="411480"/>
-          </a:xfrm>
-          <a:prstGeom prst="rect">
-            <a:avLst/>
-          </a:prstGeom>
-          <a:noFill/>
-        </p:spPr>
-        <p:txBody>
-          <a:bodyPr wrap="square" anchor="t">
-            <a:spAutoFit/>
-          </a:bodyPr>
-          <a:lstStyle/>
-          <a:p>
-            <a:pPr algn="l">
-              <a:lnSpc>
-                <a:spcPct val="125000"/>
-              </a:lnSpc>
-            </a:pPr>
-            <a:r>
-              <a:rPr sz="1500" b="1">
-                <a:solidFill>
-                  <a:srgbClr val="0E8C82"/>
-                </a:solidFill>
-                <a:latin typeface="Microsoft YaHei"/>
-              </a:rPr>
-              <a:t>许可证</a:t>
-            </a:r>
-          </a:p>
-        </p:txBody>
-      </p:sp>
-      <p:sp>
-        <p:nvSpPr>
-          <p:cNvPr id="10" name="TextBox 9"/>
-          <p:cNvSpPr txBox="1"/>
-          <p:nvPr/>
-        </p:nvSpPr>
-        <p:spPr>
-          <a:xfrm>
-            <a:off x="3886200" y="3236976"/>
-            <a:ext cx="7589520" cy="822960"/>
-          </a:xfrm>
-          <a:prstGeom prst="rect">
-            <a:avLst/>
-          </a:prstGeom>
-          <a:noFill/>
-        </p:spPr>
-        <p:txBody>
-          <a:bodyPr wrap="square" anchor="t">
-            <a:spAutoFit/>
-          </a:bodyPr>
-          <a:lstStyle/>
-          <a:p>
-            <a:pPr algn="l">
-              <a:lnSpc>
-                <a:spcPct val="120000"/>
-              </a:lnSpc>
-            </a:pPr>
-            <a:r>
-              <a:rPr sz="1300" b="0">
-                <a:solidFill>
-                  <a:srgbClr val="113B3A"/>
-                </a:solidFill>
-                <a:latin typeface="Microsoft YaHei"/>
-              </a:rPr>
-              <a:t>本项目 MIT；框架 MIT、驱动 Apache-2.0；仓颉运行时 Apache-2.0 含 Runtime Library Exception</a:t>
+              <a:rPr sz="1200" b="0">
+                <a:solidFill>
+                  <a:srgbClr val="5B6B6A"/>
+                </a:solidFill>
+                <a:latin typeface="Microsoft YaHei"/>
+              </a:rPr>
+              <a:t>76 个参与编译的源文件 = 38 业务 .cj + 38 框架 .cj（框架快照共 46 个，8 个不进编译）；构建 2 s 381 ms</a:t>
             </a:r>
           </a:p>
         </p:txBody>
@@ -10476,162 +11692,6 @@
       <p:sp>
         <p:nvSpPr>
           <p:cNvPr id="11" name="TextBox 10"/>
-          <p:cNvSpPr txBox="1"/>
-          <p:nvPr/>
-        </p:nvSpPr>
-        <p:spPr>
-          <a:xfrm>
-            <a:off x="685800" y="4169664"/>
-            <a:ext cx="3108960" cy="411480"/>
-          </a:xfrm>
-          <a:prstGeom prst="rect">
-            <a:avLst/>
-          </a:prstGeom>
-          <a:noFill/>
-        </p:spPr>
-        <p:txBody>
-          <a:bodyPr wrap="square" anchor="t">
-            <a:spAutoFit/>
-          </a:bodyPr>
-          <a:lstStyle/>
-          <a:p>
-            <a:pPr algn="l">
-              <a:lnSpc>
-                <a:spcPct val="125000"/>
-              </a:lnSpc>
-            </a:pPr>
-            <a:r>
-              <a:rPr sz="1500" b="1">
-                <a:solidFill>
-                  <a:srgbClr val="0E8C82"/>
-                </a:solidFill>
-                <a:latin typeface="Microsoft YaHei"/>
-              </a:rPr>
-              <a:t>分发包</a:t>
-            </a:r>
-          </a:p>
-        </p:txBody>
-      </p:sp>
-      <p:sp>
-        <p:nvSpPr>
-          <p:cNvPr id="12" name="TextBox 11"/>
-          <p:cNvSpPr txBox="1"/>
-          <p:nvPr/>
-        </p:nvSpPr>
-        <p:spPr>
-          <a:xfrm>
-            <a:off x="3886200" y="4169664"/>
-            <a:ext cx="7589520" cy="822960"/>
-          </a:xfrm>
-          <a:prstGeom prst="rect">
-            <a:avLst/>
-          </a:prstGeom>
-          <a:noFill/>
-        </p:spPr>
-        <p:txBody>
-          <a:bodyPr wrap="square" anchor="t">
-            <a:spAutoFit/>
-          </a:bodyPr>
-          <a:lstStyle/>
-          <a:p>
-            <a:pPr algn="l">
-              <a:lnSpc>
-                <a:spcPct val="120000"/>
-              </a:lnSpc>
-            </a:pPr>
-            <a:r>
-              <a:rPr sz="1300" b="0">
-                <a:solidFill>
-                  <a:srgbClr val="113B3A"/>
-                </a:solidFill>
-                <a:latin typeface="Microsoft YaHei"/>
-              </a:rPr>
-              <a:t>25 个文件，含 LICENSE / NOTICE / THIRD-PARTY.md 与 licenses/ 下 6 份全文</a:t>
-            </a:r>
-          </a:p>
-        </p:txBody>
-      </p:sp>
-      <p:sp>
-        <p:nvSpPr>
-          <p:cNvPr id="13" name="TextBox 12"/>
-          <p:cNvSpPr txBox="1"/>
-          <p:nvPr/>
-        </p:nvSpPr>
-        <p:spPr>
-          <a:xfrm>
-            <a:off x="685800" y="5102352"/>
-            <a:ext cx="3108960" cy="411480"/>
-          </a:xfrm>
-          <a:prstGeom prst="rect">
-            <a:avLst/>
-          </a:prstGeom>
-          <a:noFill/>
-        </p:spPr>
-        <p:txBody>
-          <a:bodyPr wrap="square" anchor="t">
-            <a:spAutoFit/>
-          </a:bodyPr>
-          <a:lstStyle/>
-          <a:p>
-            <a:pPr algn="l">
-              <a:lnSpc>
-                <a:spcPct val="125000"/>
-              </a:lnSpc>
-            </a:pPr>
-            <a:r>
-              <a:rPr sz="1500" b="1">
-                <a:solidFill>
-                  <a:srgbClr val="0E8C82"/>
-                </a:solidFill>
-                <a:latin typeface="Microsoft YaHei"/>
-              </a:rPr>
-              <a:t>如实标注的缺口</a:t>
-            </a:r>
-          </a:p>
-        </p:txBody>
-      </p:sp>
-      <p:sp>
-        <p:nvSpPr>
-          <p:cNvPr id="14" name="TextBox 13"/>
-          <p:cNvSpPr txBox="1"/>
-          <p:nvPr/>
-        </p:nvSpPr>
-        <p:spPr>
-          <a:xfrm>
-            <a:off x="3886200" y="5102352"/>
-            <a:ext cx="7589520" cy="822960"/>
-          </a:xfrm>
-          <a:prstGeom prst="rect">
-            <a:avLst/>
-          </a:prstGeom>
-          <a:noFill/>
-        </p:spPr>
-        <p:txBody>
-          <a:bodyPr wrap="square" anchor="t">
-            <a:spAutoFit/>
-          </a:bodyPr>
-          <a:lstStyle/>
-          <a:p>
-            <a:pPr algn="l">
-              <a:lnSpc>
-                <a:spcPct val="120000"/>
-              </a:lnSpc>
-            </a:pPr>
-            <a:r>
-              <a:rPr sz="1300" b="0">
-                <a:solidFill>
-                  <a:srgbClr val="113B3A"/>
-                </a:solidFill>
-                <a:latin typeface="Microsoft YaHei"/>
-              </a:rPr>
-              <a:t>向量检索未接（关键词为默认）；工具开关是预留闸门，生产路径无派发器</a:t>
-            </a:r>
-          </a:p>
-        </p:txBody>
-      </p:sp>
-      <p:sp>
-        <p:nvSpPr>
-          <p:cNvPr id="15" name="TextBox 14"/>
           <p:cNvSpPr txBox="1"/>
           <p:nvPr/>
         </p:nvSpPr>
@@ -10663,7 +11723,7 @@
                 </a:solidFill>
                 <a:latin typeface="Microsoft YaHei"/>
               </a:rPr>
-              <a:t>9 / 10</a:t>
+              <a:t>9 / 11</a:t>
             </a:r>
           </a:p>
         </p:txBody>
